--- a/docs/GateFlow_Presentation.pptx
+++ b/docs/GateFlow_Presentation.pptx
@@ -20,9 +20,11 @@
     <p:sldId id="268" r:id="rId14"/>
     <p:sldId id="269" r:id="rId15"/>
     <p:sldId id="270" r:id="rId16"/>
+    <p:sldId id="271" r:id="rId17"/>
+    <p:sldId id="272" r:id="rId18"/>
   </p:sldIdLst>
   <p:notesMasterIdLst>
-    <p:notesMasterId r:id="rId17"/>
+    <p:notesMasterId r:id="rId19"/>
   </p:notesMasterIdLst>
   <p:sldSz cx="12192000" cy="6858000"/>
   <p:notesSz cx="6858000" cy="12192000"/>
@@ -121,51 +123,53 @@
   <p:extLst>
     <p:ext uri="{521415D9-36F7-43E2-AB2F-B90AF26B5E84}">
       <p14:sectionLst xmlns:p14="http://schemas.microsoft.com/office/powerpoint/2010/main">
-        <p14:section name="Opening" id="{9d90c980-0efd-bc64-d530-978009314f41}">
+        <p14:section name="Opening" id="{fecafe7d-e736-d4f9-62a9-59562e9cf620}">
           <p14:sldIdLst>
             <p14:sldId id="256"/>
           </p14:sldIdLst>
         </p14:section>
-        <p14:section name="1 Problem &amp; users" id="{de568a54-a4b6-0dac-790f-d895b864d009}">
+        <p14:section name="1 Problem &amp; users" id="{820d566d-9c68-e4de-ff73-c89eb742dedc}">
           <p14:sldIdLst>
             <p14:sldId id="257"/>
           </p14:sldIdLst>
         </p14:section>
-        <p14:section name="2 Idea &amp; innovation" id="{17eb03b9-d0e5-f9a6-035e-c4cbd62c4d03}">
+        <p14:section name="2 Idea &amp; innovation" id="{bb8f3385-c520-8e6a-87af-6745b1f59412}">
           <p14:sldIdLst>
             <p14:sldId id="258"/>
           </p14:sldIdLst>
         </p14:section>
-        <p14:section name="3 Architecture &amp; approach" id="{59a6dc20-69ba-c7f3-374e-82978de77b30}">
+        <p14:section name="3 Architecture &amp; approach" id="{84afb2db-4f88-ef58-6927-d585d062f25a}">
           <p14:sldIdLst>
             <p14:sldId id="259"/>
             <p14:sldId id="260"/>
             <p14:sldId id="261"/>
           </p14:sldIdLst>
         </p14:section>
-        <p14:section name="4 Prototype demo" id="{e7b48491-7c1d-bae8-03db-3840db5625d4}">
+        <p14:section name="4 Prototype demo" id="{b5b30d96-9510-9ff7-6f3f-1df18ad62fbe}">
           <p14:sldIdLst>
             <p14:sldId id="262"/>
             <p14:sldId id="263"/>
+            <p14:sldId id="264"/>
+            <p14:sldId id="265"/>
           </p14:sldIdLst>
         </p14:section>
-        <p14:section name="5 Testing &amp; results" id="{e4b2a619-bfe8-ed22-4bf3-b2eeb457136f}">
+        <p14:section name="5 Testing &amp; results" id="{b5f76ab0-2742-0c20-6967-19cb0c21fc3b}">
           <p14:sldIdLst>
-            <p14:sldId id="264"/>
-            <p14:sldId id="265"/>
             <p14:sldId id="266"/>
-          </p14:sldIdLst>
-        </p14:section>
-        <p14:section name="6 Responsible AI &amp; SDGs" id="{744400f5-ae38-5d7d-dac9-7a1dadf1ec44}">
-          <p14:sldIdLst>
             <p14:sldId id="267"/>
             <p14:sldId id="268"/>
           </p14:sldIdLst>
         </p14:section>
-        <p14:section name="7 Conclusion" id="{fb72946a-6b80-e599-1dcb-e5f19632ffdf}">
+        <p14:section name="6 Responsible AI &amp; SDGs" id="{b9a1ec3c-9e03-494b-af36-581e24e5cd7b}">
           <p14:sldIdLst>
             <p14:sldId id="269"/>
             <p14:sldId id="270"/>
+          </p14:sldIdLst>
+        </p14:section>
+        <p14:section name="7 Conclusion" id="{e1cf5abe-7cb8-278c-0770-b48675a54400}">
+          <p14:sldIdLst>
+            <p14:sldId id="271"/>
+            <p14:sldId id="272"/>
           </p14:sldIdLst>
         </p14:section>
       </p14:sectionLst>
@@ -1259,7 +1263,7 @@
           <a:p>
             <a:r>
               <a:rPr lang="en-US" dirty="0"/>
-              <a:t>Show failures honestly. Most mistakes sit right at a level boundary. The worst miss followed a quiet early morning with a sudden surge. Ten cases are in the report and on the website's performance tab.</a:t>
+              <a:t>Live demo: open the Agentic AI tab, pick Accident blocks the road, press Run agent and let the steps appear. Then show the rumour scenario: the agent refuses to raise an alarm on an unverified post and asks a human to check. That is responsible AI in action.</a:t>
             </a:r>
             <a:endParaRPr lang="en-US" dirty="0"/>
           </a:p>
@@ -1347,7 +1351,7 @@
           <a:p>
             <a:r>
               <a:rPr lang="en-US" dirty="0"/>
-              <a:t>Recent traffic and usual traffic for the slot dominate. Be upfront about the limits: no live feed, a stand-in road, volume-based labels, hourly resolution, and no campus calendar.</a:t>
+              <a:t>Results on the held-out year: macro-F1 0.73 against 0.61 for the best baseline. Explain macro-F1: it checks each level fairly, unlike accuracy. The alert catches 4 of 5 jams with about one false alarm a week.</a:t>
             </a:r>
             <a:endParaRPr lang="en-US" dirty="0"/>
           </a:p>
@@ -1435,7 +1439,7 @@
           <a:p>
             <a:r>
               <a:rPr lang="en-US" dirty="0"/>
-              <a:t>Cover the six responsible-AI areas: privacy, bias, security, accessibility, limitations and human oversight. The key point is that GateFlow advises and a person decides.</a:t>
+              <a:t>Show failures honestly. Most mistakes sit right at a level boundary. The worst miss followed a quiet early morning with a sudden surge. Ten cases are in the report and on the website's performance tab.</a:t>
             </a:r>
             <a:endParaRPr lang="en-US" dirty="0"/>
           </a:p>
@@ -1523,7 +1527,7 @@
           <a:p>
             <a:r>
               <a:rPr lang="en-US" dirty="0"/>
-              <a:t>The main goal is SDG 11.2, safe and sustainable transport, supported by health (SDG 3), climate (SDG 13), infrastructure (SDG 9) and education (SDG 4).</a:t>
+              <a:t>Recent traffic and usual traffic for the slot dominate. Be upfront about the limits: no live feed, a stand-in road, volume-based labels, hourly resolution, and no campus calendar.</a:t>
             </a:r>
             <a:endParaRPr lang="en-US" dirty="0"/>
           </a:p>
@@ -1611,7 +1615,7 @@
           <a:p>
             <a:r>
               <a:rPr lang="en-US" dirty="0"/>
-              <a:t>Close by separating what works today from what is planned. The most important next step is our own gate counts, which need no code changes.</a:t>
+              <a:t>Cover the six responsible-AI areas: privacy, bias, security, accessibility, limitations and human oversight. The key point is that GateFlow advises and a person decides.</a:t>
             </a:r>
             <a:endParaRPr lang="en-US" dirty="0"/>
           </a:p>
@@ -1699,7 +1703,7 @@
           <a:p>
             <a:r>
               <a:rPr lang="en-US" dirty="0"/>
-              <a:t>Thank the judges and invite questions. Have the website open for the live demo.</a:t>
+              <a:t>The main goal is SDG 11.2, safe and sustainable transport, supported by health (SDG 3), climate (SDG 13), infrastructure (SDG 9) and education (SDG 4).</a:t>
             </a:r>
             <a:endParaRPr lang="en-US" dirty="0"/>
           </a:p>
@@ -1723,6 +1727,182 @@
             <a:fld id="{F7021451-1387-4CA6-816F-3879F97B5CBC}" type="slidenum">
               <a:rPr lang="en-US"/>
               <a:t>15</a:t>
+            </a:fld>
+            <a:endParaRPr lang="en-US"/>
+          </a:p>
+        </p:txBody>
+      </p:sp>
+    </p:spTree>
+    <p:extLst>
+      <p:ext uri="{BB962C8B-B14F-4D97-AF65-F5344CB8AC3E}">
+        <p14:creationId xmlns:p14="http://schemas.microsoft.com/office/powerpoint/2010/main" val="1024086991"/>
+      </p:ext>
+    </p:extLst>
+  </p:cSld>
+  <p:clrMapOvr>
+    <a:masterClrMapping/>
+  </p:clrMapOvr>
+</p:notes>
+</file>
+
+<file path=ppt/notesSlides/notesSlide16.xml><?xml version="1.0" encoding="utf-8"?>
+<p:notes xmlns:a="http://schemas.openxmlformats.org/drawingml/2006/main" xmlns:r="http://schemas.openxmlformats.org/officeDocument/2006/relationships" xmlns:p="http://schemas.openxmlformats.org/presentationml/2006/main">
+  <p:cSld>
+    <p:spTree>
+      <p:nvGrpSpPr>
+        <p:cNvPr id="1" name=""/>
+        <p:cNvGrpSpPr/>
+        <p:nvPr/>
+      </p:nvGrpSpPr>
+      <p:grpSpPr>
+        <a:xfrm>
+          <a:off x="0" y="0"/>
+          <a:ext cx="0" cy="0"/>
+          <a:chOff x="0" y="0"/>
+          <a:chExt cx="0" cy="0"/>
+        </a:xfrm>
+      </p:grpSpPr>
+      <p:sp>
+        <p:nvSpPr>
+          <p:cNvPr id="2" name="Slide Image Placeholder 1"/>
+          <p:cNvSpPr>
+            <a:spLocks noGrp="1" noRot="1" noChangeAspect="1"/>
+          </p:cNvSpPr>
+          <p:nvPr>
+            <p:ph type="sldImg"/>
+          </p:nvPr>
+        </p:nvSpPr>
+        <p:spPr/>
+      </p:sp>
+      <p:sp>
+        <p:nvSpPr>
+          <p:cNvPr id="3" name="Notes Placeholder 2"/>
+          <p:cNvSpPr>
+            <a:spLocks noGrp="1"/>
+          </p:cNvSpPr>
+          <p:nvPr>
+            <p:ph type="body" idx="1"/>
+          </p:nvPr>
+        </p:nvSpPr>
+        <p:spPr/>
+        <p:txBody>
+          <a:bodyPr/>
+          <a:lstStyle/>
+          <a:p>
+            <a:r>
+              <a:rPr lang="en-US" dirty="0"/>
+              <a:t>Close by separating what works today from what is planned. The most important next step is our own gate counts, which need no code changes.</a:t>
+            </a:r>
+            <a:endParaRPr lang="en-US" dirty="0"/>
+          </a:p>
+        </p:txBody>
+      </p:sp>
+      <p:sp>
+        <p:nvSpPr>
+          <p:cNvPr id="4" name="Slide Number Placeholder 3"/>
+          <p:cNvSpPr>
+            <a:spLocks noGrp="1"/>
+          </p:cNvSpPr>
+          <p:nvPr>
+            <p:ph type="sldNum" sz="quarter" idx="10"/>
+          </p:nvPr>
+        </p:nvSpPr>
+        <p:spPr/>
+        <p:txBody>
+          <a:bodyPr/>
+          <a:lstStyle/>
+          <a:p>
+            <a:fld id="{F7021451-1387-4CA6-816F-3879F97B5CBC}" type="slidenum">
+              <a:rPr lang="en-US"/>
+              <a:t>16</a:t>
+            </a:fld>
+            <a:endParaRPr lang="en-US"/>
+          </a:p>
+        </p:txBody>
+      </p:sp>
+    </p:spTree>
+    <p:extLst>
+      <p:ext uri="{BB962C8B-B14F-4D97-AF65-F5344CB8AC3E}">
+        <p14:creationId xmlns:p14="http://schemas.microsoft.com/office/powerpoint/2010/main" val="1024086991"/>
+      </p:ext>
+    </p:extLst>
+  </p:cSld>
+  <p:clrMapOvr>
+    <a:masterClrMapping/>
+  </p:clrMapOvr>
+</p:notes>
+</file>
+
+<file path=ppt/notesSlides/notesSlide17.xml><?xml version="1.0" encoding="utf-8"?>
+<p:notes xmlns:a="http://schemas.openxmlformats.org/drawingml/2006/main" xmlns:r="http://schemas.openxmlformats.org/officeDocument/2006/relationships" xmlns:p="http://schemas.openxmlformats.org/presentationml/2006/main">
+  <p:cSld>
+    <p:spTree>
+      <p:nvGrpSpPr>
+        <p:cNvPr id="1" name=""/>
+        <p:cNvGrpSpPr/>
+        <p:nvPr/>
+      </p:nvGrpSpPr>
+      <p:grpSpPr>
+        <a:xfrm>
+          <a:off x="0" y="0"/>
+          <a:ext cx="0" cy="0"/>
+          <a:chOff x="0" y="0"/>
+          <a:chExt cx="0" cy="0"/>
+        </a:xfrm>
+      </p:grpSpPr>
+      <p:sp>
+        <p:nvSpPr>
+          <p:cNvPr id="2" name="Slide Image Placeholder 1"/>
+          <p:cNvSpPr>
+            <a:spLocks noGrp="1" noRot="1" noChangeAspect="1"/>
+          </p:cNvSpPr>
+          <p:nvPr>
+            <p:ph type="sldImg"/>
+          </p:nvPr>
+        </p:nvSpPr>
+        <p:spPr/>
+      </p:sp>
+      <p:sp>
+        <p:nvSpPr>
+          <p:cNvPr id="3" name="Notes Placeholder 2"/>
+          <p:cNvSpPr>
+            <a:spLocks noGrp="1"/>
+          </p:cNvSpPr>
+          <p:nvPr>
+            <p:ph type="body" idx="1"/>
+          </p:nvPr>
+        </p:nvSpPr>
+        <p:spPr/>
+        <p:txBody>
+          <a:bodyPr/>
+          <a:lstStyle/>
+          <a:p>
+            <a:r>
+              <a:rPr lang="en-US" dirty="0"/>
+              <a:t>Thank the judges and invite questions. Have the website open for the live demo.</a:t>
+            </a:r>
+            <a:endParaRPr lang="en-US" dirty="0"/>
+          </a:p>
+        </p:txBody>
+      </p:sp>
+      <p:sp>
+        <p:nvSpPr>
+          <p:cNvPr id="4" name="Slide Number Placeholder 3"/>
+          <p:cNvSpPr>
+            <a:spLocks noGrp="1"/>
+          </p:cNvSpPr>
+          <p:nvPr>
+            <p:ph type="sldNum" sz="quarter" idx="10"/>
+          </p:nvPr>
+        </p:nvSpPr>
+        <p:spPr/>
+        <p:txBody>
+          <a:bodyPr/>
+          <a:lstStyle/>
+          <a:p>
+            <a:fld id="{F7021451-1387-4CA6-816F-3879F97B5CBC}" type="slidenum">
+              <a:rPr lang="en-US"/>
+              <a:t>17</a:t>
             </a:fld>
             <a:endParaRPr lang="en-US"/>
           </a:p>
@@ -2403,7 +2583,7 @@
           <a:p>
             <a:r>
               <a:rPr lang="en-US" dirty="0"/>
-              <a:t>Results on the held-out year: macro-F1 0.73 against 0.61 for the best baseline. Explain macro-F1: it checks each level fairly, unlike accuracy. The alert catches 4 of 5 jams with about one false alarm a week.</a:t>
+              <a:t>ML learns from history, so it cannot see one-off events like a crash or a closed road. The agent starts from the ML forecast and runs a loop: observe, plan, act by calling tools (government incident feed, roadworks permits, news), reason about route and timing, reflect by cross-checking sources, then decide. If the road is blocked, it overrides the forecast to High. It never alerts on a rumour alone. The ML model itself is unchanged.</a:t>
             </a:r>
             <a:endParaRPr lang="en-US" dirty="0"/>
           </a:p>
@@ -3198,15 +3378,1763 @@
                   <a:srgbClr val="1E2329"/>
                 </a:solidFill>
               </a:rPr>
-              <a:t>Test cases: where it works and where it fails</a:t>
+              <a:t>Demo: a blocked road turns Moderate into a High alert</a:t>
             </a:r>
             <a:endParaRPr lang="en-US" sz="3200" dirty="0"/>
+          </a:p>
+        </p:txBody>
+      </p:sp>
+      <p:pic>
+        <p:nvPicPr>
+          <p:cNvPr id="3" name="agent-shot" descr="Agentic AI tab: ML says Moderate 13%, the agent finds a confirmed crash and raises it to High 97% with diversion actions">    </p:cNvPr>
+          <p:cNvPicPr>
+            <a:picLocks noChangeAspect="1"/>
+          </p:cNvPicPr>
+          <p:nvPr/>
+        </p:nvPicPr>
+        <p:blipFill>
+          <a:blip r:embed="rId1"/>
+          <a:stretch>
+            <a:fillRect/>
+          </a:stretch>
+        </p:blipFill>
+        <p:spPr>
+          <a:xfrm>
+            <a:off x="548640" y="1280160"/>
+            <a:ext cx="6858000" cy="3097161"/>
+          </a:xfrm>
+          <a:prstGeom prst="rect">
+            <a:avLst/>
+          </a:prstGeom>
+        </p:spPr>
+      </p:pic>
+      <p:sp>
+        <p:nvSpPr>
+          <p:cNvPr id="4" name="Text 1"/>
+          <p:cNvSpPr txBox="1"/>
+          <p:nvPr/>
+        </p:nvSpPr>
+        <p:spPr>
+          <a:xfrm>
+            <a:off x="548640" y="4651641"/>
+            <a:ext cx="6858000" cy="1554480"/>
+          </a:xfrm>
+          <a:prstGeom prst="rect">
+            <a:avLst/>
+          </a:prstGeom>
+          <a:noFill/>
+          <a:ln/>
+        </p:spPr>
+        <p:txBody>
+          <a:bodyPr wrap="square" lIns="0" tIns="0" rIns="0" bIns="0" rtlCol="0" anchor="t"/>
+          <a:lstStyle/>
+          <a:p>
+            <a:pPr marL="342900" indent="-342900">
+              <a:spcAft>
+                <a:spcPts val="600"/>
+              </a:spcAft>
+              <a:buSzPct val="100000"/>
+              <a:buChar char="•"/>
+            </a:pPr>
+            <a:r>
+              <a:rPr lang="en-US" sz="1400" dirty="0">
+                <a:solidFill>
+                  <a:srgbClr val="4B5563"/>
+                </a:solidFill>
+              </a:rPr>
+              <a:t>The ML model alone said Moderate, 13%. It cannot see the crash.</a:t>
+            </a:r>
+            <a:endParaRPr lang="en-US" sz="1400" dirty="0"/>
+          </a:p>
+          <a:p>
+            <a:pPr marL="342900" indent="-342900">
+              <a:spcAft>
+                <a:spcPts val="600"/>
+              </a:spcAft>
+              <a:buSzPct val="100000"/>
+              <a:buChar char="•"/>
+            </a:pPr>
+            <a:r>
+              <a:rPr lang="en-US" sz="1400" dirty="0">
+                <a:solidFill>
+                  <a:srgbClr val="4B5563"/>
+                </a:solidFill>
+              </a:rPr>
+              <a:t>The agent found an official crash report, confirmed by TV news, so it raised the forecast to High, 97%: divert to Gate 3.</a:t>
+            </a:r>
+            <a:endParaRPr lang="en-US" sz="1400" dirty="0"/>
+          </a:p>
+          <a:p>
+            <a:pPr marL="342900" indent="-342900">
+              <a:spcAft>
+                <a:spcPts val="600"/>
+              </a:spcAft>
+              <a:buSzPct val="100000"/>
+              <a:buChar char="•"/>
+            </a:pPr>
+            <a:r>
+              <a:rPr lang="en-US" sz="1400" dirty="0">
+                <a:solidFill>
+                  <a:srgbClr val="4B5563"/>
+                </a:solidFill>
+              </a:rPr>
+              <a:t>Every step is shown as a trace, so the decision can be checked.</a:t>
+            </a:r>
+            <a:endParaRPr lang="en-US" sz="1400" dirty="0"/>
           </a:p>
         </p:txBody>
       </p:sp>
       <p:graphicFrame>
         <p:nvGraphicFramePr>
           <p:cNvPr id="11" name="Table 0"/>
+          <p:cNvGraphicFramePr>
+            <a:graphicFrameLocks noGrp="1"/>
+          </p:cNvGraphicFramePr>
+          <p:nvPr>
+            <p:extLst>
+              <p:ext uri="{D42A27DB-BD31-4B8C-83A1-F6EECF244321}">
+                <p14:modId xmlns:p14="http://schemas.microsoft.com/office/powerpoint/2010/main" val="1579011935"/>
+              </p:ext>
+            </p:extLst>
+          </p:nvPr>
+        </p:nvGraphicFramePr>
+        <p:xfrm>
+          <a:off x="7680960" y="1280160"/>
+          <a:ext cx="3931920" cy="914400"/>
+        </p:xfrm>
+        <a:graphic>
+          <a:graphicData uri="http://schemas.openxmlformats.org/drawingml/2006/table">
+            <a:tbl>
+              <a:tblPr/>
+              <a:tblGrid>
+                <a:gridCol w="1463040"/>
+                <a:gridCol w="822960"/>
+                <a:gridCol w="1645920"/>
+              </a:tblGrid>
+              <a:tr h="502920">
+                <a:tc>
+                  <a:txBody>
+                    <a:bodyPr/>
+                    <a:lstStyle/>
+                    <a:p>
+                      <a:pPr indent="0" marL="0">
+                        <a:buNone/>
+                      </a:pPr>
+                      <a:r>
+                        <a:rPr lang="en-US" sz="1200" b="1" dirty="0">
+                          <a:solidFill>
+                            <a:srgbClr val="FFFFFF"/>
+                          </a:solidFill>
+                        </a:rPr>
+                        <a:t>Scenario</a:t>
+                      </a:r>
+                      <a:endParaRPr lang="en-US" sz="1200" dirty="0"/>
+                    </a:p>
+                  </a:txBody>
+                  <a:tcPr marL="91440" marR="91440" marT="45720" marB="45720">
+                    <a:lnL w="9525" cap="flat" cmpd="sng" algn="ctr">
+                      <a:solidFill>
+                        <a:srgbClr val="D9DCE1"/>
+                      </a:solidFill>
+                      <a:prstDash val="solid"/>
+                      <a:round/>
+                      <a:headEnd type="none" w="med" len="med"/>
+                      <a:tailEnd type="none" w="med" len="med"/>
+                    </a:lnL>
+                    <a:lnR w="9525" cap="flat" cmpd="sng" algn="ctr">
+                      <a:solidFill>
+                        <a:srgbClr val="D9DCE1"/>
+                      </a:solidFill>
+                      <a:prstDash val="solid"/>
+                      <a:round/>
+                      <a:headEnd type="none" w="med" len="med"/>
+                      <a:tailEnd type="none" w="med" len="med"/>
+                    </a:lnR>
+                    <a:lnT w="9525" cap="flat" cmpd="sng" algn="ctr">
+                      <a:solidFill>
+                        <a:srgbClr val="D9DCE1"/>
+                      </a:solidFill>
+                      <a:prstDash val="solid"/>
+                      <a:round/>
+                      <a:headEnd type="none" w="med" len="med"/>
+                      <a:tailEnd type="none" w="med" len="med"/>
+                    </a:lnT>
+                    <a:lnB w="9525" cap="flat" cmpd="sng" algn="ctr">
+                      <a:solidFill>
+                        <a:srgbClr val="D9DCE1"/>
+                      </a:solidFill>
+                      <a:prstDash val="solid"/>
+                      <a:round/>
+                      <a:headEnd type="none" w="med" len="med"/>
+                      <a:tailEnd type="none" w="med" len="med"/>
+                    </a:lnB>
+                    <a:solidFill>
+                      <a:srgbClr val="1E2329"/>
+                    </a:solidFill>
+                  </a:tcPr>
+                </a:tc>
+                <a:tc>
+                  <a:txBody>
+                    <a:bodyPr/>
+                    <a:lstStyle/>
+                    <a:p>
+                      <a:pPr indent="0" marL="0">
+                        <a:buNone/>
+                      </a:pPr>
+                      <a:r>
+                        <a:rPr lang="en-US" sz="1200" b="1" dirty="0">
+                          <a:solidFill>
+                            <a:srgbClr val="FFFFFF"/>
+                          </a:solidFill>
+                        </a:rPr>
+                        <a:t>ML</a:t>
+                      </a:r>
+                      <a:endParaRPr lang="en-US" sz="1200" dirty="0"/>
+                    </a:p>
+                  </a:txBody>
+                  <a:tcPr marL="91440" marR="91440" marT="45720" marB="45720">
+                    <a:lnL w="9525" cap="flat" cmpd="sng" algn="ctr">
+                      <a:solidFill>
+                        <a:srgbClr val="D9DCE1"/>
+                      </a:solidFill>
+                      <a:prstDash val="solid"/>
+                      <a:round/>
+                      <a:headEnd type="none" w="med" len="med"/>
+                      <a:tailEnd type="none" w="med" len="med"/>
+                    </a:lnL>
+                    <a:lnR w="9525" cap="flat" cmpd="sng" algn="ctr">
+                      <a:solidFill>
+                        <a:srgbClr val="D9DCE1"/>
+                      </a:solidFill>
+                      <a:prstDash val="solid"/>
+                      <a:round/>
+                      <a:headEnd type="none" w="med" len="med"/>
+                      <a:tailEnd type="none" w="med" len="med"/>
+                    </a:lnR>
+                    <a:lnT w="9525" cap="flat" cmpd="sng" algn="ctr">
+                      <a:solidFill>
+                        <a:srgbClr val="D9DCE1"/>
+                      </a:solidFill>
+                      <a:prstDash val="solid"/>
+                      <a:round/>
+                      <a:headEnd type="none" w="med" len="med"/>
+                      <a:tailEnd type="none" w="med" len="med"/>
+                    </a:lnT>
+                    <a:lnB w="9525" cap="flat" cmpd="sng" algn="ctr">
+                      <a:solidFill>
+                        <a:srgbClr val="D9DCE1"/>
+                      </a:solidFill>
+                      <a:prstDash val="solid"/>
+                      <a:round/>
+                      <a:headEnd type="none" w="med" len="med"/>
+                      <a:tailEnd type="none" w="med" len="med"/>
+                    </a:lnB>
+                    <a:solidFill>
+                      <a:srgbClr val="1E2329"/>
+                    </a:solidFill>
+                  </a:tcPr>
+                </a:tc>
+                <a:tc>
+                  <a:txBody>
+                    <a:bodyPr/>
+                    <a:lstStyle/>
+                    <a:p>
+                      <a:pPr indent="0" marL="0">
+                        <a:buNone/>
+                      </a:pPr>
+                      <a:r>
+                        <a:rPr lang="en-US" sz="1200" b="1" dirty="0">
+                          <a:solidFill>
+                            <a:srgbClr val="FFFFFF"/>
+                          </a:solidFill>
+                        </a:rPr>
+                        <a:t>Agent decides</a:t>
+                      </a:r>
+                      <a:endParaRPr lang="en-US" sz="1200" dirty="0"/>
+                    </a:p>
+                  </a:txBody>
+                  <a:tcPr marL="91440" marR="91440" marT="45720" marB="45720">
+                    <a:lnL w="9525" cap="flat" cmpd="sng" algn="ctr">
+                      <a:solidFill>
+                        <a:srgbClr val="D9DCE1"/>
+                      </a:solidFill>
+                      <a:prstDash val="solid"/>
+                      <a:round/>
+                      <a:headEnd type="none" w="med" len="med"/>
+                      <a:tailEnd type="none" w="med" len="med"/>
+                    </a:lnL>
+                    <a:lnR w="9525" cap="flat" cmpd="sng" algn="ctr">
+                      <a:solidFill>
+                        <a:srgbClr val="D9DCE1"/>
+                      </a:solidFill>
+                      <a:prstDash val="solid"/>
+                      <a:round/>
+                      <a:headEnd type="none" w="med" len="med"/>
+                      <a:tailEnd type="none" w="med" len="med"/>
+                    </a:lnR>
+                    <a:lnT w="9525" cap="flat" cmpd="sng" algn="ctr">
+                      <a:solidFill>
+                        <a:srgbClr val="D9DCE1"/>
+                      </a:solidFill>
+                      <a:prstDash val="solid"/>
+                      <a:round/>
+                      <a:headEnd type="none" w="med" len="med"/>
+                      <a:tailEnd type="none" w="med" len="med"/>
+                    </a:lnT>
+                    <a:lnB w="9525" cap="flat" cmpd="sng" algn="ctr">
+                      <a:solidFill>
+                        <a:srgbClr val="D9DCE1"/>
+                      </a:solidFill>
+                      <a:prstDash val="solid"/>
+                      <a:round/>
+                      <a:headEnd type="none" w="med" len="med"/>
+                      <a:tailEnd type="none" w="med" len="med"/>
+                    </a:lnB>
+                    <a:solidFill>
+                      <a:srgbClr val="1E2329"/>
+                    </a:solidFill>
+                  </a:tcPr>
+                </a:tc>
+              </a:tr>
+              <a:tr h="502920">
+                <a:tc>
+                  <a:txBody>
+                    <a:bodyPr/>
+                    <a:lstStyle/>
+                    <a:p>
+                      <a:pPr indent="0" marL="0">
+                        <a:buNone/>
+                      </a:pPr>
+                      <a:r>
+                        <a:rPr lang="en-US" sz="1200" dirty="0">
+                          <a:solidFill>
+                            <a:srgbClr val="1E2329"/>
+                          </a:solidFill>
+                        </a:rPr>
+                        <a:t>Calm morning</a:t>
+                      </a:r>
+                      <a:endParaRPr lang="en-US" sz="1200" dirty="0"/>
+                    </a:p>
+                  </a:txBody>
+                  <a:tcPr marL="91440" marR="91440" marT="45720" marB="45720">
+                    <a:lnL w="9525" cap="flat" cmpd="sng" algn="ctr">
+                      <a:solidFill>
+                        <a:srgbClr val="D9DCE1"/>
+                      </a:solidFill>
+                      <a:prstDash val="solid"/>
+                      <a:round/>
+                      <a:headEnd type="none" w="med" len="med"/>
+                      <a:tailEnd type="none" w="med" len="med"/>
+                    </a:lnL>
+                    <a:lnR w="9525" cap="flat" cmpd="sng" algn="ctr">
+                      <a:solidFill>
+                        <a:srgbClr val="D9DCE1"/>
+                      </a:solidFill>
+                      <a:prstDash val="solid"/>
+                      <a:round/>
+                      <a:headEnd type="none" w="med" len="med"/>
+                      <a:tailEnd type="none" w="med" len="med"/>
+                    </a:lnR>
+                    <a:lnT w="9525" cap="flat" cmpd="sng" algn="ctr">
+                      <a:solidFill>
+                        <a:srgbClr val="D9DCE1"/>
+                      </a:solidFill>
+                      <a:prstDash val="solid"/>
+                      <a:round/>
+                      <a:headEnd type="none" w="med" len="med"/>
+                      <a:tailEnd type="none" w="med" len="med"/>
+                    </a:lnT>
+                    <a:lnB w="9525" cap="flat" cmpd="sng" algn="ctr">
+                      <a:solidFill>
+                        <a:srgbClr val="D9DCE1"/>
+                      </a:solidFill>
+                      <a:prstDash val="solid"/>
+                      <a:round/>
+                      <a:headEnd type="none" w="med" len="med"/>
+                      <a:tailEnd type="none" w="med" len="med"/>
+                    </a:lnB>
+                  </a:tcPr>
+                </a:tc>
+                <a:tc>
+                  <a:txBody>
+                    <a:bodyPr/>
+                    <a:lstStyle/>
+                    <a:p>
+                      <a:pPr indent="0" marL="0">
+                        <a:buNone/>
+                      </a:pPr>
+                      <a:r>
+                        <a:rPr lang="en-US" sz="1200" dirty="0">
+                          <a:solidFill>
+                            <a:srgbClr val="1E2329"/>
+                          </a:solidFill>
+                        </a:rPr>
+                        <a:t>Mod 13%</a:t>
+                      </a:r>
+                      <a:endParaRPr lang="en-US" sz="1200" dirty="0"/>
+                    </a:p>
+                  </a:txBody>
+                  <a:tcPr marL="91440" marR="91440" marT="45720" marB="45720">
+                    <a:lnL w="9525" cap="flat" cmpd="sng" algn="ctr">
+                      <a:solidFill>
+                        <a:srgbClr val="D9DCE1"/>
+                      </a:solidFill>
+                      <a:prstDash val="solid"/>
+                      <a:round/>
+                      <a:headEnd type="none" w="med" len="med"/>
+                      <a:tailEnd type="none" w="med" len="med"/>
+                    </a:lnL>
+                    <a:lnR w="9525" cap="flat" cmpd="sng" algn="ctr">
+                      <a:solidFill>
+                        <a:srgbClr val="D9DCE1"/>
+                      </a:solidFill>
+                      <a:prstDash val="solid"/>
+                      <a:round/>
+                      <a:headEnd type="none" w="med" len="med"/>
+                      <a:tailEnd type="none" w="med" len="med"/>
+                    </a:lnR>
+                    <a:lnT w="9525" cap="flat" cmpd="sng" algn="ctr">
+                      <a:solidFill>
+                        <a:srgbClr val="D9DCE1"/>
+                      </a:solidFill>
+                      <a:prstDash val="solid"/>
+                      <a:round/>
+                      <a:headEnd type="none" w="med" len="med"/>
+                      <a:tailEnd type="none" w="med" len="med"/>
+                    </a:lnT>
+                    <a:lnB w="9525" cap="flat" cmpd="sng" algn="ctr">
+                      <a:solidFill>
+                        <a:srgbClr val="D9DCE1"/>
+                      </a:solidFill>
+                      <a:prstDash val="solid"/>
+                      <a:round/>
+                      <a:headEnd type="none" w="med" len="med"/>
+                      <a:tailEnd type="none" w="med" len="med"/>
+                    </a:lnB>
+                  </a:tcPr>
+                </a:tc>
+                <a:tc>
+                  <a:txBody>
+                    <a:bodyPr/>
+                    <a:lstStyle/>
+                    <a:p>
+                      <a:pPr indent="0" marL="0">
+                        <a:buNone/>
+                      </a:pPr>
+                      <a:r>
+                        <a:rPr lang="en-US" sz="1200" b="1" dirty="0">
+                          <a:solidFill>
+                            <a:srgbClr val="006300"/>
+                          </a:solidFill>
+                        </a:rPr>
+                        <a:t>Keeps it</a:t>
+                      </a:r>
+                      <a:endParaRPr lang="en-US" sz="1200" dirty="0"/>
+                    </a:p>
+                  </a:txBody>
+                  <a:tcPr marL="91440" marR="91440" marT="45720" marB="45720">
+                    <a:lnL w="9525" cap="flat" cmpd="sng" algn="ctr">
+                      <a:solidFill>
+                        <a:srgbClr val="D9DCE1"/>
+                      </a:solidFill>
+                      <a:prstDash val="solid"/>
+                      <a:round/>
+                      <a:headEnd type="none" w="med" len="med"/>
+                      <a:tailEnd type="none" w="med" len="med"/>
+                    </a:lnL>
+                    <a:lnR w="9525" cap="flat" cmpd="sng" algn="ctr">
+                      <a:solidFill>
+                        <a:srgbClr val="D9DCE1"/>
+                      </a:solidFill>
+                      <a:prstDash val="solid"/>
+                      <a:round/>
+                      <a:headEnd type="none" w="med" len="med"/>
+                      <a:tailEnd type="none" w="med" len="med"/>
+                    </a:lnR>
+                    <a:lnT w="9525" cap="flat" cmpd="sng" algn="ctr">
+                      <a:solidFill>
+                        <a:srgbClr val="D9DCE1"/>
+                      </a:solidFill>
+                      <a:prstDash val="solid"/>
+                      <a:round/>
+                      <a:headEnd type="none" w="med" len="med"/>
+                      <a:tailEnd type="none" w="med" len="med"/>
+                    </a:lnT>
+                    <a:lnB w="9525" cap="flat" cmpd="sng" algn="ctr">
+                      <a:solidFill>
+                        <a:srgbClr val="D9DCE1"/>
+                      </a:solidFill>
+                      <a:prstDash val="solid"/>
+                      <a:round/>
+                      <a:headEnd type="none" w="med" len="med"/>
+                      <a:tailEnd type="none" w="med" len="med"/>
+                    </a:lnB>
+                  </a:tcPr>
+                </a:tc>
+              </a:tr>
+              <a:tr h="502920">
+                <a:tc>
+                  <a:txBody>
+                    <a:bodyPr/>
+                    <a:lstStyle/>
+                    <a:p>
+                      <a:pPr indent="0" marL="0">
+                        <a:buNone/>
+                      </a:pPr>
+                      <a:r>
+                        <a:rPr lang="en-US" sz="1200" dirty="0">
+                          <a:solidFill>
+                            <a:srgbClr val="1E2329"/>
+                          </a:solidFill>
+                        </a:rPr>
+                        <a:t>Accident blocks road</a:t>
+                      </a:r>
+                      <a:endParaRPr lang="en-US" sz="1200" dirty="0"/>
+                    </a:p>
+                  </a:txBody>
+                  <a:tcPr marL="91440" marR="91440" marT="45720" marB="45720">
+                    <a:lnL w="9525" cap="flat" cmpd="sng" algn="ctr">
+                      <a:solidFill>
+                        <a:srgbClr val="D9DCE1"/>
+                      </a:solidFill>
+                      <a:prstDash val="solid"/>
+                      <a:round/>
+                      <a:headEnd type="none" w="med" len="med"/>
+                      <a:tailEnd type="none" w="med" len="med"/>
+                    </a:lnL>
+                    <a:lnR w="9525" cap="flat" cmpd="sng" algn="ctr">
+                      <a:solidFill>
+                        <a:srgbClr val="D9DCE1"/>
+                      </a:solidFill>
+                      <a:prstDash val="solid"/>
+                      <a:round/>
+                      <a:headEnd type="none" w="med" len="med"/>
+                      <a:tailEnd type="none" w="med" len="med"/>
+                    </a:lnR>
+                    <a:lnT w="9525" cap="flat" cmpd="sng" algn="ctr">
+                      <a:solidFill>
+                        <a:srgbClr val="D9DCE1"/>
+                      </a:solidFill>
+                      <a:prstDash val="solid"/>
+                      <a:round/>
+                      <a:headEnd type="none" w="med" len="med"/>
+                      <a:tailEnd type="none" w="med" len="med"/>
+                    </a:lnT>
+                    <a:lnB w="9525" cap="flat" cmpd="sng" algn="ctr">
+                      <a:solidFill>
+                        <a:srgbClr val="D9DCE1"/>
+                      </a:solidFill>
+                      <a:prstDash val="solid"/>
+                      <a:round/>
+                      <a:headEnd type="none" w="med" len="med"/>
+                      <a:tailEnd type="none" w="med" len="med"/>
+                    </a:lnB>
+                  </a:tcPr>
+                </a:tc>
+                <a:tc>
+                  <a:txBody>
+                    <a:bodyPr/>
+                    <a:lstStyle/>
+                    <a:p>
+                      <a:pPr indent="0" marL="0">
+                        <a:buNone/>
+                      </a:pPr>
+                      <a:r>
+                        <a:rPr lang="en-US" sz="1200" dirty="0">
+                          <a:solidFill>
+                            <a:srgbClr val="1E2329"/>
+                          </a:solidFill>
+                        </a:rPr>
+                        <a:t>Mod 13%</a:t>
+                      </a:r>
+                      <a:endParaRPr lang="en-US" sz="1200" dirty="0"/>
+                    </a:p>
+                  </a:txBody>
+                  <a:tcPr marL="91440" marR="91440" marT="45720" marB="45720">
+                    <a:lnL w="9525" cap="flat" cmpd="sng" algn="ctr">
+                      <a:solidFill>
+                        <a:srgbClr val="D9DCE1"/>
+                      </a:solidFill>
+                      <a:prstDash val="solid"/>
+                      <a:round/>
+                      <a:headEnd type="none" w="med" len="med"/>
+                      <a:tailEnd type="none" w="med" len="med"/>
+                    </a:lnL>
+                    <a:lnR w="9525" cap="flat" cmpd="sng" algn="ctr">
+                      <a:solidFill>
+                        <a:srgbClr val="D9DCE1"/>
+                      </a:solidFill>
+                      <a:prstDash val="solid"/>
+                      <a:round/>
+                      <a:headEnd type="none" w="med" len="med"/>
+                      <a:tailEnd type="none" w="med" len="med"/>
+                    </a:lnR>
+                    <a:lnT w="9525" cap="flat" cmpd="sng" algn="ctr">
+                      <a:solidFill>
+                        <a:srgbClr val="D9DCE1"/>
+                      </a:solidFill>
+                      <a:prstDash val="solid"/>
+                      <a:round/>
+                      <a:headEnd type="none" w="med" len="med"/>
+                      <a:tailEnd type="none" w="med" len="med"/>
+                    </a:lnT>
+                    <a:lnB w="9525" cap="flat" cmpd="sng" algn="ctr">
+                      <a:solidFill>
+                        <a:srgbClr val="D9DCE1"/>
+                      </a:solidFill>
+                      <a:prstDash val="solid"/>
+                      <a:round/>
+                      <a:headEnd type="none" w="med" len="med"/>
+                      <a:tailEnd type="none" w="med" len="med"/>
+                    </a:lnB>
+                  </a:tcPr>
+                </a:tc>
+                <a:tc>
+                  <a:txBody>
+                    <a:bodyPr/>
+                    <a:lstStyle/>
+                    <a:p>
+                      <a:pPr indent="0" marL="0">
+                        <a:buNone/>
+                      </a:pPr>
+                      <a:r>
+                        <a:rPr lang="en-US" sz="1200" b="1" dirty="0">
+                          <a:solidFill>
+                            <a:srgbClr val="A32020"/>
+                          </a:solidFill>
+                        </a:rPr>
+                        <a:t>High 97%: divert</a:t>
+                      </a:r>
+                      <a:endParaRPr lang="en-US" sz="1200" dirty="0"/>
+                    </a:p>
+                  </a:txBody>
+                  <a:tcPr marL="91440" marR="91440" marT="45720" marB="45720">
+                    <a:lnL w="9525" cap="flat" cmpd="sng" algn="ctr">
+                      <a:solidFill>
+                        <a:srgbClr val="D9DCE1"/>
+                      </a:solidFill>
+                      <a:prstDash val="solid"/>
+                      <a:round/>
+                      <a:headEnd type="none" w="med" len="med"/>
+                      <a:tailEnd type="none" w="med" len="med"/>
+                    </a:lnL>
+                    <a:lnR w="9525" cap="flat" cmpd="sng" algn="ctr">
+                      <a:solidFill>
+                        <a:srgbClr val="D9DCE1"/>
+                      </a:solidFill>
+                      <a:prstDash val="solid"/>
+                      <a:round/>
+                      <a:headEnd type="none" w="med" len="med"/>
+                      <a:tailEnd type="none" w="med" len="med"/>
+                    </a:lnR>
+                    <a:lnT w="9525" cap="flat" cmpd="sng" algn="ctr">
+                      <a:solidFill>
+                        <a:srgbClr val="D9DCE1"/>
+                      </a:solidFill>
+                      <a:prstDash val="solid"/>
+                      <a:round/>
+                      <a:headEnd type="none" w="med" len="med"/>
+                      <a:tailEnd type="none" w="med" len="med"/>
+                    </a:lnT>
+                    <a:lnB w="9525" cap="flat" cmpd="sng" algn="ctr">
+                      <a:solidFill>
+                        <a:srgbClr val="D9DCE1"/>
+                      </a:solidFill>
+                      <a:prstDash val="solid"/>
+                      <a:round/>
+                      <a:headEnd type="none" w="med" len="med"/>
+                      <a:tailEnd type="none" w="med" len="med"/>
+                    </a:lnB>
+                  </a:tcPr>
+                </a:tc>
+              </a:tr>
+              <a:tr h="502920">
+                <a:tc>
+                  <a:txBody>
+                    <a:bodyPr/>
+                    <a:lstStyle/>
+                    <a:p>
+                      <a:pPr indent="0" marL="0">
+                        <a:buNone/>
+                      </a:pPr>
+                      <a:r>
+                        <a:rPr lang="en-US" sz="1200" dirty="0">
+                          <a:solidFill>
+                            <a:srgbClr val="1E2329"/>
+                          </a:solidFill>
+                        </a:rPr>
+                        <a:t>Roadworks, 1 lane</a:t>
+                      </a:r>
+                      <a:endParaRPr lang="en-US" sz="1200" dirty="0"/>
+                    </a:p>
+                  </a:txBody>
+                  <a:tcPr marL="91440" marR="91440" marT="45720" marB="45720">
+                    <a:lnL w="9525" cap="flat" cmpd="sng" algn="ctr">
+                      <a:solidFill>
+                        <a:srgbClr val="D9DCE1"/>
+                      </a:solidFill>
+                      <a:prstDash val="solid"/>
+                      <a:round/>
+                      <a:headEnd type="none" w="med" len="med"/>
+                      <a:tailEnd type="none" w="med" len="med"/>
+                    </a:lnL>
+                    <a:lnR w="9525" cap="flat" cmpd="sng" algn="ctr">
+                      <a:solidFill>
+                        <a:srgbClr val="D9DCE1"/>
+                      </a:solidFill>
+                      <a:prstDash val="solid"/>
+                      <a:round/>
+                      <a:headEnd type="none" w="med" len="med"/>
+                      <a:tailEnd type="none" w="med" len="med"/>
+                    </a:lnR>
+                    <a:lnT w="9525" cap="flat" cmpd="sng" algn="ctr">
+                      <a:solidFill>
+                        <a:srgbClr val="D9DCE1"/>
+                      </a:solidFill>
+                      <a:prstDash val="solid"/>
+                      <a:round/>
+                      <a:headEnd type="none" w="med" len="med"/>
+                      <a:tailEnd type="none" w="med" len="med"/>
+                    </a:lnT>
+                    <a:lnB w="9525" cap="flat" cmpd="sng" algn="ctr">
+                      <a:solidFill>
+                        <a:srgbClr val="D9DCE1"/>
+                      </a:solidFill>
+                      <a:prstDash val="solid"/>
+                      <a:round/>
+                      <a:headEnd type="none" w="med" len="med"/>
+                      <a:tailEnd type="none" w="med" len="med"/>
+                    </a:lnB>
+                  </a:tcPr>
+                </a:tc>
+                <a:tc>
+                  <a:txBody>
+                    <a:bodyPr/>
+                    <a:lstStyle/>
+                    <a:p>
+                      <a:pPr indent="0" marL="0">
+                        <a:buNone/>
+                      </a:pPr>
+                      <a:r>
+                        <a:rPr lang="en-US" sz="1200" dirty="0">
+                          <a:solidFill>
+                            <a:srgbClr val="1E2329"/>
+                          </a:solidFill>
+                        </a:rPr>
+                        <a:t>Mod 19%</a:t>
+                      </a:r>
+                      <a:endParaRPr lang="en-US" sz="1200" dirty="0"/>
+                    </a:p>
+                  </a:txBody>
+                  <a:tcPr marL="91440" marR="91440" marT="45720" marB="45720">
+                    <a:lnL w="9525" cap="flat" cmpd="sng" algn="ctr">
+                      <a:solidFill>
+                        <a:srgbClr val="D9DCE1"/>
+                      </a:solidFill>
+                      <a:prstDash val="solid"/>
+                      <a:round/>
+                      <a:headEnd type="none" w="med" len="med"/>
+                      <a:tailEnd type="none" w="med" len="med"/>
+                    </a:lnL>
+                    <a:lnR w="9525" cap="flat" cmpd="sng" algn="ctr">
+                      <a:solidFill>
+                        <a:srgbClr val="D9DCE1"/>
+                      </a:solidFill>
+                      <a:prstDash val="solid"/>
+                      <a:round/>
+                      <a:headEnd type="none" w="med" len="med"/>
+                      <a:tailEnd type="none" w="med" len="med"/>
+                    </a:lnR>
+                    <a:lnT w="9525" cap="flat" cmpd="sng" algn="ctr">
+                      <a:solidFill>
+                        <a:srgbClr val="D9DCE1"/>
+                      </a:solidFill>
+                      <a:prstDash val="solid"/>
+                      <a:round/>
+                      <a:headEnd type="none" w="med" len="med"/>
+                      <a:tailEnd type="none" w="med" len="med"/>
+                    </a:lnT>
+                    <a:lnB w="9525" cap="flat" cmpd="sng" algn="ctr">
+                      <a:solidFill>
+                        <a:srgbClr val="D9DCE1"/>
+                      </a:solidFill>
+                      <a:prstDash val="solid"/>
+                      <a:round/>
+                      <a:headEnd type="none" w="med" len="med"/>
+                      <a:tailEnd type="none" w="med" len="med"/>
+                    </a:lnB>
+                  </a:tcPr>
+                </a:tc>
+                <a:tc>
+                  <a:txBody>
+                    <a:bodyPr/>
+                    <a:lstStyle/>
+                    <a:p>
+                      <a:pPr indent="0" marL="0">
+                        <a:buNone/>
+                      </a:pPr>
+                      <a:r>
+                        <a:rPr lang="en-US" sz="1200" b="1" dirty="0">
+                          <a:solidFill>
+                            <a:srgbClr val="A32020"/>
+                          </a:solidFill>
+                        </a:rPr>
+                        <a:t>High 80%: leave early</a:t>
+                      </a:r>
+                      <a:endParaRPr lang="en-US" sz="1200" dirty="0"/>
+                    </a:p>
+                  </a:txBody>
+                  <a:tcPr marL="91440" marR="91440" marT="45720" marB="45720">
+                    <a:lnL w="9525" cap="flat" cmpd="sng" algn="ctr">
+                      <a:solidFill>
+                        <a:srgbClr val="D9DCE1"/>
+                      </a:solidFill>
+                      <a:prstDash val="solid"/>
+                      <a:round/>
+                      <a:headEnd type="none" w="med" len="med"/>
+                      <a:tailEnd type="none" w="med" len="med"/>
+                    </a:lnL>
+                    <a:lnR w="9525" cap="flat" cmpd="sng" algn="ctr">
+                      <a:solidFill>
+                        <a:srgbClr val="D9DCE1"/>
+                      </a:solidFill>
+                      <a:prstDash val="solid"/>
+                      <a:round/>
+                      <a:headEnd type="none" w="med" len="med"/>
+                      <a:tailEnd type="none" w="med" len="med"/>
+                    </a:lnR>
+                    <a:lnT w="9525" cap="flat" cmpd="sng" algn="ctr">
+                      <a:solidFill>
+                        <a:srgbClr val="D9DCE1"/>
+                      </a:solidFill>
+                      <a:prstDash val="solid"/>
+                      <a:round/>
+                      <a:headEnd type="none" w="med" len="med"/>
+                      <a:tailEnd type="none" w="med" len="med"/>
+                    </a:lnT>
+                    <a:lnB w="9525" cap="flat" cmpd="sng" algn="ctr">
+                      <a:solidFill>
+                        <a:srgbClr val="D9DCE1"/>
+                      </a:solidFill>
+                      <a:prstDash val="solid"/>
+                      <a:round/>
+                      <a:headEnd type="none" w="med" len="med"/>
+                      <a:tailEnd type="none" w="med" len="med"/>
+                    </a:lnB>
+                  </a:tcPr>
+                </a:tc>
+              </a:tr>
+              <a:tr h="502920">
+                <a:tc>
+                  <a:txBody>
+                    <a:bodyPr/>
+                    <a:lstStyle/>
+                    <a:p>
+                      <a:pPr indent="0" marL="0">
+                        <a:buNone/>
+                      </a:pPr>
+                      <a:r>
+                        <a:rPr lang="en-US" sz="1200" dirty="0">
+                          <a:solidFill>
+                            <a:srgbClr val="1E2329"/>
+                          </a:solidFill>
+                        </a:rPr>
+                        <a:t>Unverified rumour</a:t>
+                      </a:r>
+                      <a:endParaRPr lang="en-US" sz="1200" dirty="0"/>
+                    </a:p>
+                  </a:txBody>
+                  <a:tcPr marL="91440" marR="91440" marT="45720" marB="45720">
+                    <a:lnL w="9525" cap="flat" cmpd="sng" algn="ctr">
+                      <a:solidFill>
+                        <a:srgbClr val="D9DCE1"/>
+                      </a:solidFill>
+                      <a:prstDash val="solid"/>
+                      <a:round/>
+                      <a:headEnd type="none" w="med" len="med"/>
+                      <a:tailEnd type="none" w="med" len="med"/>
+                    </a:lnL>
+                    <a:lnR w="9525" cap="flat" cmpd="sng" algn="ctr">
+                      <a:solidFill>
+                        <a:srgbClr val="D9DCE1"/>
+                      </a:solidFill>
+                      <a:prstDash val="solid"/>
+                      <a:round/>
+                      <a:headEnd type="none" w="med" len="med"/>
+                      <a:tailEnd type="none" w="med" len="med"/>
+                    </a:lnR>
+                    <a:lnT w="9525" cap="flat" cmpd="sng" algn="ctr">
+                      <a:solidFill>
+                        <a:srgbClr val="D9DCE1"/>
+                      </a:solidFill>
+                      <a:prstDash val="solid"/>
+                      <a:round/>
+                      <a:headEnd type="none" w="med" len="med"/>
+                      <a:tailEnd type="none" w="med" len="med"/>
+                    </a:lnT>
+                    <a:lnB w="9525" cap="flat" cmpd="sng" algn="ctr">
+                      <a:solidFill>
+                        <a:srgbClr val="D9DCE1"/>
+                      </a:solidFill>
+                      <a:prstDash val="solid"/>
+                      <a:round/>
+                      <a:headEnd type="none" w="med" len="med"/>
+                      <a:tailEnd type="none" w="med" len="med"/>
+                    </a:lnB>
+                  </a:tcPr>
+                </a:tc>
+                <a:tc>
+                  <a:txBody>
+                    <a:bodyPr/>
+                    <a:lstStyle/>
+                    <a:p>
+                      <a:pPr indent="0" marL="0">
+                        <a:buNone/>
+                      </a:pPr>
+                      <a:r>
+                        <a:rPr lang="en-US" sz="1200" dirty="0">
+                          <a:solidFill>
+                            <a:srgbClr val="1E2329"/>
+                          </a:solidFill>
+                        </a:rPr>
+                        <a:t>Mod 25%</a:t>
+                      </a:r>
+                      <a:endParaRPr lang="en-US" sz="1200" dirty="0"/>
+                    </a:p>
+                  </a:txBody>
+                  <a:tcPr marL="91440" marR="91440" marT="45720" marB="45720">
+                    <a:lnL w="9525" cap="flat" cmpd="sng" algn="ctr">
+                      <a:solidFill>
+                        <a:srgbClr val="D9DCE1"/>
+                      </a:solidFill>
+                      <a:prstDash val="solid"/>
+                      <a:round/>
+                      <a:headEnd type="none" w="med" len="med"/>
+                      <a:tailEnd type="none" w="med" len="med"/>
+                    </a:lnL>
+                    <a:lnR w="9525" cap="flat" cmpd="sng" algn="ctr">
+                      <a:solidFill>
+                        <a:srgbClr val="D9DCE1"/>
+                      </a:solidFill>
+                      <a:prstDash val="solid"/>
+                      <a:round/>
+                      <a:headEnd type="none" w="med" len="med"/>
+                      <a:tailEnd type="none" w="med" len="med"/>
+                    </a:lnR>
+                    <a:lnT w="9525" cap="flat" cmpd="sng" algn="ctr">
+                      <a:solidFill>
+                        <a:srgbClr val="D9DCE1"/>
+                      </a:solidFill>
+                      <a:prstDash val="solid"/>
+                      <a:round/>
+                      <a:headEnd type="none" w="med" len="med"/>
+                      <a:tailEnd type="none" w="med" len="med"/>
+                    </a:lnT>
+                    <a:lnB w="9525" cap="flat" cmpd="sng" algn="ctr">
+                      <a:solidFill>
+                        <a:srgbClr val="D9DCE1"/>
+                      </a:solidFill>
+                      <a:prstDash val="solid"/>
+                      <a:round/>
+                      <a:headEnd type="none" w="med" len="med"/>
+                      <a:tailEnd type="none" w="med" len="med"/>
+                    </a:lnB>
+                  </a:tcPr>
+                </a:tc>
+                <a:tc>
+                  <a:txBody>
+                    <a:bodyPr/>
+                    <a:lstStyle/>
+                    <a:p>
+                      <a:pPr indent="0" marL="0">
+                        <a:buNone/>
+                      </a:pPr>
+                      <a:r>
+                        <a:rPr lang="en-US" sz="1200" b="1" dirty="0">
+                          <a:solidFill>
+                            <a:srgbClr val="8A5A00"/>
+                          </a:solidFill>
+                        </a:rPr>
+                        <a:t>Keeps it, human check</a:t>
+                      </a:r>
+                      <a:endParaRPr lang="en-US" sz="1200" dirty="0"/>
+                    </a:p>
+                  </a:txBody>
+                  <a:tcPr marL="91440" marR="91440" marT="45720" marB="45720">
+                    <a:lnL w="9525" cap="flat" cmpd="sng" algn="ctr">
+                      <a:solidFill>
+                        <a:srgbClr val="D9DCE1"/>
+                      </a:solidFill>
+                      <a:prstDash val="solid"/>
+                      <a:round/>
+                      <a:headEnd type="none" w="med" len="med"/>
+                      <a:tailEnd type="none" w="med" len="med"/>
+                    </a:lnL>
+                    <a:lnR w="9525" cap="flat" cmpd="sng" algn="ctr">
+                      <a:solidFill>
+                        <a:srgbClr val="D9DCE1"/>
+                      </a:solidFill>
+                      <a:prstDash val="solid"/>
+                      <a:round/>
+                      <a:headEnd type="none" w="med" len="med"/>
+                      <a:tailEnd type="none" w="med" len="med"/>
+                    </a:lnR>
+                    <a:lnT w="9525" cap="flat" cmpd="sng" algn="ctr">
+                      <a:solidFill>
+                        <a:srgbClr val="D9DCE1"/>
+                      </a:solidFill>
+                      <a:prstDash val="solid"/>
+                      <a:round/>
+                      <a:headEnd type="none" w="med" len="med"/>
+                      <a:tailEnd type="none" w="med" len="med"/>
+                    </a:lnT>
+                    <a:lnB w="9525" cap="flat" cmpd="sng" algn="ctr">
+                      <a:solidFill>
+                        <a:srgbClr val="D9DCE1"/>
+                      </a:solidFill>
+                      <a:prstDash val="solid"/>
+                      <a:round/>
+                      <a:headEnd type="none" w="med" len="med"/>
+                      <a:tailEnd type="none" w="med" len="med"/>
+                    </a:lnB>
+                  </a:tcPr>
+                </a:tc>
+              </a:tr>
+              <a:tr h="502920">
+                <a:tc>
+                  <a:txBody>
+                    <a:bodyPr/>
+                    <a:lstStyle/>
+                    <a:p>
+                      <a:pPr indent="0" marL="0">
+                        <a:buNone/>
+                      </a:pPr>
+                      <a:r>
+                        <a:rPr lang="en-US" sz="1200" dirty="0">
+                          <a:solidFill>
+                            <a:srgbClr val="1E2329"/>
+                          </a:solidFill>
+                        </a:rPr>
+                        <a:t>Crash already cleared</a:t>
+                      </a:r>
+                      <a:endParaRPr lang="en-US" sz="1200" dirty="0"/>
+                    </a:p>
+                  </a:txBody>
+                  <a:tcPr marL="91440" marR="91440" marT="45720" marB="45720">
+                    <a:lnL w="9525" cap="flat" cmpd="sng" algn="ctr">
+                      <a:solidFill>
+                        <a:srgbClr val="D9DCE1"/>
+                      </a:solidFill>
+                      <a:prstDash val="solid"/>
+                      <a:round/>
+                      <a:headEnd type="none" w="med" len="med"/>
+                      <a:tailEnd type="none" w="med" len="med"/>
+                    </a:lnL>
+                    <a:lnR w="9525" cap="flat" cmpd="sng" algn="ctr">
+                      <a:solidFill>
+                        <a:srgbClr val="D9DCE1"/>
+                      </a:solidFill>
+                      <a:prstDash val="solid"/>
+                      <a:round/>
+                      <a:headEnd type="none" w="med" len="med"/>
+                      <a:tailEnd type="none" w="med" len="med"/>
+                    </a:lnR>
+                    <a:lnT w="9525" cap="flat" cmpd="sng" algn="ctr">
+                      <a:solidFill>
+                        <a:srgbClr val="D9DCE1"/>
+                      </a:solidFill>
+                      <a:prstDash val="solid"/>
+                      <a:round/>
+                      <a:headEnd type="none" w="med" len="med"/>
+                      <a:tailEnd type="none" w="med" len="med"/>
+                    </a:lnT>
+                    <a:lnB w="9525" cap="flat" cmpd="sng" algn="ctr">
+                      <a:solidFill>
+                        <a:srgbClr val="D9DCE1"/>
+                      </a:solidFill>
+                      <a:prstDash val="solid"/>
+                      <a:round/>
+                      <a:headEnd type="none" w="med" len="med"/>
+                      <a:tailEnd type="none" w="med" len="med"/>
+                    </a:lnB>
+                  </a:tcPr>
+                </a:tc>
+                <a:tc>
+                  <a:txBody>
+                    <a:bodyPr/>
+                    <a:lstStyle/>
+                    <a:p>
+                      <a:pPr indent="0" marL="0">
+                        <a:buNone/>
+                      </a:pPr>
+                      <a:r>
+                        <a:rPr lang="en-US" sz="1200" dirty="0">
+                          <a:solidFill>
+                            <a:srgbClr val="1E2329"/>
+                          </a:solidFill>
+                        </a:rPr>
+                        <a:t>Mod 3%</a:t>
+                      </a:r>
+                      <a:endParaRPr lang="en-US" sz="1200" dirty="0"/>
+                    </a:p>
+                  </a:txBody>
+                  <a:tcPr marL="91440" marR="91440" marT="45720" marB="45720">
+                    <a:lnL w="9525" cap="flat" cmpd="sng" algn="ctr">
+                      <a:solidFill>
+                        <a:srgbClr val="D9DCE1"/>
+                      </a:solidFill>
+                      <a:prstDash val="solid"/>
+                      <a:round/>
+                      <a:headEnd type="none" w="med" len="med"/>
+                      <a:tailEnd type="none" w="med" len="med"/>
+                    </a:lnL>
+                    <a:lnR w="9525" cap="flat" cmpd="sng" algn="ctr">
+                      <a:solidFill>
+                        <a:srgbClr val="D9DCE1"/>
+                      </a:solidFill>
+                      <a:prstDash val="solid"/>
+                      <a:round/>
+                      <a:headEnd type="none" w="med" len="med"/>
+                      <a:tailEnd type="none" w="med" len="med"/>
+                    </a:lnR>
+                    <a:lnT w="9525" cap="flat" cmpd="sng" algn="ctr">
+                      <a:solidFill>
+                        <a:srgbClr val="D9DCE1"/>
+                      </a:solidFill>
+                      <a:prstDash val="solid"/>
+                      <a:round/>
+                      <a:headEnd type="none" w="med" len="med"/>
+                      <a:tailEnd type="none" w="med" len="med"/>
+                    </a:lnT>
+                    <a:lnB w="9525" cap="flat" cmpd="sng" algn="ctr">
+                      <a:solidFill>
+                        <a:srgbClr val="D9DCE1"/>
+                      </a:solidFill>
+                      <a:prstDash val="solid"/>
+                      <a:round/>
+                      <a:headEnd type="none" w="med" len="med"/>
+                      <a:tailEnd type="none" w="med" len="med"/>
+                    </a:lnB>
+                  </a:tcPr>
+                </a:tc>
+                <a:tc>
+                  <a:txBody>
+                    <a:bodyPr/>
+                    <a:lstStyle/>
+                    <a:p>
+                      <a:pPr indent="0" marL="0">
+                        <a:buNone/>
+                      </a:pPr>
+                      <a:r>
+                        <a:rPr lang="en-US" sz="1200" b="1" dirty="0">
+                          <a:solidFill>
+                            <a:srgbClr val="006300"/>
+                          </a:solidFill>
+                        </a:rPr>
+                        <a:t>Keeps it (over by 07:30)</a:t>
+                      </a:r>
+                      <a:endParaRPr lang="en-US" sz="1200" dirty="0"/>
+                    </a:p>
+                  </a:txBody>
+                  <a:tcPr marL="91440" marR="91440" marT="45720" marB="45720">
+                    <a:lnL w="9525" cap="flat" cmpd="sng" algn="ctr">
+                      <a:solidFill>
+                        <a:srgbClr val="D9DCE1"/>
+                      </a:solidFill>
+                      <a:prstDash val="solid"/>
+                      <a:round/>
+                      <a:headEnd type="none" w="med" len="med"/>
+                      <a:tailEnd type="none" w="med" len="med"/>
+                    </a:lnL>
+                    <a:lnR w="9525" cap="flat" cmpd="sng" algn="ctr">
+                      <a:solidFill>
+                        <a:srgbClr val="D9DCE1"/>
+                      </a:solidFill>
+                      <a:prstDash val="solid"/>
+                      <a:round/>
+                      <a:headEnd type="none" w="med" len="med"/>
+                      <a:tailEnd type="none" w="med" len="med"/>
+                    </a:lnR>
+                    <a:lnT w="9525" cap="flat" cmpd="sng" algn="ctr">
+                      <a:solidFill>
+                        <a:srgbClr val="D9DCE1"/>
+                      </a:solidFill>
+                      <a:prstDash val="solid"/>
+                      <a:round/>
+                      <a:headEnd type="none" w="med" len="med"/>
+                      <a:tailEnd type="none" w="med" len="med"/>
+                    </a:lnT>
+                    <a:lnB w="9525" cap="flat" cmpd="sng" algn="ctr">
+                      <a:solidFill>
+                        <a:srgbClr val="D9DCE1"/>
+                      </a:solidFill>
+                      <a:prstDash val="solid"/>
+                      <a:round/>
+                      <a:headEnd type="none" w="med" len="med"/>
+                      <a:tailEnd type="none" w="med" len="med"/>
+                    </a:lnB>
+                  </a:tcPr>
+                </a:tc>
+              </a:tr>
+            </a:tbl>
+          </a:graphicData>
+        </a:graphic>
+      </p:graphicFrame>
+      <p:sp>
+        <p:nvSpPr>
+          <p:cNvPr id="6" name="Text 2"/>
+          <p:cNvSpPr txBox="1"/>
+          <p:nvPr/>
+        </p:nvSpPr>
+        <p:spPr>
+          <a:xfrm>
+            <a:off x="7680960" y="4572000"/>
+            <a:ext cx="3931920" cy="822960"/>
+          </a:xfrm>
+          <a:prstGeom prst="rect">
+            <a:avLst/>
+          </a:prstGeom>
+          <a:noFill/>
+          <a:ln/>
+        </p:spPr>
+        <p:txBody>
+          <a:bodyPr wrap="square" lIns="0" tIns="0" rIns="0" bIns="0" rtlCol="0" anchor="t"/>
+          <a:lstStyle/>
+          <a:p>
+            <a:pPr indent="0" marL="0">
+              <a:buNone/>
+            </a:pPr>
+            <a:r>
+              <a:rPr lang="en-US" sz="1100" i="1" dirty="0">
+                <a:solidFill>
+                  <a:srgbClr val="6B7280"/>
+                </a:solidFill>
+              </a:rPr>
+              <a:t>Scenario feeds are simulated examples in a government / news feed format; the ML forecasts under them are real held-out days.</a:t>
+            </a:r>
+            <a:endParaRPr lang="en-US" sz="1100" dirty="0"/>
+          </a:p>
+        </p:txBody>
+      </p:sp>
+      <p:sp>
+        <p:nvSpPr>
+          <p:cNvPr id="25" name="Slide Number Placeholder 0"/>
+          <p:cNvSpPr>
+            <a:spLocks noGrp="1"/>
+          </p:cNvSpPr>
+          <p:nvPr>
+            <p:ph type="sldNum" sz="quarter" idx="4294967295"/>
+          </p:nvPr>
+        </p:nvSpPr>
+        <p:spPr>
+          <a:xfrm>
+            <a:off x="11155680" y="6400800"/>
+            <a:ext cx="548640" cy="274320"/>
+          </a:xfrm>
+          <a:prstGeom prst="rect">
+            <a:avLst/>
+          </a:prstGeom>
+          <a:extLst>
+            <a:ext uri="{C572A759-6A51-4108-AA02-DFA0A04FC94B}">
+              <ma14:wrappingTextBoxFlag xmlns:ma14="http://schemas.microsoft.com/office/mac/drawingml/2011/main" val="0"/>
+            </a:ext>
+          </a:extLst>
+        </p:spPr>
+        <p:txBody>
+          <a:bodyPr/>
+          <a:lstStyle>
+            <a:lvl1pPr>
+              <a:defRPr sz="1000">
+                <a:solidFill>
+                  <a:srgbClr val="6B7280"/>
+                </a:solidFill>
+              </a:defRPr>
+            </a:lvl1pPr>
+          </a:lstStyle>
+          <a:p>
+            <a:pPr algn="r"/>
+            <a:fld id="{F7021451-1387-4CA6-816F-3879F97B5CBC}" type="slidenum">
+              <a:rPr b="0" lang="en-US"/>
+              <a:t>10</a:t>
+            </a:fld>
+            <a:endParaRPr lang="en-US"/>
+          </a:p>
+        </p:txBody>
+      </p:sp>
+    </p:spTree>
+  </p:cSld>
+  <p:clrMapOvr>
+    <a:masterClrMapping/>
+  </p:clrMapOvr>
+</p:sld>
+</file>
+
+<file path=ppt/slides/slide11.xml><?xml version="1.0" encoding="utf-8"?>
+<p:sld xmlns:a="http://schemas.openxmlformats.org/drawingml/2006/main" xmlns:r="http://schemas.openxmlformats.org/officeDocument/2006/relationships" xmlns:p="http://schemas.openxmlformats.org/presentationml/2006/main">
+  <p:cSld name="Slide 11">
+    <p:spTree>
+      <p:nvGrpSpPr>
+        <p:cNvPr id="1" name=""/>
+        <p:cNvGrpSpPr/>
+        <p:nvPr/>
+      </p:nvGrpSpPr>
+      <p:grpSpPr>
+        <a:xfrm>
+          <a:off x="0" y="0"/>
+          <a:ext cx="0" cy="0"/>
+          <a:chOff x="0" y="0"/>
+          <a:chExt cx="0" cy="0"/>
+        </a:xfrm>
+      </p:grpSpPr>
+      <p:sp>
+        <p:nvSpPr>
+          <p:cNvPr id="2" name="title"/>
+          <p:cNvSpPr txBox="1"/>
+          <p:nvPr/>
+        </p:nvSpPr>
+        <p:spPr>
+          <a:xfrm>
+            <a:off x="548640" y="320040"/>
+            <a:ext cx="11064240" cy="777240"/>
+          </a:xfrm>
+          <a:prstGeom prst="rect">
+            <a:avLst/>
+          </a:prstGeom>
+          <a:noFill/>
+          <a:ln/>
+        </p:spPr>
+        <p:txBody>
+          <a:bodyPr wrap="square" lIns="0" tIns="0" rIns="0" bIns="0" rtlCol="0" anchor="ctr"/>
+          <a:lstStyle/>
+          <a:p>
+            <a:pPr indent="0" marL="0">
+              <a:buNone/>
+            </a:pPr>
+            <a:r>
+              <a:rPr lang="en-US" sz="3200" b="1" dirty="0">
+                <a:solidFill>
+                  <a:srgbClr val="1E2329"/>
+                </a:solidFill>
+              </a:rPr>
+              <a:t>On a year it never saw, it beats every simple rule</a:t>
+            </a:r>
+            <a:endParaRPr lang="en-US" sz="3200" dirty="0"/>
+          </a:p>
+        </p:txBody>
+      </p:sp>
+      <p:graphicFrame>
+        <p:nvGraphicFramePr>
+          <p:cNvPr id="3" name="Chart 0" descr=""/>
+          <p:cNvGraphicFramePr/>
+          <p:nvPr/>
+        </p:nvGraphicFramePr>
+        <p:xfrm>
+          <a:off x="548640" y="1280160"/>
+          <a:ext cx="6766560" cy="4754880"/>
+        </p:xfrm>
+        <a:graphic xmlns:a="http://schemas.openxmlformats.org/drawingml/2006/main">
+          <a:graphicData uri="http://schemas.openxmlformats.org/drawingml/2006/chart">
+            <c:chart xmlns:c="http://schemas.openxmlformats.org/drawingml/2006/chart" r:id="rId1"/>
+          </a:graphicData>
+        </a:graphic>
+      </p:graphicFrame>
+      <p:sp>
+        <p:nvSpPr>
+          <p:cNvPr id="4" name="Text 1"/>
+          <p:cNvSpPr txBox="1"/>
+          <p:nvPr/>
+        </p:nvSpPr>
+        <p:spPr>
+          <a:xfrm>
+            <a:off x="7680960" y="1325880"/>
+            <a:ext cx="3931920" cy="594360"/>
+          </a:xfrm>
+          <a:prstGeom prst="rect">
+            <a:avLst/>
+          </a:prstGeom>
+          <a:noFill/>
+          <a:ln/>
+        </p:spPr>
+        <p:txBody>
+          <a:bodyPr wrap="square" lIns="0" tIns="0" rIns="0" bIns="0" rtlCol="0" anchor="t"/>
+          <a:lstStyle/>
+          <a:p>
+            <a:pPr indent="0" marL="0">
+              <a:buNone/>
+            </a:pPr>
+            <a:r>
+              <a:rPr lang="en-US" sz="3600" b="1" dirty="0">
+                <a:solidFill>
+                  <a:srgbClr val="2A78D6"/>
+                </a:solidFill>
+              </a:rPr>
+              <a:t>0.73</a:t>
+            </a:r>
+            <a:endParaRPr lang="en-US" sz="3600" dirty="0"/>
+          </a:p>
+        </p:txBody>
+      </p:sp>
+      <p:sp>
+        <p:nvSpPr>
+          <p:cNvPr id="5" name="Text 2"/>
+          <p:cNvSpPr txBox="1"/>
+          <p:nvPr/>
+        </p:nvSpPr>
+        <p:spPr>
+          <a:xfrm>
+            <a:off x="7680960" y="1920240"/>
+            <a:ext cx="3931920" cy="457200"/>
+          </a:xfrm>
+          <a:prstGeom prst="rect">
+            <a:avLst/>
+          </a:prstGeom>
+          <a:noFill/>
+          <a:ln/>
+        </p:spPr>
+        <p:txBody>
+          <a:bodyPr wrap="square" lIns="0" tIns="0" rIns="0" bIns="0" rtlCol="0" anchor="t"/>
+          <a:lstStyle/>
+          <a:p>
+            <a:pPr indent="0" marL="0">
+              <a:buNone/>
+            </a:pPr>
+            <a:r>
+              <a:rPr lang="en-US" sz="1400" dirty="0">
+                <a:solidFill>
+                  <a:srgbClr val="4B5563"/>
+                </a:solidFill>
+              </a:rPr>
+              <a:t>macro-F1, vs 0.61 for the best simple rule</a:t>
+            </a:r>
+            <a:endParaRPr lang="en-US" sz="1400" dirty="0"/>
+          </a:p>
+        </p:txBody>
+      </p:sp>
+      <p:sp>
+        <p:nvSpPr>
+          <p:cNvPr id="6" name="Text 3"/>
+          <p:cNvSpPr txBox="1"/>
+          <p:nvPr/>
+        </p:nvSpPr>
+        <p:spPr>
+          <a:xfrm>
+            <a:off x="7680960" y="2514600"/>
+            <a:ext cx="3931920" cy="594360"/>
+          </a:xfrm>
+          <a:prstGeom prst="rect">
+            <a:avLst/>
+          </a:prstGeom>
+          <a:noFill/>
+          <a:ln/>
+        </p:spPr>
+        <p:txBody>
+          <a:bodyPr wrap="square" lIns="0" tIns="0" rIns="0" bIns="0" rtlCol="0" anchor="t"/>
+          <a:lstStyle/>
+          <a:p>
+            <a:pPr indent="0" marL="0">
+              <a:buNone/>
+            </a:pPr>
+            <a:r>
+              <a:rPr lang="en-US" sz="3600" b="1" dirty="0">
+                <a:solidFill>
+                  <a:srgbClr val="D03B3B"/>
+                </a:solidFill>
+              </a:rPr>
+              <a:t>80%</a:t>
+            </a:r>
+            <a:endParaRPr lang="en-US" sz="3600" dirty="0"/>
+          </a:p>
+        </p:txBody>
+      </p:sp>
+      <p:sp>
+        <p:nvSpPr>
+          <p:cNvPr id="7" name="Text 4"/>
+          <p:cNvSpPr txBox="1"/>
+          <p:nvPr/>
+        </p:nvSpPr>
+        <p:spPr>
+          <a:xfrm>
+            <a:off x="7680960" y="3108960"/>
+            <a:ext cx="3931920" cy="457200"/>
+          </a:xfrm>
+          <a:prstGeom prst="rect">
+            <a:avLst/>
+          </a:prstGeom>
+          <a:noFill/>
+          <a:ln/>
+        </p:spPr>
+        <p:txBody>
+          <a:bodyPr wrap="square" lIns="0" tIns="0" rIns="0" bIns="0" rtlCol="0" anchor="t"/>
+          <a:lstStyle/>
+          <a:p>
+            <a:pPr indent="0" marL="0">
+              <a:buNone/>
+            </a:pPr>
+            <a:r>
+              <a:rPr lang="en-US" sz="1400" dirty="0">
+                <a:solidFill>
+                  <a:srgbClr val="4B5563"/>
+                </a:solidFill>
+              </a:rPr>
+              <a:t>of High-congestion hours caught</a:t>
+            </a:r>
+            <a:endParaRPr lang="en-US" sz="1400" dirty="0"/>
+          </a:p>
+        </p:txBody>
+      </p:sp>
+      <p:sp>
+        <p:nvSpPr>
+          <p:cNvPr id="8" name="Text 5"/>
+          <p:cNvSpPr txBox="1"/>
+          <p:nvPr/>
+        </p:nvSpPr>
+        <p:spPr>
+          <a:xfrm>
+            <a:off x="7680960" y="3703320"/>
+            <a:ext cx="3931920" cy="594360"/>
+          </a:xfrm>
+          <a:prstGeom prst="rect">
+            <a:avLst/>
+          </a:prstGeom>
+          <a:noFill/>
+          <a:ln/>
+        </p:spPr>
+        <p:txBody>
+          <a:bodyPr wrap="square" lIns="0" tIns="0" rIns="0" bIns="0" rtlCol="0" anchor="t"/>
+          <a:lstStyle/>
+          <a:p>
+            <a:pPr indent="0" marL="0">
+              <a:buNone/>
+            </a:pPr>
+            <a:r>
+              <a:rPr lang="en-US" sz="3600" b="1" dirty="0">
+                <a:solidFill>
+                  <a:srgbClr val="E8A317"/>
+                </a:solidFill>
+              </a:rPr>
+              <a:t>~1</a:t>
+            </a:r>
+            <a:endParaRPr lang="en-US" sz="3600" dirty="0"/>
+          </a:p>
+        </p:txBody>
+      </p:sp>
+      <p:sp>
+        <p:nvSpPr>
+          <p:cNvPr id="9" name="Text 6"/>
+          <p:cNvSpPr txBox="1"/>
+          <p:nvPr/>
+        </p:nvSpPr>
+        <p:spPr>
+          <a:xfrm>
+            <a:off x="7680960" y="4297680"/>
+            <a:ext cx="3931920" cy="457200"/>
+          </a:xfrm>
+          <a:prstGeom prst="rect">
+            <a:avLst/>
+          </a:prstGeom>
+          <a:noFill/>
+          <a:ln/>
+        </p:spPr>
+        <p:txBody>
+          <a:bodyPr wrap="square" lIns="0" tIns="0" rIns="0" bIns="0" rtlCol="0" anchor="t"/>
+          <a:lstStyle/>
+          <a:p>
+            <a:pPr indent="0" marL="0">
+              <a:buNone/>
+            </a:pPr>
+            <a:r>
+              <a:rPr lang="en-US" sz="1400" dirty="0">
+                <a:solidFill>
+                  <a:srgbClr val="4B5563"/>
+                </a:solidFill>
+              </a:rPr>
+              <a:t>false alert per week (out of 10 forecasts)</a:t>
+            </a:r>
+            <a:endParaRPr lang="en-US" sz="1400" dirty="0"/>
+          </a:p>
+        </p:txBody>
+      </p:sp>
+      <p:sp>
+        <p:nvSpPr>
+          <p:cNvPr id="10" name="Text 7"/>
+          <p:cNvSpPr txBox="1"/>
+          <p:nvPr/>
+        </p:nvSpPr>
+        <p:spPr>
+          <a:xfrm>
+            <a:off x="7680960" y="4892040"/>
+            <a:ext cx="3931920" cy="594360"/>
+          </a:xfrm>
+          <a:prstGeom prst="rect">
+            <a:avLst/>
+          </a:prstGeom>
+          <a:noFill/>
+          <a:ln/>
+        </p:spPr>
+        <p:txBody>
+          <a:bodyPr wrap="square" lIns="0" tIns="0" rIns="0" bIns="0" rtlCol="0" anchor="t"/>
+          <a:lstStyle/>
+          <a:p>
+            <a:pPr indent="0" marL="0">
+              <a:buNone/>
+            </a:pPr>
+            <a:r>
+              <a:rPr lang="en-US" sz="3600" b="1" dirty="0">
+                <a:solidFill>
+                  <a:srgbClr val="0CA30C"/>
+                </a:solidFill>
+              </a:rPr>
+              <a:t>0.69</a:t>
+            </a:r>
+            <a:endParaRPr lang="en-US" sz="3600" dirty="0"/>
+          </a:p>
+        </p:txBody>
+      </p:sp>
+      <p:sp>
+        <p:nvSpPr>
+          <p:cNvPr id="11" name="Text 8"/>
+          <p:cNvSpPr txBox="1"/>
+          <p:nvPr/>
+        </p:nvSpPr>
+        <p:spPr>
+          <a:xfrm>
+            <a:off x="7680960" y="5486400"/>
+            <a:ext cx="3931920" cy="457200"/>
+          </a:xfrm>
+          <a:prstGeom prst="rect">
+            <a:avLst/>
+          </a:prstGeom>
+          <a:noFill/>
+          <a:ln/>
+        </p:spPr>
+        <p:txBody>
+          <a:bodyPr wrap="square" lIns="0" tIns="0" rIns="0" bIns="0" rtlCol="0" anchor="t"/>
+          <a:lstStyle/>
+          <a:p>
+            <a:pPr indent="0" marL="0">
+              <a:buNone/>
+            </a:pPr>
+            <a:r>
+              <a:rPr lang="en-US" sz="1400" dirty="0">
+                <a:solidFill>
+                  <a:srgbClr val="4B5563"/>
+                </a:solidFill>
+              </a:rPr>
+              <a:t>macro-F1 even 2 hours ahead (92% of High caught)</a:t>
+            </a:r>
+            <a:endParaRPr lang="en-US" sz="1400" dirty="0"/>
+          </a:p>
+        </p:txBody>
+      </p:sp>
+      <p:sp>
+        <p:nvSpPr>
+          <p:cNvPr id="25" name="Slide Number Placeholder 0"/>
+          <p:cNvSpPr>
+            <a:spLocks noGrp="1"/>
+          </p:cNvSpPr>
+          <p:nvPr>
+            <p:ph type="sldNum" sz="quarter" idx="4294967295"/>
+          </p:nvPr>
+        </p:nvSpPr>
+        <p:spPr>
+          <a:xfrm>
+            <a:off x="11155680" y="6400800"/>
+            <a:ext cx="548640" cy="274320"/>
+          </a:xfrm>
+          <a:prstGeom prst="rect">
+            <a:avLst/>
+          </a:prstGeom>
+          <a:extLst>
+            <a:ext uri="{C572A759-6A51-4108-AA02-DFA0A04FC94B}">
+              <ma14:wrappingTextBoxFlag xmlns:ma14="http://schemas.microsoft.com/office/mac/drawingml/2011/main" val="0"/>
+            </a:ext>
+          </a:extLst>
+        </p:spPr>
+        <p:txBody>
+          <a:bodyPr/>
+          <a:lstStyle>
+            <a:lvl1pPr>
+              <a:defRPr sz="1000">
+                <a:solidFill>
+                  <a:srgbClr val="6B7280"/>
+                </a:solidFill>
+              </a:defRPr>
+            </a:lvl1pPr>
+          </a:lstStyle>
+          <a:p>
+            <a:pPr algn="r"/>
+            <a:fld id="{F7021451-1387-4CA6-816F-3879F97B5CBC}" type="slidenum">
+              <a:rPr b="0" lang="en-US"/>
+              <a:t>11</a:t>
+            </a:fld>
+            <a:endParaRPr lang="en-US"/>
+          </a:p>
+        </p:txBody>
+      </p:sp>
+    </p:spTree>
+  </p:cSld>
+  <p:clrMapOvr>
+    <a:masterClrMapping/>
+  </p:clrMapOvr>
+</p:sld>
+</file>
+
+<file path=ppt/slides/slide12.xml><?xml version="1.0" encoding="utf-8"?>
+<p:sld xmlns:a="http://schemas.openxmlformats.org/drawingml/2006/main" xmlns:r="http://schemas.openxmlformats.org/officeDocument/2006/relationships" xmlns:p="http://schemas.openxmlformats.org/presentationml/2006/main">
+  <p:cSld name="Slide 12">
+    <p:spTree>
+      <p:nvGrpSpPr>
+        <p:cNvPr id="1" name=""/>
+        <p:cNvGrpSpPr/>
+        <p:nvPr/>
+      </p:nvGrpSpPr>
+      <p:grpSpPr>
+        <a:xfrm>
+          <a:off x="0" y="0"/>
+          <a:ext cx="0" cy="0"/>
+          <a:chOff x="0" y="0"/>
+          <a:chExt cx="0" cy="0"/>
+        </a:xfrm>
+      </p:grpSpPr>
+      <p:sp>
+        <p:nvSpPr>
+          <p:cNvPr id="2" name="title"/>
+          <p:cNvSpPr txBox="1"/>
+          <p:nvPr/>
+        </p:nvSpPr>
+        <p:spPr>
+          <a:xfrm>
+            <a:off x="548640" y="320040"/>
+            <a:ext cx="11064240" cy="777240"/>
+          </a:xfrm>
+          <a:prstGeom prst="rect">
+            <a:avLst/>
+          </a:prstGeom>
+          <a:noFill/>
+          <a:ln/>
+        </p:spPr>
+        <p:txBody>
+          <a:bodyPr wrap="square" lIns="0" tIns="0" rIns="0" bIns="0" rtlCol="0" anchor="ctr"/>
+          <a:lstStyle/>
+          <a:p>
+            <a:pPr indent="0" marL="0">
+              <a:buNone/>
+            </a:pPr>
+            <a:r>
+              <a:rPr lang="en-US" sz="3200" b="1" dirty="0">
+                <a:solidFill>
+                  <a:srgbClr val="1E2329"/>
+                </a:solidFill>
+              </a:rPr>
+              <a:t>Test cases: where it works and where it fails</a:t>
+            </a:r>
+            <a:endParaRPr lang="en-US" sz="3200" dirty="0"/>
+          </a:p>
+        </p:txBody>
+      </p:sp>
+      <p:graphicFrame>
+        <p:nvGraphicFramePr>
+          <p:cNvPr id="13" name="Table 0"/>
           <p:cNvGraphicFramePr>
             <a:graphicFrameLocks noGrp="1"/>
           </p:cNvGraphicFramePr>
@@ -5456,1799 +7384,6 @@
             <a:pPr algn="r"/>
             <a:fld id="{F7021451-1387-4CA6-816F-3879F97B5CBC}" type="slidenum">
               <a:rPr b="0" lang="en-US"/>
-              <a:t>10</a:t>
-            </a:fld>
-            <a:endParaRPr lang="en-US"/>
-          </a:p>
-        </p:txBody>
-      </p:sp>
-    </p:spTree>
-  </p:cSld>
-  <p:clrMapOvr>
-    <a:masterClrMapping/>
-  </p:clrMapOvr>
-</p:sld>
-</file>
-
-<file path=ppt/slides/slide11.xml><?xml version="1.0" encoding="utf-8"?>
-<p:sld xmlns:a="http://schemas.openxmlformats.org/drawingml/2006/main" xmlns:r="http://schemas.openxmlformats.org/officeDocument/2006/relationships" xmlns:p="http://schemas.openxmlformats.org/presentationml/2006/main">
-  <p:cSld name="Slide 11">
-    <p:spTree>
-      <p:nvGrpSpPr>
-        <p:cNvPr id="1" name=""/>
-        <p:cNvGrpSpPr/>
-        <p:nvPr/>
-      </p:nvGrpSpPr>
-      <p:grpSpPr>
-        <a:xfrm>
-          <a:off x="0" y="0"/>
-          <a:ext cx="0" cy="0"/>
-          <a:chOff x="0" y="0"/>
-          <a:chExt cx="0" cy="0"/>
-        </a:xfrm>
-      </p:grpSpPr>
-      <p:sp>
-        <p:nvSpPr>
-          <p:cNvPr id="2" name="title"/>
-          <p:cNvSpPr txBox="1"/>
-          <p:nvPr/>
-        </p:nvSpPr>
-        <p:spPr>
-          <a:xfrm>
-            <a:off x="548640" y="320040"/>
-            <a:ext cx="11064240" cy="777240"/>
-          </a:xfrm>
-          <a:prstGeom prst="rect">
-            <a:avLst/>
-          </a:prstGeom>
-          <a:noFill/>
-          <a:ln/>
-        </p:spPr>
-        <p:txBody>
-          <a:bodyPr wrap="square" lIns="0" tIns="0" rIns="0" bIns="0" rtlCol="0" anchor="ctr"/>
-          <a:lstStyle/>
-          <a:p>
-            <a:pPr indent="0" marL="0">
-              <a:buNone/>
-            </a:pPr>
-            <a:r>
-              <a:rPr lang="en-US" sz="3200" b="1" dirty="0">
-                <a:solidFill>
-                  <a:srgbClr val="1E2329"/>
-                </a:solidFill>
-              </a:rPr>
-              <a:t>What drives the forecast, and what it can't do yet</a:t>
-            </a:r>
-            <a:endParaRPr lang="en-US" sz="3200" dirty="0"/>
-          </a:p>
-        </p:txBody>
-      </p:sp>
-      <p:graphicFrame>
-        <p:nvGraphicFramePr>
-          <p:cNvPr id="3" name="Chart 0" descr=""/>
-          <p:cNvGraphicFramePr/>
-          <p:nvPr/>
-        </p:nvGraphicFramePr>
-        <p:xfrm>
-          <a:off x="548640" y="1280160"/>
-          <a:ext cx="6035040" cy="3840480"/>
-        </p:xfrm>
-        <a:graphic xmlns:a="http://schemas.openxmlformats.org/drawingml/2006/main">
-          <a:graphicData uri="http://schemas.openxmlformats.org/drawingml/2006/chart">
-            <c:chart xmlns:c="http://schemas.openxmlformats.org/drawingml/2006/chart" r:id="rId1"/>
-          </a:graphicData>
-        </a:graphic>
-      </p:graphicFrame>
-      <p:sp>
-        <p:nvSpPr>
-          <p:cNvPr id="4" name="Text 1"/>
-          <p:cNvSpPr txBox="1"/>
-          <p:nvPr/>
-        </p:nvSpPr>
-        <p:spPr>
-          <a:xfrm>
-            <a:off x="548640" y="5257800"/>
-            <a:ext cx="6035040" cy="731520"/>
-          </a:xfrm>
-          <a:prstGeom prst="rect">
-            <a:avLst/>
-          </a:prstGeom>
-          <a:noFill/>
-          <a:ln/>
-        </p:spPr>
-        <p:txBody>
-          <a:bodyPr wrap="square" lIns="0" tIns="0" rIns="0" bIns="0" rtlCol="0" anchor="t"/>
-          <a:lstStyle/>
-          <a:p>
-            <a:pPr indent="0" marL="0">
-              <a:buNone/>
-            </a:pPr>
-            <a:r>
-              <a:rPr lang="en-US" sz="1250" dirty="0">
-                <a:solidFill>
-                  <a:srgbClr val="6B7280"/>
-                </a:solidFill>
-              </a:rPr>
-              <a:t>Weather and holidays matter on the days they occur, but they are rare in the test year. The per-forecast "why" chart shows their effect.</a:t>
-            </a:r>
-            <a:endParaRPr lang="en-US" sz="1250" dirty="0"/>
-          </a:p>
-        </p:txBody>
-      </p:sp>
-      <p:sp>
-        <p:nvSpPr>
-          <p:cNvPr id="5" name="Text 2"/>
-          <p:cNvSpPr txBox="1"/>
-          <p:nvPr/>
-        </p:nvSpPr>
-        <p:spPr>
-          <a:xfrm>
-            <a:off x="7040880" y="1371600"/>
-            <a:ext cx="4572000" cy="411480"/>
-          </a:xfrm>
-          <a:prstGeom prst="rect">
-            <a:avLst/>
-          </a:prstGeom>
-          <a:noFill/>
-          <a:ln/>
-        </p:spPr>
-        <p:txBody>
-          <a:bodyPr wrap="square" lIns="0" tIns="0" rIns="0" bIns="0" rtlCol="0" anchor="t"/>
-          <a:lstStyle/>
-          <a:p>
-            <a:pPr indent="0" marL="0">
-              <a:buNone/>
-            </a:pPr>
-            <a:r>
-              <a:rPr lang="en-US" sz="1900" b="1" dirty="0">
-                <a:solidFill>
-                  <a:srgbClr val="1E2329"/>
-                </a:solidFill>
-              </a:rPr>
-              <a:t>Limitations</a:t>
-            </a:r>
-            <a:endParaRPr lang="en-US" sz="1900" dirty="0"/>
-          </a:p>
-        </p:txBody>
-      </p:sp>
-      <p:sp>
-        <p:nvSpPr>
-          <p:cNvPr id="6" name="icon-circle"/>
-          <p:cNvSpPr/>
-          <p:nvPr/>
-        </p:nvSpPr>
-        <p:spPr>
-          <a:xfrm>
-            <a:off x="7040880" y="1920240"/>
-            <a:ext cx="457200" cy="457200"/>
-          </a:xfrm>
-          <a:prstGeom prst="ellipse">
-            <a:avLst/>
-          </a:prstGeom>
-          <a:solidFill>
-            <a:srgbClr val="9CA3AF"/>
-          </a:solidFill>
-          <a:ln w="12700">
-            <a:solidFill>
-              <a:srgbClr val="9CA3AF"/>
-            </a:solidFill>
-            <a:prstDash val="solid"/>
-          </a:ln>
-        </p:spPr>
-      </p:sp>
-      <p:pic>
-        <p:nvPicPr>
-          <p:cNvPr id="7" name="icon" descr="preencoded.png">    </p:cNvPr>
-          <p:cNvPicPr>
-            <a:picLocks noChangeAspect="1"/>
-          </p:cNvPicPr>
-          <p:nvPr/>
-        </p:nvPicPr>
-        <p:blipFill>
-          <a:blip r:embed="rId2"/>
-          <a:stretch>
-            <a:fillRect/>
-          </a:stretch>
-        </p:blipFill>
-        <p:spPr>
-          <a:xfrm>
-            <a:off x="7141464" y="2020824"/>
-            <a:ext cx="256032" cy="256032"/>
-          </a:xfrm>
-          <a:prstGeom prst="rect">
-            <a:avLst/>
-          </a:prstGeom>
-        </p:spPr>
-      </p:pic>
-      <p:sp>
-        <p:nvSpPr>
-          <p:cNvPr id="8" name="Text 4"/>
-          <p:cNvSpPr txBox="1"/>
-          <p:nvPr/>
-        </p:nvSpPr>
-        <p:spPr>
-          <a:xfrm>
-            <a:off x="7680960" y="1883664"/>
-            <a:ext cx="3931920" cy="320040"/>
-          </a:xfrm>
-          <a:prstGeom prst="rect">
-            <a:avLst/>
-          </a:prstGeom>
-          <a:noFill/>
-          <a:ln/>
-        </p:spPr>
-        <p:txBody>
-          <a:bodyPr wrap="square" lIns="0" tIns="0" rIns="0" bIns="0" rtlCol="0" anchor="t"/>
-          <a:lstStyle/>
-          <a:p>
-            <a:pPr indent="0" marL="0">
-              <a:buNone/>
-            </a:pPr>
-            <a:r>
-              <a:rPr lang="en-US" sz="1500" b="1" dirty="0">
-                <a:solidFill>
-                  <a:srgbClr val="1E2329"/>
-                </a:solidFill>
-              </a:rPr>
-              <a:t>Not live</a:t>
-            </a:r>
-            <a:endParaRPr lang="en-US" sz="1500" dirty="0"/>
-          </a:p>
-        </p:txBody>
-      </p:sp>
-      <p:sp>
-        <p:nvSpPr>
-          <p:cNvPr id="9" name="Text 5"/>
-          <p:cNvSpPr txBox="1"/>
-          <p:nvPr/>
-        </p:nvSpPr>
-        <p:spPr>
-          <a:xfrm>
-            <a:off x="7680960" y="2212848"/>
-            <a:ext cx="3931920" cy="411480"/>
-          </a:xfrm>
-          <a:prstGeom prst="rect">
-            <a:avLst/>
-          </a:prstGeom>
-          <a:noFill/>
-          <a:ln/>
-        </p:spPr>
-        <p:txBody>
-          <a:bodyPr wrap="square" lIns="0" tIns="0" rIns="0" bIns="0" rtlCol="0" anchor="t"/>
-          <a:lstStyle/>
-          <a:p>
-            <a:pPr indent="0" marL="0">
-              <a:buNone/>
-            </a:pPr>
-            <a:r>
-              <a:rPr lang="en-US" sz="1300" dirty="0">
-                <a:solidFill>
-                  <a:srgbClr val="4B5563"/>
-                </a:solidFill>
-              </a:rPr>
-              <a:t>Replays history; no traffic or weather API yet</a:t>
-            </a:r>
-            <a:endParaRPr lang="en-US" sz="1300" dirty="0"/>
-          </a:p>
-        </p:txBody>
-      </p:sp>
-      <p:sp>
-        <p:nvSpPr>
-          <p:cNvPr id="10" name="icon-circle"/>
-          <p:cNvSpPr/>
-          <p:nvPr/>
-        </p:nvSpPr>
-        <p:spPr>
-          <a:xfrm>
-            <a:off x="7040880" y="2743200"/>
-            <a:ext cx="457200" cy="457200"/>
-          </a:xfrm>
-          <a:prstGeom prst="ellipse">
-            <a:avLst/>
-          </a:prstGeom>
-          <a:solidFill>
-            <a:srgbClr val="9CA3AF"/>
-          </a:solidFill>
-          <a:ln w="12700">
-            <a:solidFill>
-              <a:srgbClr val="9CA3AF"/>
-            </a:solidFill>
-            <a:prstDash val="solid"/>
-          </a:ln>
-        </p:spPr>
-      </p:sp>
-      <p:pic>
-        <p:nvPicPr>
-          <p:cNvPr id="11" name="icon" descr="preencoded.png">    </p:cNvPr>
-          <p:cNvPicPr>
-            <a:picLocks noChangeAspect="1"/>
-          </p:cNvPicPr>
-          <p:nvPr/>
-        </p:nvPicPr>
-        <p:blipFill>
-          <a:blip r:embed="rId3"/>
-          <a:stretch>
-            <a:fillRect/>
-          </a:stretch>
-        </p:blipFill>
-        <p:spPr>
-          <a:xfrm>
-            <a:off x="7141464" y="2843784"/>
-            <a:ext cx="256032" cy="256032"/>
-          </a:xfrm>
-          <a:prstGeom prst="rect">
-            <a:avLst/>
-          </a:prstGeom>
-        </p:spPr>
-      </p:pic>
-      <p:sp>
-        <p:nvSpPr>
-          <p:cNvPr id="12" name="Text 7"/>
-          <p:cNvSpPr txBox="1"/>
-          <p:nvPr/>
-        </p:nvSpPr>
-        <p:spPr>
-          <a:xfrm>
-            <a:off x="7680960" y="2706624"/>
-            <a:ext cx="3931920" cy="320040"/>
-          </a:xfrm>
-          <a:prstGeom prst="rect">
-            <a:avLst/>
-          </a:prstGeom>
-          <a:noFill/>
-          <a:ln/>
-        </p:spPr>
-        <p:txBody>
-          <a:bodyPr wrap="square" lIns="0" tIns="0" rIns="0" bIns="0" rtlCol="0" anchor="t"/>
-          <a:lstStyle/>
-          <a:p>
-            <a:pPr indent="0" marL="0">
-              <a:buNone/>
-            </a:pPr>
-            <a:r>
-              <a:rPr lang="en-US" sz="1500" b="1" dirty="0">
-                <a:solidFill>
-                  <a:srgbClr val="1E2329"/>
-                </a:solidFill>
-              </a:rPr>
-              <a:t>Stand-in road</a:t>
-            </a:r>
-            <a:endParaRPr lang="en-US" sz="1500" dirty="0"/>
-          </a:p>
-        </p:txBody>
-      </p:sp>
-      <p:sp>
-        <p:nvSpPr>
-          <p:cNvPr id="13" name="Text 8"/>
-          <p:cNvSpPr txBox="1"/>
-          <p:nvPr/>
-        </p:nvSpPr>
-        <p:spPr>
-          <a:xfrm>
-            <a:off x="7680960" y="3035808"/>
-            <a:ext cx="3931920" cy="411480"/>
-          </a:xfrm>
-          <a:prstGeom prst="rect">
-            <a:avLst/>
-          </a:prstGeom>
-          <a:noFill/>
-          <a:ln/>
-        </p:spPr>
-        <p:txBody>
-          <a:bodyPr wrap="square" lIns="0" tIns="0" rIns="0" bIns="0" rtlCol="0" anchor="t"/>
-          <a:lstStyle/>
-          <a:p>
-            <a:pPr indent="0" marL="0">
-              <a:buNone/>
-            </a:pPr>
-            <a:r>
-              <a:rPr lang="en-US" sz="1300" dirty="0">
-                <a:solidFill>
-                  <a:srgbClr val="4B5563"/>
-                </a:solidFill>
-              </a:rPr>
-              <a:t>Highway I-94, not our gate: retrain on our counts</a:t>
-            </a:r>
-            <a:endParaRPr lang="en-US" sz="1300" dirty="0"/>
-          </a:p>
-        </p:txBody>
-      </p:sp>
-      <p:sp>
-        <p:nvSpPr>
-          <p:cNvPr id="14" name="icon-circle"/>
-          <p:cNvSpPr/>
-          <p:nvPr/>
-        </p:nvSpPr>
-        <p:spPr>
-          <a:xfrm>
-            <a:off x="7040880" y="3566160"/>
-            <a:ext cx="457200" cy="457200"/>
-          </a:xfrm>
-          <a:prstGeom prst="ellipse">
-            <a:avLst/>
-          </a:prstGeom>
-          <a:solidFill>
-            <a:srgbClr val="9CA3AF"/>
-          </a:solidFill>
-          <a:ln w="12700">
-            <a:solidFill>
-              <a:srgbClr val="9CA3AF"/>
-            </a:solidFill>
-            <a:prstDash val="solid"/>
-          </a:ln>
-        </p:spPr>
-      </p:sp>
-      <p:pic>
-        <p:nvPicPr>
-          <p:cNvPr id="15" name="icon" descr="preencoded.png">    </p:cNvPr>
-          <p:cNvPicPr>
-            <a:picLocks noChangeAspect="1"/>
-          </p:cNvPicPr>
-          <p:nvPr/>
-        </p:nvPicPr>
-        <p:blipFill>
-          <a:blip r:embed="rId4"/>
-          <a:stretch>
-            <a:fillRect/>
-          </a:stretch>
-        </p:blipFill>
-        <p:spPr>
-          <a:xfrm>
-            <a:off x="7141464" y="3666744"/>
-            <a:ext cx="256032" cy="256032"/>
-          </a:xfrm>
-          <a:prstGeom prst="rect">
-            <a:avLst/>
-          </a:prstGeom>
-        </p:spPr>
-      </p:pic>
-      <p:sp>
-        <p:nvSpPr>
-          <p:cNvPr id="16" name="Text 10"/>
-          <p:cNvSpPr txBox="1"/>
-          <p:nvPr/>
-        </p:nvSpPr>
-        <p:spPr>
-          <a:xfrm>
-            <a:off x="7680960" y="3529584"/>
-            <a:ext cx="3931920" cy="320040"/>
-          </a:xfrm>
-          <a:prstGeom prst="rect">
-            <a:avLst/>
-          </a:prstGeom>
-          <a:noFill/>
-          <a:ln/>
-        </p:spPr>
-        <p:txBody>
-          <a:bodyPr wrap="square" lIns="0" tIns="0" rIns="0" bIns="0" rtlCol="0" anchor="t"/>
-          <a:lstStyle/>
-          <a:p>
-            <a:pPr indent="0" marL="0">
-              <a:buNone/>
-            </a:pPr>
-            <a:r>
-              <a:rPr lang="en-US" sz="1500" b="1" dirty="0">
-                <a:solidFill>
-                  <a:srgbClr val="1E2329"/>
-                </a:solidFill>
-              </a:rPr>
-              <a:t>Volume, not speed</a:t>
-            </a:r>
-            <a:endParaRPr lang="en-US" sz="1500" dirty="0"/>
-          </a:p>
-        </p:txBody>
-      </p:sp>
-      <p:sp>
-        <p:nvSpPr>
-          <p:cNvPr id="17" name="Text 11"/>
-          <p:cNvSpPr txBox="1"/>
-          <p:nvPr/>
-        </p:nvSpPr>
-        <p:spPr>
-          <a:xfrm>
-            <a:off x="7680960" y="3858768"/>
-            <a:ext cx="3931920" cy="411480"/>
-          </a:xfrm>
-          <a:prstGeom prst="rect">
-            <a:avLst/>
-          </a:prstGeom>
-          <a:noFill/>
-          <a:ln/>
-        </p:spPr>
-        <p:txBody>
-          <a:bodyPr wrap="square" lIns="0" tIns="0" rIns="0" bIns="0" rtlCol="0" anchor="t"/>
-          <a:lstStyle/>
-          <a:p>
-            <a:pPr indent="0" marL="0">
-              <a:buNone/>
-            </a:pPr>
-            <a:r>
-              <a:rPr lang="en-US" sz="1300" dirty="0">
-                <a:solidFill>
-                  <a:srgbClr val="4B5563"/>
-                </a:solidFill>
-              </a:rPr>
-              <a:t>Labels are a proxy; queues and accidents are invisible</a:t>
-            </a:r>
-            <a:endParaRPr lang="en-US" sz="1300" dirty="0"/>
-          </a:p>
-        </p:txBody>
-      </p:sp>
-      <p:sp>
-        <p:nvSpPr>
-          <p:cNvPr id="18" name="icon-circle"/>
-          <p:cNvSpPr/>
-          <p:nvPr/>
-        </p:nvSpPr>
-        <p:spPr>
-          <a:xfrm>
-            <a:off x="7040880" y="4389120"/>
-            <a:ext cx="457200" cy="457200"/>
-          </a:xfrm>
-          <a:prstGeom prst="ellipse">
-            <a:avLst/>
-          </a:prstGeom>
-          <a:solidFill>
-            <a:srgbClr val="9CA3AF"/>
-          </a:solidFill>
-          <a:ln w="12700">
-            <a:solidFill>
-              <a:srgbClr val="9CA3AF"/>
-            </a:solidFill>
-            <a:prstDash val="solid"/>
-          </a:ln>
-        </p:spPr>
-      </p:sp>
-      <p:pic>
-        <p:nvPicPr>
-          <p:cNvPr id="19" name="icon" descr="preencoded.png">    </p:cNvPr>
-          <p:cNvPicPr>
-            <a:picLocks noChangeAspect="1"/>
-          </p:cNvPicPr>
-          <p:nvPr/>
-        </p:nvPicPr>
-        <p:blipFill>
-          <a:blip r:embed="rId5"/>
-          <a:stretch>
-            <a:fillRect/>
-          </a:stretch>
-        </p:blipFill>
-        <p:spPr>
-          <a:xfrm>
-            <a:off x="7141464" y="4489704"/>
-            <a:ext cx="256032" cy="256032"/>
-          </a:xfrm>
-          <a:prstGeom prst="rect">
-            <a:avLst/>
-          </a:prstGeom>
-        </p:spPr>
-      </p:pic>
-      <p:sp>
-        <p:nvSpPr>
-          <p:cNvPr id="20" name="Text 13"/>
-          <p:cNvSpPr txBox="1"/>
-          <p:nvPr/>
-        </p:nvSpPr>
-        <p:spPr>
-          <a:xfrm>
-            <a:off x="7680960" y="4352544"/>
-            <a:ext cx="3931920" cy="320040"/>
-          </a:xfrm>
-          <a:prstGeom prst="rect">
-            <a:avLst/>
-          </a:prstGeom>
-          <a:noFill/>
-          <a:ln/>
-        </p:spPr>
-        <p:txBody>
-          <a:bodyPr wrap="square" lIns="0" tIns="0" rIns="0" bIns="0" rtlCol="0" anchor="t"/>
-          <a:lstStyle/>
-          <a:p>
-            <a:pPr indent="0" marL="0">
-              <a:buNone/>
-            </a:pPr>
-            <a:r>
-              <a:rPr lang="en-US" sz="1500" b="1" dirty="0">
-                <a:solidFill>
-                  <a:srgbClr val="1E2329"/>
-                </a:solidFill>
-              </a:rPr>
-              <a:t>Hourly</a:t>
-            </a:r>
-            <a:endParaRPr lang="en-US" sz="1500" dirty="0"/>
-          </a:p>
-        </p:txBody>
-      </p:sp>
-      <p:sp>
-        <p:nvSpPr>
-          <p:cNvPr id="21" name="Text 14"/>
-          <p:cNvSpPr txBox="1"/>
-          <p:nvPr/>
-        </p:nvSpPr>
-        <p:spPr>
-          <a:xfrm>
-            <a:off x="7680960" y="4681728"/>
-            <a:ext cx="3931920" cy="411480"/>
-          </a:xfrm>
-          <a:prstGeom prst="rect">
-            <a:avLst/>
-          </a:prstGeom>
-          <a:noFill/>
-          <a:ln/>
-        </p:spPr>
-        <p:txBody>
-          <a:bodyPr wrap="square" lIns="0" tIns="0" rIns="0" bIns="0" rtlCol="0" anchor="t"/>
-          <a:lstStyle/>
-          <a:p>
-            <a:pPr indent="0" marL="0">
-              <a:buNone/>
-            </a:pPr>
-            <a:r>
-              <a:rPr lang="en-US" sz="1300" dirty="0">
-                <a:solidFill>
-                  <a:srgbClr val="4B5563"/>
-                </a:solidFill>
-              </a:rPr>
-              <a:t>15-minute data would give earlier, sharper alerts</a:t>
-            </a:r>
-            <a:endParaRPr lang="en-US" sz="1300" dirty="0"/>
-          </a:p>
-        </p:txBody>
-      </p:sp>
-      <p:sp>
-        <p:nvSpPr>
-          <p:cNvPr id="22" name="icon-circle"/>
-          <p:cNvSpPr/>
-          <p:nvPr/>
-        </p:nvSpPr>
-        <p:spPr>
-          <a:xfrm>
-            <a:off x="7040880" y="5212080"/>
-            <a:ext cx="457200" cy="457200"/>
-          </a:xfrm>
-          <a:prstGeom prst="ellipse">
-            <a:avLst/>
-          </a:prstGeom>
-          <a:solidFill>
-            <a:srgbClr val="9CA3AF"/>
-          </a:solidFill>
-          <a:ln w="12700">
-            <a:solidFill>
-              <a:srgbClr val="9CA3AF"/>
-            </a:solidFill>
-            <a:prstDash val="solid"/>
-          </a:ln>
-        </p:spPr>
-      </p:sp>
-      <p:pic>
-        <p:nvPicPr>
-          <p:cNvPr id="23" name="icon" descr="preencoded.png">    </p:cNvPr>
-          <p:cNvPicPr>
-            <a:picLocks noChangeAspect="1"/>
-          </p:cNvPicPr>
-          <p:nvPr/>
-        </p:nvPicPr>
-        <p:blipFill>
-          <a:blip r:embed="rId6"/>
-          <a:stretch>
-            <a:fillRect/>
-          </a:stretch>
-        </p:blipFill>
-        <p:spPr>
-          <a:xfrm>
-            <a:off x="7141464" y="5312664"/>
-            <a:ext cx="256032" cy="256032"/>
-          </a:xfrm>
-          <a:prstGeom prst="rect">
-            <a:avLst/>
-          </a:prstGeom>
-        </p:spPr>
-      </p:pic>
-      <p:sp>
-        <p:nvSpPr>
-          <p:cNvPr id="24" name="Text 16"/>
-          <p:cNvSpPr txBox="1"/>
-          <p:nvPr/>
-        </p:nvSpPr>
-        <p:spPr>
-          <a:xfrm>
-            <a:off x="7680960" y="5175504"/>
-            <a:ext cx="3931920" cy="320040"/>
-          </a:xfrm>
-          <a:prstGeom prst="rect">
-            <a:avLst/>
-          </a:prstGeom>
-          <a:noFill/>
-          <a:ln/>
-        </p:spPr>
-        <p:txBody>
-          <a:bodyPr wrap="square" lIns="0" tIns="0" rIns="0" bIns="0" rtlCol="0" anchor="t"/>
-          <a:lstStyle/>
-          <a:p>
-            <a:pPr indent="0" marL="0">
-              <a:buNone/>
-            </a:pPr>
-            <a:r>
-              <a:rPr lang="en-US" sz="1500" b="1" dirty="0">
-                <a:solidFill>
-                  <a:srgbClr val="1E2329"/>
-                </a:solidFill>
-              </a:rPr>
-              <a:t>No campus events</a:t>
-            </a:r>
-            <a:endParaRPr lang="en-US" sz="1500" dirty="0"/>
-          </a:p>
-        </p:txBody>
-      </p:sp>
-      <p:sp>
-        <p:nvSpPr>
-          <p:cNvPr id="25" name="Text 17"/>
-          <p:cNvSpPr txBox="1"/>
-          <p:nvPr/>
-        </p:nvSpPr>
-        <p:spPr>
-          <a:xfrm>
-            <a:off x="7680960" y="5504688"/>
-            <a:ext cx="3931920" cy="411480"/>
-          </a:xfrm>
-          <a:prstGeom prst="rect">
-            <a:avLst/>
-          </a:prstGeom>
-          <a:noFill/>
-          <a:ln/>
-        </p:spPr>
-        <p:txBody>
-          <a:bodyPr wrap="square" lIns="0" tIns="0" rIns="0" bIns="0" rtlCol="0" anchor="t"/>
-          <a:lstStyle/>
-          <a:p>
-            <a:pPr indent="0" marL="0">
-              <a:buNone/>
-            </a:pPr>
-            <a:r>
-              <a:rPr lang="en-US" sz="1300" dirty="0">
-                <a:solidFill>
-                  <a:srgbClr val="4B5563"/>
-                </a:solidFill>
-              </a:rPr>
-              <a:t>Exams and fests are not in the data</a:t>
-            </a:r>
-            <a:endParaRPr lang="en-US" sz="1300" dirty="0"/>
-          </a:p>
-        </p:txBody>
-      </p:sp>
-      <p:sp>
-        <p:nvSpPr>
-          <p:cNvPr id="25" name="Slide Number Placeholder 0"/>
-          <p:cNvSpPr>
-            <a:spLocks noGrp="1"/>
-          </p:cNvSpPr>
-          <p:nvPr>
-            <p:ph type="sldNum" sz="quarter" idx="4294967295"/>
-          </p:nvPr>
-        </p:nvSpPr>
-        <p:spPr>
-          <a:xfrm>
-            <a:off x="11155680" y="6400800"/>
-            <a:ext cx="548640" cy="274320"/>
-          </a:xfrm>
-          <a:prstGeom prst="rect">
-            <a:avLst/>
-          </a:prstGeom>
-          <a:extLst>
-            <a:ext uri="{C572A759-6A51-4108-AA02-DFA0A04FC94B}">
-              <ma14:wrappingTextBoxFlag xmlns:ma14="http://schemas.microsoft.com/office/mac/drawingml/2011/main" val="0"/>
-            </a:ext>
-          </a:extLst>
-        </p:spPr>
-        <p:txBody>
-          <a:bodyPr/>
-          <a:lstStyle>
-            <a:lvl1pPr>
-              <a:defRPr sz="1000">
-                <a:solidFill>
-                  <a:srgbClr val="6B7280"/>
-                </a:solidFill>
-              </a:defRPr>
-            </a:lvl1pPr>
-          </a:lstStyle>
-          <a:p>
-            <a:pPr algn="r"/>
-            <a:fld id="{F7021451-1387-4CA6-816F-3879F97B5CBC}" type="slidenum">
-              <a:rPr b="0" lang="en-US"/>
-              <a:t>11</a:t>
-            </a:fld>
-            <a:endParaRPr lang="en-US"/>
-          </a:p>
-        </p:txBody>
-      </p:sp>
-    </p:spTree>
-  </p:cSld>
-  <p:clrMapOvr>
-    <a:masterClrMapping/>
-  </p:clrMapOvr>
-</p:sld>
-</file>
-
-<file path=ppt/slides/slide12.xml><?xml version="1.0" encoding="utf-8"?>
-<p:sld xmlns:a="http://schemas.openxmlformats.org/drawingml/2006/main" xmlns:r="http://schemas.openxmlformats.org/officeDocument/2006/relationships" xmlns:p="http://schemas.openxmlformats.org/presentationml/2006/main">
-  <p:cSld name="Slide 12">
-    <p:spTree>
-      <p:nvGrpSpPr>
-        <p:cNvPr id="1" name=""/>
-        <p:cNvGrpSpPr/>
-        <p:nvPr/>
-      </p:nvGrpSpPr>
-      <p:grpSpPr>
-        <a:xfrm>
-          <a:off x="0" y="0"/>
-          <a:ext cx="0" cy="0"/>
-          <a:chOff x="0" y="0"/>
-          <a:chExt cx="0" cy="0"/>
-        </a:xfrm>
-      </p:grpSpPr>
-      <p:sp>
-        <p:nvSpPr>
-          <p:cNvPr id="2" name="title"/>
-          <p:cNvSpPr txBox="1"/>
-          <p:nvPr/>
-        </p:nvSpPr>
-        <p:spPr>
-          <a:xfrm>
-            <a:off x="548640" y="320040"/>
-            <a:ext cx="11064240" cy="777240"/>
-          </a:xfrm>
-          <a:prstGeom prst="rect">
-            <a:avLst/>
-          </a:prstGeom>
-          <a:noFill/>
-          <a:ln/>
-        </p:spPr>
-        <p:txBody>
-          <a:bodyPr wrap="square" lIns="0" tIns="0" rIns="0" bIns="0" rtlCol="0" anchor="ctr"/>
-          <a:lstStyle/>
-          <a:p>
-            <a:pPr indent="0" marL="0">
-              <a:buNone/>
-            </a:pPr>
-            <a:r>
-              <a:rPr lang="en-US" sz="3200" b="1" dirty="0">
-                <a:solidFill>
-                  <a:srgbClr val="1E2329"/>
-                </a:solidFill>
-              </a:rPr>
-              <a:t>Responsible AI: private, fair about its limits, human in charge</a:t>
-            </a:r>
-            <a:endParaRPr lang="en-US" sz="3200" dirty="0"/>
-          </a:p>
-        </p:txBody>
-      </p:sp>
-      <p:sp>
-        <p:nvSpPr>
-          <p:cNvPr id="3" name="card"/>
-          <p:cNvSpPr/>
-          <p:nvPr/>
-        </p:nvSpPr>
-        <p:spPr>
-          <a:xfrm>
-            <a:off x="548640" y="1371600"/>
-            <a:ext cx="3566160" cy="2194560"/>
-          </a:xfrm>
-          <a:prstGeom prst="roundRect">
-            <a:avLst>
-              <a:gd name="adj" fmla="val 5000"/>
-            </a:avLst>
-          </a:prstGeom>
-          <a:solidFill>
-            <a:srgbClr val="F3F4F6"/>
-          </a:solidFill>
-          <a:ln w="12700">
-            <a:solidFill>
-              <a:srgbClr val="F3F4F6"/>
-            </a:solidFill>
-            <a:prstDash val="solid"/>
-          </a:ln>
-        </p:spPr>
-      </p:sp>
-      <p:sp>
-        <p:nvSpPr>
-          <p:cNvPr id="4" name="icon-circle"/>
-          <p:cNvSpPr/>
-          <p:nvPr/>
-        </p:nvSpPr>
-        <p:spPr>
-          <a:xfrm>
-            <a:off x="822960" y="1645920"/>
-            <a:ext cx="548640" cy="548640"/>
-          </a:xfrm>
-          <a:prstGeom prst="ellipse">
-            <a:avLst/>
-          </a:prstGeom>
-          <a:solidFill>
-            <a:srgbClr val="2A78D6"/>
-          </a:solidFill>
-          <a:ln w="12700">
-            <a:solidFill>
-              <a:srgbClr val="2A78D6"/>
-            </a:solidFill>
-            <a:prstDash val="solid"/>
-          </a:ln>
-        </p:spPr>
-      </p:sp>
-      <p:pic>
-        <p:nvPicPr>
-          <p:cNvPr id="5" name="icon" descr="preencoded.png">    </p:cNvPr>
-          <p:cNvPicPr>
-            <a:picLocks noChangeAspect="1"/>
-          </p:cNvPicPr>
-          <p:nvPr/>
-        </p:nvPicPr>
-        <p:blipFill>
-          <a:blip r:embed="rId1"/>
-          <a:stretch>
-            <a:fillRect/>
-          </a:stretch>
-        </p:blipFill>
-        <p:spPr>
-          <a:xfrm>
-            <a:off x="943661" y="1766621"/>
-            <a:ext cx="307238" cy="307238"/>
-          </a:xfrm>
-          <a:prstGeom prst="rect">
-            <a:avLst/>
-          </a:prstGeom>
-        </p:spPr>
-      </p:pic>
-      <p:sp>
-        <p:nvSpPr>
-          <p:cNvPr id="6" name="Text 3"/>
-          <p:cNvSpPr txBox="1"/>
-          <p:nvPr/>
-        </p:nvSpPr>
-        <p:spPr>
-          <a:xfrm>
-            <a:off x="1554480" y="1719072"/>
-            <a:ext cx="2423160" cy="411480"/>
-          </a:xfrm>
-          <a:prstGeom prst="rect">
-            <a:avLst/>
-          </a:prstGeom>
-          <a:noFill/>
-          <a:ln/>
-        </p:spPr>
-        <p:txBody>
-          <a:bodyPr wrap="square" lIns="0" tIns="0" rIns="0" bIns="0" rtlCol="0" anchor="t"/>
-          <a:lstStyle/>
-          <a:p>
-            <a:pPr indent="0" marL="0">
-              <a:buNone/>
-            </a:pPr>
-            <a:r>
-              <a:rPr lang="en-US" sz="1700" b="1" dirty="0">
-                <a:solidFill>
-                  <a:srgbClr val="1E2329"/>
-                </a:solidFill>
-              </a:rPr>
-              <a:t>Privacy</a:t>
-            </a:r>
-            <a:endParaRPr lang="en-US" sz="1700" dirty="0"/>
-          </a:p>
-        </p:txBody>
-      </p:sp>
-      <p:sp>
-        <p:nvSpPr>
-          <p:cNvPr id="7" name="Text 4"/>
-          <p:cNvSpPr txBox="1"/>
-          <p:nvPr/>
-        </p:nvSpPr>
-        <p:spPr>
-          <a:xfrm>
-            <a:off x="822960" y="2331720"/>
-            <a:ext cx="3063240" cy="1143000"/>
-          </a:xfrm>
-          <a:prstGeom prst="rect">
-            <a:avLst/>
-          </a:prstGeom>
-          <a:noFill/>
-          <a:ln/>
-        </p:spPr>
-        <p:txBody>
-          <a:bodyPr wrap="square" lIns="0" tIns="0" rIns="0" bIns="0" rtlCol="0" anchor="t"/>
-          <a:lstStyle/>
-          <a:p>
-            <a:pPr indent="0" marL="0">
-              <a:buNone/>
-            </a:pPr>
-            <a:r>
-              <a:rPr lang="en-US" sz="1300" dirty="0">
-                <a:solidFill>
-                  <a:srgbClr val="4B5563"/>
-                </a:solidFill>
-              </a:rPr>
-              <a:t>Vehicle counts only. No cameras, plates or personal data. Uploaded CSVs never leave the browser.</a:t>
-            </a:r>
-            <a:endParaRPr lang="en-US" sz="1300" dirty="0"/>
-          </a:p>
-        </p:txBody>
-      </p:sp>
-      <p:sp>
-        <p:nvSpPr>
-          <p:cNvPr id="8" name="card"/>
-          <p:cNvSpPr/>
-          <p:nvPr/>
-        </p:nvSpPr>
-        <p:spPr>
-          <a:xfrm>
-            <a:off x="4297680" y="1371600"/>
-            <a:ext cx="3566160" cy="2194560"/>
-          </a:xfrm>
-          <a:prstGeom prst="roundRect">
-            <a:avLst>
-              <a:gd name="adj" fmla="val 5000"/>
-            </a:avLst>
-          </a:prstGeom>
-          <a:solidFill>
-            <a:srgbClr val="F3F4F6"/>
-          </a:solidFill>
-          <a:ln w="12700">
-            <a:solidFill>
-              <a:srgbClr val="F3F4F6"/>
-            </a:solidFill>
-            <a:prstDash val="solid"/>
-          </a:ln>
-        </p:spPr>
-      </p:sp>
-      <p:sp>
-        <p:nvSpPr>
-          <p:cNvPr id="9" name="icon-circle"/>
-          <p:cNvSpPr/>
-          <p:nvPr/>
-        </p:nvSpPr>
-        <p:spPr>
-          <a:xfrm>
-            <a:off x="4572000" y="1645920"/>
-            <a:ext cx="548640" cy="548640"/>
-          </a:xfrm>
-          <a:prstGeom prst="ellipse">
-            <a:avLst/>
-          </a:prstGeom>
-          <a:solidFill>
-            <a:srgbClr val="E8A317"/>
-          </a:solidFill>
-          <a:ln w="12700">
-            <a:solidFill>
-              <a:srgbClr val="E8A317"/>
-            </a:solidFill>
-            <a:prstDash val="solid"/>
-          </a:ln>
-        </p:spPr>
-      </p:sp>
-      <p:pic>
-        <p:nvPicPr>
-          <p:cNvPr id="10" name="icon" descr="preencoded.png">    </p:cNvPr>
-          <p:cNvPicPr>
-            <a:picLocks noChangeAspect="1"/>
-          </p:cNvPicPr>
-          <p:nvPr/>
-        </p:nvPicPr>
-        <p:blipFill>
-          <a:blip r:embed="rId2"/>
-          <a:stretch>
-            <a:fillRect/>
-          </a:stretch>
-        </p:blipFill>
-        <p:spPr>
-          <a:xfrm>
-            <a:off x="4692701" y="1766621"/>
-            <a:ext cx="307238" cy="307238"/>
-          </a:xfrm>
-          <a:prstGeom prst="rect">
-            <a:avLst/>
-          </a:prstGeom>
-        </p:spPr>
-      </p:pic>
-      <p:sp>
-        <p:nvSpPr>
-          <p:cNvPr id="11" name="Text 7"/>
-          <p:cNvSpPr txBox="1"/>
-          <p:nvPr/>
-        </p:nvSpPr>
-        <p:spPr>
-          <a:xfrm>
-            <a:off x="5303520" y="1719072"/>
-            <a:ext cx="2423160" cy="411480"/>
-          </a:xfrm>
-          <a:prstGeom prst="rect">
-            <a:avLst/>
-          </a:prstGeom>
-          <a:noFill/>
-          <a:ln/>
-        </p:spPr>
-        <p:txBody>
-          <a:bodyPr wrap="square" lIns="0" tIns="0" rIns="0" bIns="0" rtlCol="0" anchor="t"/>
-          <a:lstStyle/>
-          <a:p>
-            <a:pPr indent="0" marL="0">
-              <a:buNone/>
-            </a:pPr>
-            <a:r>
-              <a:rPr lang="en-US" sz="1700" b="1" dirty="0">
-                <a:solidFill>
-                  <a:srgbClr val="1E2329"/>
-                </a:solidFill>
-              </a:rPr>
-              <a:t>Bias &amp; fairness</a:t>
-            </a:r>
-            <a:endParaRPr lang="en-US" sz="1700" dirty="0"/>
-          </a:p>
-        </p:txBody>
-      </p:sp>
-      <p:sp>
-        <p:nvSpPr>
-          <p:cNvPr id="12" name="Text 8"/>
-          <p:cNvSpPr txBox="1"/>
-          <p:nvPr/>
-        </p:nvSpPr>
-        <p:spPr>
-          <a:xfrm>
-            <a:off x="4572000" y="2331720"/>
-            <a:ext cx="3063240" cy="1143000"/>
-          </a:xfrm>
-          <a:prstGeom prst="rect">
-            <a:avLst/>
-          </a:prstGeom>
-          <a:noFill/>
-          <a:ln/>
-        </p:spPr>
-        <p:txBody>
-          <a:bodyPr wrap="square" lIns="0" tIns="0" rIns="0" bIns="0" rtlCol="0" anchor="t"/>
-          <a:lstStyle/>
-          <a:p>
-            <a:pPr indent="0" marL="0">
-              <a:buNone/>
-            </a:pPr>
-            <a:r>
-              <a:rPr lang="en-US" sz="1300" dirty="0">
-                <a:solidFill>
-                  <a:srgbClr val="4B5563"/>
-                </a:solidFill>
-              </a:rPr>
-              <a:t>One US highway; weaker in fog and rain (67–68%). Balanced class weights so High isn't ignored.</a:t>
-            </a:r>
-            <a:endParaRPr lang="en-US" sz="1300" dirty="0"/>
-          </a:p>
-        </p:txBody>
-      </p:sp>
-      <p:sp>
-        <p:nvSpPr>
-          <p:cNvPr id="13" name="card"/>
-          <p:cNvSpPr/>
-          <p:nvPr/>
-        </p:nvSpPr>
-        <p:spPr>
-          <a:xfrm>
-            <a:off x="8046720" y="1371600"/>
-            <a:ext cx="3566160" cy="2194560"/>
-          </a:xfrm>
-          <a:prstGeom prst="roundRect">
-            <a:avLst>
-              <a:gd name="adj" fmla="val 5000"/>
-            </a:avLst>
-          </a:prstGeom>
-          <a:solidFill>
-            <a:srgbClr val="F3F4F6"/>
-          </a:solidFill>
-          <a:ln w="12700">
-            <a:solidFill>
-              <a:srgbClr val="F3F4F6"/>
-            </a:solidFill>
-            <a:prstDash val="solid"/>
-          </a:ln>
-        </p:spPr>
-      </p:sp>
-      <p:sp>
-        <p:nvSpPr>
-          <p:cNvPr id="14" name="icon-circle"/>
-          <p:cNvSpPr/>
-          <p:nvPr/>
-        </p:nvSpPr>
-        <p:spPr>
-          <a:xfrm>
-            <a:off x="8321040" y="1645920"/>
-            <a:ext cx="548640" cy="548640"/>
-          </a:xfrm>
-          <a:prstGeom prst="ellipse">
-            <a:avLst/>
-          </a:prstGeom>
-          <a:solidFill>
-            <a:srgbClr val="6B7280"/>
-          </a:solidFill>
-          <a:ln w="12700">
-            <a:solidFill>
-              <a:srgbClr val="6B7280"/>
-            </a:solidFill>
-            <a:prstDash val="solid"/>
-          </a:ln>
-        </p:spPr>
-      </p:sp>
-      <p:pic>
-        <p:nvPicPr>
-          <p:cNvPr id="15" name="icon" descr="preencoded.png">    </p:cNvPr>
-          <p:cNvPicPr>
-            <a:picLocks noChangeAspect="1"/>
-          </p:cNvPicPr>
-          <p:nvPr/>
-        </p:nvPicPr>
-        <p:blipFill>
-          <a:blip r:embed="rId3"/>
-          <a:stretch>
-            <a:fillRect/>
-          </a:stretch>
-        </p:blipFill>
-        <p:spPr>
-          <a:xfrm>
-            <a:off x="8441741" y="1766621"/>
-            <a:ext cx="307238" cy="307238"/>
-          </a:xfrm>
-          <a:prstGeom prst="rect">
-            <a:avLst/>
-          </a:prstGeom>
-        </p:spPr>
-      </p:pic>
-      <p:sp>
-        <p:nvSpPr>
-          <p:cNvPr id="16" name="Text 11"/>
-          <p:cNvSpPr txBox="1"/>
-          <p:nvPr/>
-        </p:nvSpPr>
-        <p:spPr>
-          <a:xfrm>
-            <a:off x="9052560" y="1719072"/>
-            <a:ext cx="2423160" cy="411480"/>
-          </a:xfrm>
-          <a:prstGeom prst="rect">
-            <a:avLst/>
-          </a:prstGeom>
-          <a:noFill/>
-          <a:ln/>
-        </p:spPr>
-        <p:txBody>
-          <a:bodyPr wrap="square" lIns="0" tIns="0" rIns="0" bIns="0" rtlCol="0" anchor="t"/>
-          <a:lstStyle/>
-          <a:p>
-            <a:pPr indent="0" marL="0">
-              <a:buNone/>
-            </a:pPr>
-            <a:r>
-              <a:rPr lang="en-US" sz="1700" b="1" dirty="0">
-                <a:solidFill>
-                  <a:srgbClr val="1E2329"/>
-                </a:solidFill>
-              </a:rPr>
-              <a:t>Security</a:t>
-            </a:r>
-            <a:endParaRPr lang="en-US" sz="1700" dirty="0"/>
-          </a:p>
-        </p:txBody>
-      </p:sp>
-      <p:sp>
-        <p:nvSpPr>
-          <p:cNvPr id="17" name="Text 12"/>
-          <p:cNvSpPr txBox="1"/>
-          <p:nvPr/>
-        </p:nvSpPr>
-        <p:spPr>
-          <a:xfrm>
-            <a:off x="8321040" y="2331720"/>
-            <a:ext cx="3063240" cy="1143000"/>
-          </a:xfrm>
-          <a:prstGeom prst="rect">
-            <a:avLst/>
-          </a:prstGeom>
-          <a:noFill/>
-          <a:ln/>
-        </p:spPr>
-        <p:txBody>
-          <a:bodyPr wrap="square" lIns="0" tIns="0" rIns="0" bIns="0" rtlCol="0" anchor="t"/>
-          <a:lstStyle/>
-          <a:p>
-            <a:pPr indent="0" marL="0">
-              <a:buNone/>
-            </a:pPr>
-            <a:r>
-              <a:rPr lang="en-US" sz="1300" dirty="0">
-                <a:solidFill>
-                  <a:srgbClr val="4B5563"/>
-                </a:solidFill>
-              </a:rPr>
-              <a:t>Static site: no server, database or keys. User text is escaped; files are parsed as plain data.</a:t>
-            </a:r>
-            <a:endParaRPr lang="en-US" sz="1300" dirty="0"/>
-          </a:p>
-        </p:txBody>
-      </p:sp>
-      <p:sp>
-        <p:nvSpPr>
-          <p:cNvPr id="18" name="card"/>
-          <p:cNvSpPr/>
-          <p:nvPr/>
-        </p:nvSpPr>
-        <p:spPr>
-          <a:xfrm>
-            <a:off x="548640" y="3749040"/>
-            <a:ext cx="3566160" cy="2194560"/>
-          </a:xfrm>
-          <a:prstGeom prst="roundRect">
-            <a:avLst>
-              <a:gd name="adj" fmla="val 5000"/>
-            </a:avLst>
-          </a:prstGeom>
-          <a:solidFill>
-            <a:srgbClr val="F3F4F6"/>
-          </a:solidFill>
-          <a:ln w="12700">
-            <a:solidFill>
-              <a:srgbClr val="F3F4F6"/>
-            </a:solidFill>
-            <a:prstDash val="solid"/>
-          </a:ln>
-        </p:spPr>
-      </p:sp>
-      <p:sp>
-        <p:nvSpPr>
-          <p:cNvPr id="19" name="icon-circle"/>
-          <p:cNvSpPr/>
-          <p:nvPr/>
-        </p:nvSpPr>
-        <p:spPr>
-          <a:xfrm>
-            <a:off x="822960" y="4023360"/>
-            <a:ext cx="548640" cy="548640"/>
-          </a:xfrm>
-          <a:prstGeom prst="ellipse">
-            <a:avLst/>
-          </a:prstGeom>
-          <a:solidFill>
-            <a:srgbClr val="0CA30C"/>
-          </a:solidFill>
-          <a:ln w="12700">
-            <a:solidFill>
-              <a:srgbClr val="0CA30C"/>
-            </a:solidFill>
-            <a:prstDash val="solid"/>
-          </a:ln>
-        </p:spPr>
-      </p:sp>
-      <p:pic>
-        <p:nvPicPr>
-          <p:cNvPr id="20" name="icon" descr="preencoded.png">    </p:cNvPr>
-          <p:cNvPicPr>
-            <a:picLocks noChangeAspect="1"/>
-          </p:cNvPicPr>
-          <p:nvPr/>
-        </p:nvPicPr>
-        <p:blipFill>
-          <a:blip r:embed="rId4"/>
-          <a:stretch>
-            <a:fillRect/>
-          </a:stretch>
-        </p:blipFill>
-        <p:spPr>
-          <a:xfrm>
-            <a:off x="943661" y="4144061"/>
-            <a:ext cx="307238" cy="307238"/>
-          </a:xfrm>
-          <a:prstGeom prst="rect">
-            <a:avLst/>
-          </a:prstGeom>
-        </p:spPr>
-      </p:pic>
-      <p:sp>
-        <p:nvSpPr>
-          <p:cNvPr id="21" name="Text 15"/>
-          <p:cNvSpPr txBox="1"/>
-          <p:nvPr/>
-        </p:nvSpPr>
-        <p:spPr>
-          <a:xfrm>
-            <a:off x="1554480" y="4096512"/>
-            <a:ext cx="2423160" cy="411480"/>
-          </a:xfrm>
-          <a:prstGeom prst="rect">
-            <a:avLst/>
-          </a:prstGeom>
-          <a:noFill/>
-          <a:ln/>
-        </p:spPr>
-        <p:txBody>
-          <a:bodyPr wrap="square" lIns="0" tIns="0" rIns="0" bIns="0" rtlCol="0" anchor="t"/>
-          <a:lstStyle/>
-          <a:p>
-            <a:pPr indent="0" marL="0">
-              <a:buNone/>
-            </a:pPr>
-            <a:r>
-              <a:rPr lang="en-US" sz="1700" b="1" dirty="0">
-                <a:solidFill>
-                  <a:srgbClr val="1E2329"/>
-                </a:solidFill>
-              </a:rPr>
-              <a:t>Accessibility</a:t>
-            </a:r>
-            <a:endParaRPr lang="en-US" sz="1700" dirty="0"/>
-          </a:p>
-        </p:txBody>
-      </p:sp>
-      <p:sp>
-        <p:nvSpPr>
-          <p:cNvPr id="22" name="Text 16"/>
-          <p:cNvSpPr txBox="1"/>
-          <p:nvPr/>
-        </p:nvSpPr>
-        <p:spPr>
-          <a:xfrm>
-            <a:off x="822960" y="4709160"/>
-            <a:ext cx="3063240" cy="1143000"/>
-          </a:xfrm>
-          <a:prstGeom prst="rect">
-            <a:avLst/>
-          </a:prstGeom>
-          <a:noFill/>
-          <a:ln/>
-        </p:spPr>
-        <p:txBody>
-          <a:bodyPr wrap="square" lIns="0" tIns="0" rIns="0" bIns="0" rtlCol="0" anchor="t"/>
-          <a:lstStyle/>
-          <a:p>
-            <a:pPr indent="0" marL="0">
-              <a:buNone/>
-            </a:pPr>
-            <a:r>
-              <a:rPr lang="en-US" sz="1300" dirty="0">
-                <a:solidFill>
-                  <a:srgbClr val="4B5563"/>
-                </a:solidFill>
-              </a:rPr>
-              <a:t>Word + icon for every level, colour-blind-safe colours, keyboard use, screen-reader labels, dark mode, mobile.</a:t>
-            </a:r>
-            <a:endParaRPr lang="en-US" sz="1300" dirty="0"/>
-          </a:p>
-        </p:txBody>
-      </p:sp>
-      <p:sp>
-        <p:nvSpPr>
-          <p:cNvPr id="23" name="card"/>
-          <p:cNvSpPr/>
-          <p:nvPr/>
-        </p:nvSpPr>
-        <p:spPr>
-          <a:xfrm>
-            <a:off x="4297680" y="3749040"/>
-            <a:ext cx="3566160" cy="2194560"/>
-          </a:xfrm>
-          <a:prstGeom prst="roundRect">
-            <a:avLst>
-              <a:gd name="adj" fmla="val 5000"/>
-            </a:avLst>
-          </a:prstGeom>
-          <a:solidFill>
-            <a:srgbClr val="F3F4F6"/>
-          </a:solidFill>
-          <a:ln w="12700">
-            <a:solidFill>
-              <a:srgbClr val="F3F4F6"/>
-            </a:solidFill>
-            <a:prstDash val="solid"/>
-          </a:ln>
-        </p:spPr>
-      </p:sp>
-      <p:sp>
-        <p:nvSpPr>
-          <p:cNvPr id="24" name="icon-circle"/>
-          <p:cNvSpPr/>
-          <p:nvPr/>
-        </p:nvSpPr>
-        <p:spPr>
-          <a:xfrm>
-            <a:off x="4572000" y="4023360"/>
-            <a:ext cx="548640" cy="548640"/>
-          </a:xfrm>
-          <a:prstGeom prst="ellipse">
-            <a:avLst/>
-          </a:prstGeom>
-          <a:solidFill>
-            <a:srgbClr val="D03B3B"/>
-          </a:solidFill>
-          <a:ln w="12700">
-            <a:solidFill>
-              <a:srgbClr val="D03B3B"/>
-            </a:solidFill>
-            <a:prstDash val="solid"/>
-          </a:ln>
-        </p:spPr>
-      </p:sp>
-      <p:pic>
-        <p:nvPicPr>
-          <p:cNvPr id="25" name="icon" descr="preencoded.png">    </p:cNvPr>
-          <p:cNvPicPr>
-            <a:picLocks noChangeAspect="1"/>
-          </p:cNvPicPr>
-          <p:nvPr/>
-        </p:nvPicPr>
-        <p:blipFill>
-          <a:blip r:embed="rId5"/>
-          <a:stretch>
-            <a:fillRect/>
-          </a:stretch>
-        </p:blipFill>
-        <p:spPr>
-          <a:xfrm>
-            <a:off x="4692701" y="4144061"/>
-            <a:ext cx="307238" cy="307238"/>
-          </a:xfrm>
-          <a:prstGeom prst="rect">
-            <a:avLst/>
-          </a:prstGeom>
-        </p:spPr>
-      </p:pic>
-      <p:sp>
-        <p:nvSpPr>
-          <p:cNvPr id="26" name="Text 19"/>
-          <p:cNvSpPr txBox="1"/>
-          <p:nvPr/>
-        </p:nvSpPr>
-        <p:spPr>
-          <a:xfrm>
-            <a:off x="5303520" y="4096512"/>
-            <a:ext cx="2423160" cy="411480"/>
-          </a:xfrm>
-          <a:prstGeom prst="rect">
-            <a:avLst/>
-          </a:prstGeom>
-          <a:noFill/>
-          <a:ln/>
-        </p:spPr>
-        <p:txBody>
-          <a:bodyPr wrap="square" lIns="0" tIns="0" rIns="0" bIns="0" rtlCol="0" anchor="t"/>
-          <a:lstStyle/>
-          <a:p>
-            <a:pPr indent="0" marL="0">
-              <a:buNone/>
-            </a:pPr>
-            <a:r>
-              <a:rPr lang="en-US" sz="1700" b="1" dirty="0">
-                <a:solidFill>
-                  <a:srgbClr val="1E2329"/>
-                </a:solidFill>
-              </a:rPr>
-              <a:t>Limitations</a:t>
-            </a:r>
-            <a:endParaRPr lang="en-US" sz="1700" dirty="0"/>
-          </a:p>
-        </p:txBody>
-      </p:sp>
-      <p:sp>
-        <p:nvSpPr>
-          <p:cNvPr id="27" name="Text 20"/>
-          <p:cNvSpPr txBox="1"/>
-          <p:nvPr/>
-        </p:nvSpPr>
-        <p:spPr>
-          <a:xfrm>
-            <a:off x="4572000" y="4709160"/>
-            <a:ext cx="3063240" cy="1143000"/>
-          </a:xfrm>
-          <a:prstGeom prst="rect">
-            <a:avLst/>
-          </a:prstGeom>
-          <a:noFill/>
-          <a:ln/>
-        </p:spPr>
-        <p:txBody>
-          <a:bodyPr wrap="square" lIns="0" tIns="0" rIns="0" bIns="0" rtlCol="0" anchor="t"/>
-          <a:lstStyle/>
-          <a:p>
-            <a:pPr indent="0" marL="0">
-              <a:buNone/>
-            </a:pPr>
-            <a:r>
-              <a:rPr lang="en-US" sz="1300" dirty="0">
-                <a:solidFill>
-                  <a:srgbClr val="4B5563"/>
-                </a:solidFill>
-              </a:rPr>
-              <a:t>Proxy labels, stand-in road, hourly data, no live feed. All stated on the site and in the report.</a:t>
-            </a:r>
-            <a:endParaRPr lang="en-US" sz="1300" dirty="0"/>
-          </a:p>
-        </p:txBody>
-      </p:sp>
-      <p:sp>
-        <p:nvSpPr>
-          <p:cNvPr id="28" name="card"/>
-          <p:cNvSpPr/>
-          <p:nvPr/>
-        </p:nvSpPr>
-        <p:spPr>
-          <a:xfrm>
-            <a:off x="8046720" y="3749040"/>
-            <a:ext cx="3566160" cy="2194560"/>
-          </a:xfrm>
-          <a:prstGeom prst="roundRect">
-            <a:avLst>
-              <a:gd name="adj" fmla="val 5000"/>
-            </a:avLst>
-          </a:prstGeom>
-          <a:solidFill>
-            <a:srgbClr val="F3F4F6"/>
-          </a:solidFill>
-          <a:ln w="12700">
-            <a:solidFill>
-              <a:srgbClr val="F3F4F6"/>
-            </a:solidFill>
-            <a:prstDash val="solid"/>
-          </a:ln>
-        </p:spPr>
-      </p:sp>
-      <p:sp>
-        <p:nvSpPr>
-          <p:cNvPr id="29" name="icon-circle"/>
-          <p:cNvSpPr/>
-          <p:nvPr/>
-        </p:nvSpPr>
-        <p:spPr>
-          <a:xfrm>
-            <a:off x="8321040" y="4023360"/>
-            <a:ext cx="548640" cy="548640"/>
-          </a:xfrm>
-          <a:prstGeom prst="ellipse">
-            <a:avLst/>
-          </a:prstGeom>
-          <a:solidFill>
-            <a:srgbClr val="1E2329"/>
-          </a:solidFill>
-          <a:ln w="12700">
-            <a:solidFill>
-              <a:srgbClr val="1E2329"/>
-            </a:solidFill>
-            <a:prstDash val="solid"/>
-          </a:ln>
-        </p:spPr>
-      </p:sp>
-      <p:pic>
-        <p:nvPicPr>
-          <p:cNvPr id="30" name="icon" descr="preencoded.png">    </p:cNvPr>
-          <p:cNvPicPr>
-            <a:picLocks noChangeAspect="1"/>
-          </p:cNvPicPr>
-          <p:nvPr/>
-        </p:nvPicPr>
-        <p:blipFill>
-          <a:blip r:embed="rId6"/>
-          <a:stretch>
-            <a:fillRect/>
-          </a:stretch>
-        </p:blipFill>
-        <p:spPr>
-          <a:xfrm>
-            <a:off x="8441741" y="4144061"/>
-            <a:ext cx="307238" cy="307238"/>
-          </a:xfrm>
-          <a:prstGeom prst="rect">
-            <a:avLst/>
-          </a:prstGeom>
-        </p:spPr>
-      </p:pic>
-      <p:sp>
-        <p:nvSpPr>
-          <p:cNvPr id="31" name="Text 23"/>
-          <p:cNvSpPr txBox="1"/>
-          <p:nvPr/>
-        </p:nvSpPr>
-        <p:spPr>
-          <a:xfrm>
-            <a:off x="9052560" y="4096512"/>
-            <a:ext cx="2423160" cy="411480"/>
-          </a:xfrm>
-          <a:prstGeom prst="rect">
-            <a:avLst/>
-          </a:prstGeom>
-          <a:noFill/>
-          <a:ln/>
-        </p:spPr>
-        <p:txBody>
-          <a:bodyPr wrap="square" lIns="0" tIns="0" rIns="0" bIns="0" rtlCol="0" anchor="t"/>
-          <a:lstStyle/>
-          <a:p>
-            <a:pPr indent="0" marL="0">
-              <a:buNone/>
-            </a:pPr>
-            <a:r>
-              <a:rPr lang="en-US" sz="1700" b="1" dirty="0">
-                <a:solidFill>
-                  <a:srgbClr val="1E2329"/>
-                </a:solidFill>
-              </a:rPr>
-              <a:t>Human oversight</a:t>
-            </a:r>
-            <a:endParaRPr lang="en-US" sz="1700" dirty="0"/>
-          </a:p>
-        </p:txBody>
-      </p:sp>
-      <p:sp>
-        <p:nvSpPr>
-          <p:cNvPr id="32" name="Text 24"/>
-          <p:cNvSpPr txBox="1"/>
-          <p:nvPr/>
-        </p:nvSpPr>
-        <p:spPr>
-          <a:xfrm>
-            <a:off x="8321040" y="4709160"/>
-            <a:ext cx="3063240" cy="1143000"/>
-          </a:xfrm>
-          <a:prstGeom prst="rect">
-            <a:avLst/>
-          </a:prstGeom>
-          <a:noFill/>
-          <a:ln/>
-        </p:spPr>
-        <p:txBody>
-          <a:bodyPr wrap="square" lIns="0" tIns="0" rIns="0" bIns="0" rtlCol="0" anchor="t"/>
-          <a:lstStyle/>
-          <a:p>
-            <a:pPr indent="0" marL="0">
-              <a:buNone/>
-            </a:pPr>
-            <a:r>
-              <a:rPr lang="en-US" sz="1300" dirty="0">
-                <a:solidFill>
-                  <a:srgbClr val="4B5563"/>
-                </a:solidFill>
-              </a:rPr>
-              <a:t>Advisory only: the transport office decides. Borderline 40–60% shown as a probability. Nothing automated.</a:t>
-            </a:r>
-            <a:endParaRPr lang="en-US" sz="1300" dirty="0"/>
-          </a:p>
-        </p:txBody>
-      </p:sp>
-      <p:sp>
-        <p:nvSpPr>
-          <p:cNvPr id="25" name="Slide Number Placeholder 0"/>
-          <p:cNvSpPr>
-            <a:spLocks noGrp="1"/>
-          </p:cNvSpPr>
-          <p:nvPr>
-            <p:ph type="sldNum" sz="quarter" idx="4294967295"/>
-          </p:nvPr>
-        </p:nvSpPr>
-        <p:spPr>
-          <a:xfrm>
-            <a:off x="11155680" y="6400800"/>
-            <a:ext cx="548640" cy="274320"/>
-          </a:xfrm>
-          <a:prstGeom prst="rect">
-            <a:avLst/>
-          </a:prstGeom>
-          <a:extLst>
-            <a:ext uri="{C572A759-6A51-4108-AA02-DFA0A04FC94B}">
-              <ma14:wrappingTextBoxFlag xmlns:ma14="http://schemas.microsoft.com/office/mac/drawingml/2011/main" val="0"/>
-            </a:ext>
-          </a:extLst>
-        </p:spPr>
-        <p:txBody>
-          <a:bodyPr/>
-          <a:lstStyle>
-            <a:lvl1pPr>
-              <a:defRPr sz="1000">
-                <a:solidFill>
-                  <a:srgbClr val="6B7280"/>
-                </a:solidFill>
-              </a:defRPr>
-            </a:lvl1pPr>
-          </a:lstStyle>
-          <a:p>
-            <a:pPr algn="r"/>
-            <a:fld id="{F7021451-1387-4CA6-816F-3879F97B5CBC}" type="slidenum">
-              <a:rPr b="0" lang="en-US"/>
               <a:t>12</a:t>
             </a:fld>
             <a:endParaRPr lang="en-US"/>
@@ -7310,49 +7445,159 @@
                   <a:srgbClr val="1E2329"/>
                 </a:solidFill>
               </a:rPr>
-              <a:t>Aligned with the UN Sustainable Development Goals</a:t>
+              <a:t>What drives the forecast, and what it can't do yet</a:t>
             </a:r>
             <a:endParaRPr lang="en-US" sz="3200" dirty="0"/>
           </a:p>
         </p:txBody>
       </p:sp>
-      <p:sp>
-        <p:nvSpPr>
-          <p:cNvPr id="3" name="sdg-11"/>
+      <p:graphicFrame>
+        <p:nvGraphicFramePr>
+          <p:cNvPr id="3" name="Chart 0" descr=""/>
+          <p:cNvGraphicFramePr/>
+          <p:nvPr/>
+        </p:nvGraphicFramePr>
+        <p:xfrm>
+          <a:off x="548640" y="1280160"/>
+          <a:ext cx="6035040" cy="3840480"/>
+        </p:xfrm>
+        <a:graphic xmlns:a="http://schemas.openxmlformats.org/drawingml/2006/main">
+          <a:graphicData uri="http://schemas.openxmlformats.org/drawingml/2006/chart">
+            <c:chart xmlns:c="http://schemas.openxmlformats.org/drawingml/2006/chart" r:id="rId1"/>
+          </a:graphicData>
+        </a:graphic>
+      </p:graphicFrame>
+      <p:sp>
+        <p:nvSpPr>
+          <p:cNvPr id="4" name="Text 1"/>
+          <p:cNvSpPr txBox="1"/>
+          <p:nvPr/>
+        </p:nvSpPr>
+        <p:spPr>
+          <a:xfrm>
+            <a:off x="548640" y="5257800"/>
+            <a:ext cx="6035040" cy="731520"/>
+          </a:xfrm>
+          <a:prstGeom prst="rect">
+            <a:avLst/>
+          </a:prstGeom>
+          <a:noFill/>
+          <a:ln/>
+        </p:spPr>
+        <p:txBody>
+          <a:bodyPr wrap="square" lIns="0" tIns="0" rIns="0" bIns="0" rtlCol="0" anchor="t"/>
+          <a:lstStyle/>
+          <a:p>
+            <a:pPr indent="0" marL="0">
+              <a:buNone/>
+            </a:pPr>
+            <a:r>
+              <a:rPr lang="en-US" sz="1250" dirty="0">
+                <a:solidFill>
+                  <a:srgbClr val="6B7280"/>
+                </a:solidFill>
+              </a:rPr>
+              <a:t>Weather and holidays matter on the days they occur, but they are rare in the test year. The per-forecast "why" chart shows their effect.</a:t>
+            </a:r>
+            <a:endParaRPr lang="en-US" sz="1250" dirty="0"/>
+          </a:p>
+        </p:txBody>
+      </p:sp>
+      <p:sp>
+        <p:nvSpPr>
+          <p:cNvPr id="5" name="Text 2"/>
+          <p:cNvSpPr txBox="1"/>
+          <p:nvPr/>
+        </p:nvSpPr>
+        <p:spPr>
+          <a:xfrm>
+            <a:off x="7040880" y="1371600"/>
+            <a:ext cx="4572000" cy="411480"/>
+          </a:xfrm>
+          <a:prstGeom prst="rect">
+            <a:avLst/>
+          </a:prstGeom>
+          <a:noFill/>
+          <a:ln/>
+        </p:spPr>
+        <p:txBody>
+          <a:bodyPr wrap="square" lIns="0" tIns="0" rIns="0" bIns="0" rtlCol="0" anchor="t"/>
+          <a:lstStyle/>
+          <a:p>
+            <a:pPr indent="0" marL="0">
+              <a:buNone/>
+            </a:pPr>
+            <a:r>
+              <a:rPr lang="en-US" sz="1900" b="1" dirty="0">
+                <a:solidFill>
+                  <a:srgbClr val="1E2329"/>
+                </a:solidFill>
+              </a:rPr>
+              <a:t>Limitations</a:t>
+            </a:r>
+            <a:endParaRPr lang="en-US" sz="1900" dirty="0"/>
+          </a:p>
+        </p:txBody>
+      </p:sp>
+      <p:sp>
+        <p:nvSpPr>
+          <p:cNvPr id="6" name="icon-circle"/>
           <p:cNvSpPr/>
           <p:nvPr/>
         </p:nvSpPr>
         <p:spPr>
           <a:xfrm>
-            <a:off x="548640" y="1325880"/>
-            <a:ext cx="822960" cy="822960"/>
-          </a:xfrm>
-          <a:prstGeom prst="roundRect">
-            <a:avLst>
-              <a:gd name="adj" fmla="val 11111"/>
-            </a:avLst>
+            <a:off x="7040880" y="1920240"/>
+            <a:ext cx="457200" cy="457200"/>
+          </a:xfrm>
+          <a:prstGeom prst="ellipse">
+            <a:avLst/>
           </a:prstGeom>
           <a:solidFill>
-            <a:srgbClr val="F99D26"/>
+            <a:srgbClr val="9CA3AF"/>
           </a:solidFill>
           <a:ln w="12700">
             <a:solidFill>
-              <a:srgbClr val="F99D26"/>
+              <a:srgbClr val="9CA3AF"/>
             </a:solidFill>
             <a:prstDash val="solid"/>
           </a:ln>
         </p:spPr>
       </p:sp>
-      <p:sp>
-        <p:nvSpPr>
-          <p:cNvPr id="4" name="Text 2"/>
+      <p:pic>
+        <p:nvPicPr>
+          <p:cNvPr id="7" name="icon" descr="preencoded.png">    </p:cNvPr>
+          <p:cNvPicPr>
+            <a:picLocks noChangeAspect="1"/>
+          </p:cNvPicPr>
+          <p:nvPr/>
+        </p:nvPicPr>
+        <p:blipFill>
+          <a:blip r:embed="rId2"/>
+          <a:stretch>
+            <a:fillRect/>
+          </a:stretch>
+        </p:blipFill>
+        <p:spPr>
+          <a:xfrm>
+            <a:off x="7141464" y="2020824"/>
+            <a:ext cx="256032" cy="256032"/>
+          </a:xfrm>
+          <a:prstGeom prst="rect">
+            <a:avLst/>
+          </a:prstGeom>
+        </p:spPr>
+      </p:pic>
+      <p:sp>
+        <p:nvSpPr>
+          <p:cNvPr id="8" name="Text 4"/>
           <p:cNvSpPr txBox="1"/>
           <p:nvPr/>
         </p:nvSpPr>
         <p:spPr>
           <a:xfrm>
-            <a:off x="548640" y="1325880"/>
-            <a:ext cx="822960" cy="822960"/>
+            <a:off x="7680960" y="1883664"/>
+            <a:ext cx="3931920" cy="320040"/>
           </a:xfrm>
           <a:prstGeom prst="rect">
             <a:avLst/>
@@ -7361,34 +7606,34 @@
           <a:ln/>
         </p:spPr>
         <p:txBody>
-          <a:bodyPr wrap="square" lIns="0" tIns="0" rIns="0" bIns="0" rtlCol="0" anchor="ctr"/>
-          <a:lstStyle/>
-          <a:p>
-            <a:pPr algn="ctr" indent="0" marL="0">
+          <a:bodyPr wrap="square" lIns="0" tIns="0" rIns="0" bIns="0" rtlCol="0" anchor="t"/>
+          <a:lstStyle/>
+          <a:p>
+            <a:pPr indent="0" marL="0">
               <a:buNone/>
             </a:pPr>
             <a:r>
-              <a:rPr lang="en-US" sz="3000" b="1" dirty="0">
-                <a:solidFill>
-                  <a:srgbClr val="FFFFFF"/>
-                </a:solidFill>
-              </a:rPr>
-              <a:t>11</a:t>
-            </a:r>
-            <a:endParaRPr lang="en-US" sz="3000" dirty="0"/>
-          </a:p>
-        </p:txBody>
-      </p:sp>
-      <p:sp>
-        <p:nvSpPr>
-          <p:cNvPr id="5" name="Text 3"/>
+              <a:rPr lang="en-US" sz="1500" b="1" dirty="0">
+                <a:solidFill>
+                  <a:srgbClr val="1E2329"/>
+                </a:solidFill>
+              </a:rPr>
+              <a:t>Not live</a:t>
+            </a:r>
+            <a:endParaRPr lang="en-US" sz="1500" dirty="0"/>
+          </a:p>
+        </p:txBody>
+      </p:sp>
+      <p:sp>
+        <p:nvSpPr>
+          <p:cNvPr id="9" name="Text 5"/>
           <p:cNvSpPr txBox="1"/>
           <p:nvPr/>
         </p:nvSpPr>
         <p:spPr>
           <a:xfrm>
-            <a:off x="1600200" y="1371600"/>
-            <a:ext cx="9966960" cy="365760"/>
+            <a:off x="7680960" y="2212848"/>
+            <a:ext cx="3931920" cy="411480"/>
           </a:xfrm>
           <a:prstGeom prst="rect">
             <a:avLst/>
@@ -7404,90 +7649,76 @@
               <a:buNone/>
             </a:pPr>
             <a:r>
-              <a:rPr lang="en-US" sz="1700" b="1" dirty="0">
-                <a:solidFill>
-                  <a:srgbClr val="1E2329"/>
-                </a:solidFill>
-              </a:rPr>
-              <a:t>SDG 11: Sustainable cities &amp; communities</a:t>
-            </a:r>
-            <a:endParaRPr lang="en-US" sz="1700" dirty="0"/>
-          </a:p>
-        </p:txBody>
-      </p:sp>
-      <p:sp>
-        <p:nvSpPr>
-          <p:cNvPr id="6" name="Text 4"/>
-          <p:cNvSpPr txBox="1"/>
-          <p:nvPr/>
-        </p:nvSpPr>
-        <p:spPr>
-          <a:xfrm>
-            <a:off x="1600200" y="1737360"/>
-            <a:ext cx="9966960" cy="411480"/>
-          </a:xfrm>
-          <a:prstGeom prst="rect">
-            <a:avLst/>
-          </a:prstGeom>
-          <a:noFill/>
-          <a:ln/>
-        </p:spPr>
-        <p:txBody>
-          <a:bodyPr wrap="square" lIns="0" tIns="0" rIns="0" bIns="0" rtlCol="0" anchor="t"/>
-          <a:lstStyle/>
-          <a:p>
-            <a:pPr indent="0" marL="0">
-              <a:buNone/>
-            </a:pPr>
-            <a:r>
-              <a:rPr lang="en-US" sz="1400" dirty="0">
+              <a:rPr lang="en-US" sz="1300" dirty="0">
                 <a:solidFill>
                   <a:srgbClr val="4B5563"/>
                 </a:solidFill>
               </a:rPr>
-              <a:t>Target 11.2: safer, more accessible transport at a shared choke point; pushes shuttles and alternate gates.</a:t>
-            </a:r>
-            <a:endParaRPr lang="en-US" sz="1400" dirty="0"/>
-          </a:p>
-        </p:txBody>
-      </p:sp>
-      <p:sp>
-        <p:nvSpPr>
-          <p:cNvPr id="7" name="sdg-3"/>
+              <a:t>Replays history; no traffic or weather API yet</a:t>
+            </a:r>
+            <a:endParaRPr lang="en-US" sz="1300" dirty="0"/>
+          </a:p>
+        </p:txBody>
+      </p:sp>
+      <p:sp>
+        <p:nvSpPr>
+          <p:cNvPr id="10" name="icon-circle"/>
           <p:cNvSpPr/>
           <p:nvPr/>
         </p:nvSpPr>
         <p:spPr>
           <a:xfrm>
-            <a:off x="548640" y="2304288"/>
-            <a:ext cx="822960" cy="822960"/>
-          </a:xfrm>
-          <a:prstGeom prst="roundRect">
-            <a:avLst>
-              <a:gd name="adj" fmla="val 11111"/>
-            </a:avLst>
+            <a:off x="7040880" y="2743200"/>
+            <a:ext cx="457200" cy="457200"/>
+          </a:xfrm>
+          <a:prstGeom prst="ellipse">
+            <a:avLst/>
           </a:prstGeom>
           <a:solidFill>
-            <a:srgbClr val="4C9F38"/>
+            <a:srgbClr val="9CA3AF"/>
           </a:solidFill>
           <a:ln w="12700">
             <a:solidFill>
-              <a:srgbClr val="4C9F38"/>
+              <a:srgbClr val="9CA3AF"/>
             </a:solidFill>
             <a:prstDash val="solid"/>
           </a:ln>
         </p:spPr>
       </p:sp>
-      <p:sp>
-        <p:nvSpPr>
-          <p:cNvPr id="8" name="Text 6"/>
+      <p:pic>
+        <p:nvPicPr>
+          <p:cNvPr id="11" name="icon" descr="preencoded.png">    </p:cNvPr>
+          <p:cNvPicPr>
+            <a:picLocks noChangeAspect="1"/>
+          </p:cNvPicPr>
+          <p:nvPr/>
+        </p:nvPicPr>
+        <p:blipFill>
+          <a:blip r:embed="rId3"/>
+          <a:stretch>
+            <a:fillRect/>
+          </a:stretch>
+        </p:blipFill>
+        <p:spPr>
+          <a:xfrm>
+            <a:off x="7141464" y="2843784"/>
+            <a:ext cx="256032" cy="256032"/>
+          </a:xfrm>
+          <a:prstGeom prst="rect">
+            <a:avLst/>
+          </a:prstGeom>
+        </p:spPr>
+      </p:pic>
+      <p:sp>
+        <p:nvSpPr>
+          <p:cNvPr id="12" name="Text 7"/>
           <p:cNvSpPr txBox="1"/>
           <p:nvPr/>
         </p:nvSpPr>
         <p:spPr>
           <a:xfrm>
-            <a:off x="548640" y="2304288"/>
-            <a:ext cx="822960" cy="822960"/>
+            <a:off x="7680960" y="2706624"/>
+            <a:ext cx="3931920" cy="320040"/>
           </a:xfrm>
           <a:prstGeom prst="rect">
             <a:avLst/>
@@ -7496,34 +7727,34 @@
           <a:ln/>
         </p:spPr>
         <p:txBody>
-          <a:bodyPr wrap="square" lIns="0" tIns="0" rIns="0" bIns="0" rtlCol="0" anchor="ctr"/>
-          <a:lstStyle/>
-          <a:p>
-            <a:pPr algn="ctr" indent="0" marL="0">
+          <a:bodyPr wrap="square" lIns="0" tIns="0" rIns="0" bIns="0" rtlCol="0" anchor="t"/>
+          <a:lstStyle/>
+          <a:p>
+            <a:pPr indent="0" marL="0">
               <a:buNone/>
             </a:pPr>
             <a:r>
-              <a:rPr lang="en-US" sz="3000" b="1" dirty="0">
-                <a:solidFill>
-                  <a:srgbClr val="FFFFFF"/>
-                </a:solidFill>
-              </a:rPr>
-              <a:t>3</a:t>
-            </a:r>
-            <a:endParaRPr lang="en-US" sz="3000" dirty="0"/>
-          </a:p>
-        </p:txBody>
-      </p:sp>
-      <p:sp>
-        <p:nvSpPr>
-          <p:cNvPr id="9" name="Text 7"/>
+              <a:rPr lang="en-US" sz="1500" b="1" dirty="0">
+                <a:solidFill>
+                  <a:srgbClr val="1E2329"/>
+                </a:solidFill>
+              </a:rPr>
+              <a:t>Stand-in road</a:t>
+            </a:r>
+            <a:endParaRPr lang="en-US" sz="1500" dirty="0"/>
+          </a:p>
+        </p:txBody>
+      </p:sp>
+      <p:sp>
+        <p:nvSpPr>
+          <p:cNvPr id="13" name="Text 8"/>
           <p:cNvSpPr txBox="1"/>
           <p:nvPr/>
         </p:nvSpPr>
         <p:spPr>
           <a:xfrm>
-            <a:off x="1600200" y="2350008"/>
-            <a:ext cx="9966960" cy="365760"/>
+            <a:off x="7680960" y="3035808"/>
+            <a:ext cx="3931920" cy="411480"/>
           </a:xfrm>
           <a:prstGeom prst="rect">
             <a:avLst/>
@@ -7539,90 +7770,76 @@
               <a:buNone/>
             </a:pPr>
             <a:r>
-              <a:rPr lang="en-US" sz="1700" b="1" dirty="0">
-                <a:solidFill>
-                  <a:srgbClr val="1E2329"/>
-                </a:solidFill>
-              </a:rPr>
-              <a:t>SDG 3: Good health &amp; well-being</a:t>
-            </a:r>
-            <a:endParaRPr lang="en-US" sz="1700" dirty="0"/>
-          </a:p>
-        </p:txBody>
-      </p:sp>
-      <p:sp>
-        <p:nvSpPr>
-          <p:cNvPr id="10" name="Text 8"/>
-          <p:cNvSpPr txBox="1"/>
-          <p:nvPr/>
-        </p:nvSpPr>
-        <p:spPr>
-          <a:xfrm>
-            <a:off x="1600200" y="2715768"/>
-            <a:ext cx="9966960" cy="411480"/>
-          </a:xfrm>
-          <a:prstGeom prst="rect">
-            <a:avLst/>
-          </a:prstGeom>
-          <a:noFill/>
-          <a:ln/>
-        </p:spPr>
-        <p:txBody>
-          <a:bodyPr wrap="square" lIns="0" tIns="0" rIns="0" bIns="0" rtlCol="0" anchor="t"/>
-          <a:lstStyle/>
-          <a:p>
-            <a:pPr indent="0" marL="0">
-              <a:buNone/>
-            </a:pPr>
-            <a:r>
-              <a:rPr lang="en-US" sz="1400" dirty="0">
+              <a:rPr lang="en-US" sz="1300" dirty="0">
                 <a:solidFill>
                   <a:srgbClr val="4B5563"/>
                 </a:solidFill>
               </a:rPr>
-              <a:t>3.6 road injuries and 3.9 air pollution: calmer gate queues, less stop-start exhaust.</a:t>
-            </a:r>
-            <a:endParaRPr lang="en-US" sz="1400" dirty="0"/>
-          </a:p>
-        </p:txBody>
-      </p:sp>
-      <p:sp>
-        <p:nvSpPr>
-          <p:cNvPr id="11" name="sdg-13"/>
+              <a:t>Highway I-94, not our gate: retrain on our counts</a:t>
+            </a:r>
+            <a:endParaRPr lang="en-US" sz="1300" dirty="0"/>
+          </a:p>
+        </p:txBody>
+      </p:sp>
+      <p:sp>
+        <p:nvSpPr>
+          <p:cNvPr id="14" name="icon-circle"/>
           <p:cNvSpPr/>
           <p:nvPr/>
         </p:nvSpPr>
         <p:spPr>
           <a:xfrm>
-            <a:off x="548640" y="3282696"/>
-            <a:ext cx="822960" cy="822960"/>
-          </a:xfrm>
-          <a:prstGeom prst="roundRect">
-            <a:avLst>
-              <a:gd name="adj" fmla="val 11111"/>
-            </a:avLst>
+            <a:off x="7040880" y="3566160"/>
+            <a:ext cx="457200" cy="457200"/>
+          </a:xfrm>
+          <a:prstGeom prst="ellipse">
+            <a:avLst/>
           </a:prstGeom>
           <a:solidFill>
-            <a:srgbClr val="3F7E44"/>
+            <a:srgbClr val="9CA3AF"/>
           </a:solidFill>
           <a:ln w="12700">
             <a:solidFill>
-              <a:srgbClr val="3F7E44"/>
+              <a:srgbClr val="9CA3AF"/>
             </a:solidFill>
             <a:prstDash val="solid"/>
           </a:ln>
         </p:spPr>
       </p:sp>
-      <p:sp>
-        <p:nvSpPr>
-          <p:cNvPr id="12" name="Text 10"/>
+      <p:pic>
+        <p:nvPicPr>
+          <p:cNvPr id="15" name="icon" descr="preencoded.png">    </p:cNvPr>
+          <p:cNvPicPr>
+            <a:picLocks noChangeAspect="1"/>
+          </p:cNvPicPr>
+          <p:nvPr/>
+        </p:nvPicPr>
+        <p:blipFill>
+          <a:blip r:embed="rId4"/>
+          <a:stretch>
+            <a:fillRect/>
+          </a:stretch>
+        </p:blipFill>
+        <p:spPr>
+          <a:xfrm>
+            <a:off x="7141464" y="3666744"/>
+            <a:ext cx="256032" cy="256032"/>
+          </a:xfrm>
+          <a:prstGeom prst="rect">
+            <a:avLst/>
+          </a:prstGeom>
+        </p:spPr>
+      </p:pic>
+      <p:sp>
+        <p:nvSpPr>
+          <p:cNvPr id="16" name="Text 10"/>
           <p:cNvSpPr txBox="1"/>
           <p:nvPr/>
         </p:nvSpPr>
         <p:spPr>
           <a:xfrm>
-            <a:off x="548640" y="3282696"/>
-            <a:ext cx="822960" cy="822960"/>
+            <a:off x="7680960" y="3529584"/>
+            <a:ext cx="3931920" cy="320040"/>
           </a:xfrm>
           <a:prstGeom prst="rect">
             <a:avLst/>
@@ -7631,34 +7848,34 @@
           <a:ln/>
         </p:spPr>
         <p:txBody>
-          <a:bodyPr wrap="square" lIns="0" tIns="0" rIns="0" bIns="0" rtlCol="0" anchor="ctr"/>
-          <a:lstStyle/>
-          <a:p>
-            <a:pPr algn="ctr" indent="0" marL="0">
+          <a:bodyPr wrap="square" lIns="0" tIns="0" rIns="0" bIns="0" rtlCol="0" anchor="t"/>
+          <a:lstStyle/>
+          <a:p>
+            <a:pPr indent="0" marL="0">
               <a:buNone/>
             </a:pPr>
             <a:r>
-              <a:rPr lang="en-US" sz="3000" b="1" dirty="0">
-                <a:solidFill>
-                  <a:srgbClr val="FFFFFF"/>
-                </a:solidFill>
-              </a:rPr>
-              <a:t>13</a:t>
-            </a:r>
-            <a:endParaRPr lang="en-US" sz="3000" dirty="0"/>
-          </a:p>
-        </p:txBody>
-      </p:sp>
-      <p:sp>
-        <p:nvSpPr>
-          <p:cNvPr id="13" name="Text 11"/>
+              <a:rPr lang="en-US" sz="1500" b="1" dirty="0">
+                <a:solidFill>
+                  <a:srgbClr val="1E2329"/>
+                </a:solidFill>
+              </a:rPr>
+              <a:t>Volume, not speed</a:t>
+            </a:r>
+            <a:endParaRPr lang="en-US" sz="1500" dirty="0"/>
+          </a:p>
+        </p:txBody>
+      </p:sp>
+      <p:sp>
+        <p:nvSpPr>
+          <p:cNvPr id="17" name="Text 11"/>
           <p:cNvSpPr txBox="1"/>
           <p:nvPr/>
         </p:nvSpPr>
         <p:spPr>
           <a:xfrm>
-            <a:off x="1600200" y="3328416"/>
-            <a:ext cx="9966960" cy="365760"/>
+            <a:off x="7680960" y="3858768"/>
+            <a:ext cx="3931920" cy="411480"/>
           </a:xfrm>
           <a:prstGeom prst="rect">
             <a:avLst/>
@@ -7674,90 +7891,76 @@
               <a:buNone/>
             </a:pPr>
             <a:r>
-              <a:rPr lang="en-US" sz="1700" b="1" dirty="0">
-                <a:solidFill>
-                  <a:srgbClr val="1E2329"/>
-                </a:solidFill>
-              </a:rPr>
-              <a:t>SDG 13: Climate action</a:t>
-            </a:r>
-            <a:endParaRPr lang="en-US" sz="1700" dirty="0"/>
-          </a:p>
-        </p:txBody>
-      </p:sp>
-      <p:sp>
-        <p:nvSpPr>
-          <p:cNvPr id="14" name="Text 12"/>
-          <p:cNvSpPr txBox="1"/>
-          <p:nvPr/>
-        </p:nvSpPr>
-        <p:spPr>
-          <a:xfrm>
-            <a:off x="1600200" y="3694176"/>
-            <a:ext cx="9966960" cy="411480"/>
-          </a:xfrm>
-          <a:prstGeom prst="rect">
-            <a:avLst/>
-          </a:prstGeom>
-          <a:noFill/>
-          <a:ln/>
-        </p:spPr>
-        <p:txBody>
-          <a:bodyPr wrap="square" lIns="0" tIns="0" rIns="0" bIns="0" rtlCol="0" anchor="t"/>
-          <a:lstStyle/>
-          <a:p>
-            <a:pPr indent="0" marL="0">
-              <a:buNone/>
-            </a:pPr>
-            <a:r>
-              <a:rPr lang="en-US" sz="1400" dirty="0">
+              <a:rPr lang="en-US" sz="1300" dirty="0">
                 <a:solidFill>
                   <a:srgbClr val="4B5563"/>
                 </a:solidFill>
               </a:rPr>
-              <a:t>Smoother flow and more shuttle use mean less idling and lower emissions.</a:t>
-            </a:r>
-            <a:endParaRPr lang="en-US" sz="1400" dirty="0"/>
-          </a:p>
-        </p:txBody>
-      </p:sp>
-      <p:sp>
-        <p:nvSpPr>
-          <p:cNvPr id="15" name="sdg-9"/>
+              <a:t>Labels are a proxy; queues and accidents are invisible</a:t>
+            </a:r>
+            <a:endParaRPr lang="en-US" sz="1300" dirty="0"/>
+          </a:p>
+        </p:txBody>
+      </p:sp>
+      <p:sp>
+        <p:nvSpPr>
+          <p:cNvPr id="18" name="icon-circle"/>
           <p:cNvSpPr/>
           <p:nvPr/>
         </p:nvSpPr>
         <p:spPr>
           <a:xfrm>
-            <a:off x="548640" y="4261104"/>
-            <a:ext cx="822960" cy="822960"/>
-          </a:xfrm>
-          <a:prstGeom prst="roundRect">
-            <a:avLst>
-              <a:gd name="adj" fmla="val 11111"/>
-            </a:avLst>
+            <a:off x="7040880" y="4389120"/>
+            <a:ext cx="457200" cy="457200"/>
+          </a:xfrm>
+          <a:prstGeom prst="ellipse">
+            <a:avLst/>
           </a:prstGeom>
           <a:solidFill>
-            <a:srgbClr val="FD6925"/>
+            <a:srgbClr val="9CA3AF"/>
           </a:solidFill>
           <a:ln w="12700">
             <a:solidFill>
-              <a:srgbClr val="FD6925"/>
+              <a:srgbClr val="9CA3AF"/>
             </a:solidFill>
             <a:prstDash val="solid"/>
           </a:ln>
         </p:spPr>
       </p:sp>
-      <p:sp>
-        <p:nvSpPr>
-          <p:cNvPr id="16" name="Text 14"/>
+      <p:pic>
+        <p:nvPicPr>
+          <p:cNvPr id="19" name="icon" descr="preencoded.png">    </p:cNvPr>
+          <p:cNvPicPr>
+            <a:picLocks noChangeAspect="1"/>
+          </p:cNvPicPr>
+          <p:nvPr/>
+        </p:nvPicPr>
+        <p:blipFill>
+          <a:blip r:embed="rId5"/>
+          <a:stretch>
+            <a:fillRect/>
+          </a:stretch>
+        </p:blipFill>
+        <p:spPr>
+          <a:xfrm>
+            <a:off x="7141464" y="4489704"/>
+            <a:ext cx="256032" cy="256032"/>
+          </a:xfrm>
+          <a:prstGeom prst="rect">
+            <a:avLst/>
+          </a:prstGeom>
+        </p:spPr>
+      </p:pic>
+      <p:sp>
+        <p:nvSpPr>
+          <p:cNvPr id="20" name="Text 13"/>
           <p:cNvSpPr txBox="1"/>
           <p:nvPr/>
         </p:nvSpPr>
         <p:spPr>
           <a:xfrm>
-            <a:off x="548640" y="4261104"/>
-            <a:ext cx="822960" cy="822960"/>
+            <a:off x="7680960" y="4352544"/>
+            <a:ext cx="3931920" cy="320040"/>
           </a:xfrm>
           <a:prstGeom prst="rect">
             <a:avLst/>
@@ -7766,34 +7969,34 @@
           <a:ln/>
         </p:spPr>
         <p:txBody>
-          <a:bodyPr wrap="square" lIns="0" tIns="0" rIns="0" bIns="0" rtlCol="0" anchor="ctr"/>
-          <a:lstStyle/>
-          <a:p>
-            <a:pPr algn="ctr" indent="0" marL="0">
+          <a:bodyPr wrap="square" lIns="0" tIns="0" rIns="0" bIns="0" rtlCol="0" anchor="t"/>
+          <a:lstStyle/>
+          <a:p>
+            <a:pPr indent="0" marL="0">
               <a:buNone/>
             </a:pPr>
             <a:r>
-              <a:rPr lang="en-US" sz="3000" b="1" dirty="0">
-                <a:solidFill>
-                  <a:srgbClr val="FFFFFF"/>
-                </a:solidFill>
-              </a:rPr>
-              <a:t>9</a:t>
-            </a:r>
-            <a:endParaRPr lang="en-US" sz="3000" dirty="0"/>
-          </a:p>
-        </p:txBody>
-      </p:sp>
-      <p:sp>
-        <p:nvSpPr>
-          <p:cNvPr id="17" name="Text 15"/>
+              <a:rPr lang="en-US" sz="1500" b="1" dirty="0">
+                <a:solidFill>
+                  <a:srgbClr val="1E2329"/>
+                </a:solidFill>
+              </a:rPr>
+              <a:t>Hourly</a:t>
+            </a:r>
+            <a:endParaRPr lang="en-US" sz="1500" dirty="0"/>
+          </a:p>
+        </p:txBody>
+      </p:sp>
+      <p:sp>
+        <p:nvSpPr>
+          <p:cNvPr id="21" name="Text 14"/>
           <p:cNvSpPr txBox="1"/>
           <p:nvPr/>
         </p:nvSpPr>
         <p:spPr>
           <a:xfrm>
-            <a:off x="1600200" y="4306824"/>
-            <a:ext cx="9966960" cy="365760"/>
+            <a:off x="7680960" y="4681728"/>
+            <a:ext cx="3931920" cy="411480"/>
           </a:xfrm>
           <a:prstGeom prst="rect">
             <a:avLst/>
@@ -7809,90 +8012,76 @@
               <a:buNone/>
             </a:pPr>
             <a:r>
-              <a:rPr lang="en-US" sz="1700" b="1" dirty="0">
-                <a:solidFill>
-                  <a:srgbClr val="1E2329"/>
-                </a:solidFill>
-              </a:rPr>
-              <a:t>SDG 9: Industry, innovation &amp; infrastructure</a:t>
-            </a:r>
-            <a:endParaRPr lang="en-US" sz="1700" dirty="0"/>
-          </a:p>
-        </p:txBody>
-      </p:sp>
-      <p:sp>
-        <p:nvSpPr>
-          <p:cNvPr id="18" name="Text 16"/>
-          <p:cNvSpPr txBox="1"/>
-          <p:nvPr/>
-        </p:nvSpPr>
-        <p:spPr>
-          <a:xfrm>
-            <a:off x="1600200" y="4672584"/>
-            <a:ext cx="9966960" cy="411480"/>
-          </a:xfrm>
-          <a:prstGeom prst="rect">
-            <a:avLst/>
-          </a:prstGeom>
-          <a:noFill/>
-          <a:ln/>
-        </p:spPr>
-        <p:txBody>
-          <a:bodyPr wrap="square" lIns="0" tIns="0" rIns="0" bIns="0" rtlCol="0" anchor="t"/>
-          <a:lstStyle/>
-          <a:p>
-            <a:pPr indent="0" marL="0">
-              <a:buNone/>
-            </a:pPr>
-            <a:r>
-              <a:rPr lang="en-US" sz="1400" dirty="0">
+              <a:rPr lang="en-US" sz="1300" dirty="0">
                 <a:solidFill>
                   <a:srgbClr val="4B5563"/>
                 </a:solidFill>
               </a:rPr>
-              <a:t>9.1: more out of existing roads through data, not new construction.</a:t>
-            </a:r>
-            <a:endParaRPr lang="en-US" sz="1400" dirty="0"/>
-          </a:p>
-        </p:txBody>
-      </p:sp>
-      <p:sp>
-        <p:nvSpPr>
-          <p:cNvPr id="19" name="sdg-4"/>
+              <a:t>15-minute data would give earlier, sharper alerts</a:t>
+            </a:r>
+            <a:endParaRPr lang="en-US" sz="1300" dirty="0"/>
+          </a:p>
+        </p:txBody>
+      </p:sp>
+      <p:sp>
+        <p:nvSpPr>
+          <p:cNvPr id="22" name="icon-circle"/>
           <p:cNvSpPr/>
           <p:nvPr/>
         </p:nvSpPr>
         <p:spPr>
           <a:xfrm>
-            <a:off x="548640" y="5239512"/>
-            <a:ext cx="822960" cy="822960"/>
-          </a:xfrm>
-          <a:prstGeom prst="roundRect">
-            <a:avLst>
-              <a:gd name="adj" fmla="val 11111"/>
-            </a:avLst>
+            <a:off x="7040880" y="5212080"/>
+            <a:ext cx="457200" cy="457200"/>
+          </a:xfrm>
+          <a:prstGeom prst="ellipse">
+            <a:avLst/>
           </a:prstGeom>
           <a:solidFill>
-            <a:srgbClr val="C5192D"/>
+            <a:srgbClr val="9CA3AF"/>
           </a:solidFill>
           <a:ln w="12700">
             <a:solidFill>
-              <a:srgbClr val="C5192D"/>
+              <a:srgbClr val="9CA3AF"/>
             </a:solidFill>
             <a:prstDash val="solid"/>
           </a:ln>
         </p:spPr>
       </p:sp>
-      <p:sp>
-        <p:nvSpPr>
-          <p:cNvPr id="20" name="Text 18"/>
+      <p:pic>
+        <p:nvPicPr>
+          <p:cNvPr id="23" name="icon" descr="preencoded.png">    </p:cNvPr>
+          <p:cNvPicPr>
+            <a:picLocks noChangeAspect="1"/>
+          </p:cNvPicPr>
+          <p:nvPr/>
+        </p:nvPicPr>
+        <p:blipFill>
+          <a:blip r:embed="rId6"/>
+          <a:stretch>
+            <a:fillRect/>
+          </a:stretch>
+        </p:blipFill>
+        <p:spPr>
+          <a:xfrm>
+            <a:off x="7141464" y="5312664"/>
+            <a:ext cx="256032" cy="256032"/>
+          </a:xfrm>
+          <a:prstGeom prst="rect">
+            <a:avLst/>
+          </a:prstGeom>
+        </p:spPr>
+      </p:pic>
+      <p:sp>
+        <p:nvSpPr>
+          <p:cNvPr id="24" name="Text 16"/>
           <p:cNvSpPr txBox="1"/>
           <p:nvPr/>
         </p:nvSpPr>
         <p:spPr>
           <a:xfrm>
-            <a:off x="548640" y="5239512"/>
-            <a:ext cx="822960" cy="822960"/>
+            <a:off x="7680960" y="5175504"/>
+            <a:ext cx="3931920" cy="320040"/>
           </a:xfrm>
           <a:prstGeom prst="rect">
             <a:avLst/>
@@ -7901,34 +8090,34 @@
           <a:ln/>
         </p:spPr>
         <p:txBody>
-          <a:bodyPr wrap="square" lIns="0" tIns="0" rIns="0" bIns="0" rtlCol="0" anchor="ctr"/>
-          <a:lstStyle/>
-          <a:p>
-            <a:pPr algn="ctr" indent="0" marL="0">
+          <a:bodyPr wrap="square" lIns="0" tIns="0" rIns="0" bIns="0" rtlCol="0" anchor="t"/>
+          <a:lstStyle/>
+          <a:p>
+            <a:pPr indent="0" marL="0">
               <a:buNone/>
             </a:pPr>
             <a:r>
-              <a:rPr lang="en-US" sz="3000" b="1" dirty="0">
-                <a:solidFill>
-                  <a:srgbClr val="FFFFFF"/>
-                </a:solidFill>
-              </a:rPr>
-              <a:t>4</a:t>
-            </a:r>
-            <a:endParaRPr lang="en-US" sz="3000" dirty="0"/>
-          </a:p>
-        </p:txBody>
-      </p:sp>
-      <p:sp>
-        <p:nvSpPr>
-          <p:cNvPr id="21" name="Text 19"/>
+              <a:rPr lang="en-US" sz="1500" b="1" dirty="0">
+                <a:solidFill>
+                  <a:srgbClr val="1E2329"/>
+                </a:solidFill>
+              </a:rPr>
+              <a:t>No campus events</a:t>
+            </a:r>
+            <a:endParaRPr lang="en-US" sz="1500" dirty="0"/>
+          </a:p>
+        </p:txBody>
+      </p:sp>
+      <p:sp>
+        <p:nvSpPr>
+          <p:cNvPr id="25" name="Text 17"/>
           <p:cNvSpPr txBox="1"/>
           <p:nvPr/>
         </p:nvSpPr>
         <p:spPr>
           <a:xfrm>
-            <a:off x="1600200" y="5285232"/>
-            <a:ext cx="9966960" cy="365760"/>
+            <a:off x="7680960" y="5504688"/>
+            <a:ext cx="3931920" cy="411480"/>
           </a:xfrm>
           <a:prstGeom prst="rect">
             <a:avLst/>
@@ -7944,50 +8133,14 @@
               <a:buNone/>
             </a:pPr>
             <a:r>
-              <a:rPr lang="en-US" sz="1700" b="1" dirty="0">
-                <a:solidFill>
-                  <a:srgbClr val="1E2329"/>
-                </a:solidFill>
-              </a:rPr>
-              <a:t>SDG 4: Quality education</a:t>
-            </a:r>
-            <a:endParaRPr lang="en-US" sz="1700" dirty="0"/>
-          </a:p>
-        </p:txBody>
-      </p:sp>
-      <p:sp>
-        <p:nvSpPr>
-          <p:cNvPr id="22" name="Text 20"/>
-          <p:cNvSpPr txBox="1"/>
-          <p:nvPr/>
-        </p:nvSpPr>
-        <p:spPr>
-          <a:xfrm>
-            <a:off x="1600200" y="5650992"/>
-            <a:ext cx="9966960" cy="411480"/>
-          </a:xfrm>
-          <a:prstGeom prst="rect">
-            <a:avLst/>
-          </a:prstGeom>
-          <a:noFill/>
-          <a:ln/>
-        </p:spPr>
-        <p:txBody>
-          <a:bodyPr wrap="square" lIns="0" tIns="0" rIns="0" bIns="0" rtlCol="0" anchor="t"/>
-          <a:lstStyle/>
-          <a:p>
-            <a:pPr indent="0" marL="0">
-              <a:buNone/>
-            </a:pPr>
-            <a:r>
-              <a:rPr lang="en-US" sz="1400" dirty="0">
+              <a:rPr lang="en-US" sz="1300" dirty="0">
                 <a:solidFill>
                   <a:srgbClr val="4B5563"/>
                 </a:solidFill>
               </a:rPr>
-              <a:t>4.a: students reach class on time and safely.</a:t>
-            </a:r>
-            <a:endParaRPr lang="en-US" sz="1400" dirty="0"/>
+              <a:t>Exams and fests are not in the data</a:t>
+            </a:r>
+            <a:endParaRPr lang="en-US" sz="1300" dirty="0"/>
           </a:p>
         </p:txBody>
       </p:sp>
@@ -8091,7 +8244,7 @@
                   <a:srgbClr val="1E2329"/>
                 </a:solidFill>
               </a:rPr>
-              <a:t>Implemented today, and what comes next</a:t>
+              <a:t>Responsible AI: private, fair about its limits, human in charge</a:t>
             </a:r>
             <a:endParaRPr lang="en-US" sz="3200" dirty="0"/>
           </a:p>
@@ -8105,39 +8258,12 @@
         </p:nvSpPr>
         <p:spPr>
           <a:xfrm>
-            <a:off x="548640" y="1325880"/>
-            <a:ext cx="5440680" cy="4709160"/>
+            <a:off x="548640" y="1371600"/>
+            <a:ext cx="3566160" cy="2194560"/>
           </a:xfrm>
           <a:prstGeom prst="roundRect">
             <a:avLst>
-              <a:gd name="adj" fmla="val 2330"/>
-            </a:avLst>
-          </a:prstGeom>
-          <a:solidFill>
-            <a:srgbClr val="EAF6EA"/>
-          </a:solidFill>
-          <a:ln w="12700">
-            <a:solidFill>
-              <a:srgbClr val="EAF6EA"/>
-            </a:solidFill>
-            <a:prstDash val="solid"/>
-          </a:ln>
-        </p:spPr>
-      </p:sp>
-      <p:sp>
-        <p:nvSpPr>
-          <p:cNvPr id="4" name="card"/>
-          <p:cNvSpPr/>
-          <p:nvPr/>
-        </p:nvSpPr>
-        <p:spPr>
-          <a:xfrm>
-            <a:off x="6172200" y="1325880"/>
-            <a:ext cx="5440680" cy="4709160"/>
-          </a:xfrm>
-          <a:prstGeom prst="roundRect">
-            <a:avLst>
-              <a:gd name="adj" fmla="val 2330"/>
+              <a:gd name="adj" fmla="val 5000"/>
             </a:avLst>
           </a:prstGeom>
           <a:solidFill>
@@ -8153,14 +8279,63 @@
       </p:sp>
       <p:sp>
         <p:nvSpPr>
-          <p:cNvPr id="5" name="Text 3"/>
+          <p:cNvPr id="4" name="icon-circle"/>
+          <p:cNvSpPr/>
+          <p:nvPr/>
+        </p:nvSpPr>
+        <p:spPr>
+          <a:xfrm>
+            <a:off x="822960" y="1645920"/>
+            <a:ext cx="548640" cy="548640"/>
+          </a:xfrm>
+          <a:prstGeom prst="ellipse">
+            <a:avLst/>
+          </a:prstGeom>
+          <a:solidFill>
+            <a:srgbClr val="2A78D6"/>
+          </a:solidFill>
+          <a:ln w="12700">
+            <a:solidFill>
+              <a:srgbClr val="2A78D6"/>
+            </a:solidFill>
+            <a:prstDash val="solid"/>
+          </a:ln>
+        </p:spPr>
+      </p:sp>
+      <p:pic>
+        <p:nvPicPr>
+          <p:cNvPr id="5" name="icon" descr="preencoded.png">    </p:cNvPr>
+          <p:cNvPicPr>
+            <a:picLocks noChangeAspect="1"/>
+          </p:cNvPicPr>
+          <p:nvPr/>
+        </p:nvPicPr>
+        <p:blipFill>
+          <a:blip r:embed="rId1"/>
+          <a:stretch>
+            <a:fillRect/>
+          </a:stretch>
+        </p:blipFill>
+        <p:spPr>
+          <a:xfrm>
+            <a:off x="943661" y="1766621"/>
+            <a:ext cx="307238" cy="307238"/>
+          </a:xfrm>
+          <a:prstGeom prst="rect">
+            <a:avLst/>
+          </a:prstGeom>
+        </p:spPr>
+      </p:pic>
+      <p:sp>
+        <p:nvSpPr>
+          <p:cNvPr id="6" name="Text 3"/>
           <p:cNvSpPr txBox="1"/>
           <p:nvPr/>
         </p:nvSpPr>
         <p:spPr>
           <a:xfrm>
-            <a:off x="868680" y="1554480"/>
-            <a:ext cx="4846320" cy="411480"/>
+            <a:off x="1554480" y="1719072"/>
+            <a:ext cx="2423160" cy="411480"/>
           </a:xfrm>
           <a:prstGeom prst="rect">
             <a:avLst/>
@@ -8176,27 +8351,27 @@
               <a:buNone/>
             </a:pPr>
             <a:r>
-              <a:rPr lang="en-US" sz="1900" b="1" dirty="0">
-                <a:solidFill>
-                  <a:srgbClr val="006300"/>
-                </a:solidFill>
-              </a:rPr>
-              <a:t>Implemented and working</a:t>
-            </a:r>
-            <a:endParaRPr lang="en-US" sz="1900" dirty="0"/>
-          </a:p>
-        </p:txBody>
-      </p:sp>
-      <p:sp>
-        <p:nvSpPr>
-          <p:cNvPr id="6" name="Text 4"/>
+              <a:rPr lang="en-US" sz="1700" b="1" dirty="0">
+                <a:solidFill>
+                  <a:srgbClr val="1E2329"/>
+                </a:solidFill>
+              </a:rPr>
+              <a:t>Privacy</a:t>
+            </a:r>
+            <a:endParaRPr lang="en-US" sz="1700" dirty="0"/>
+          </a:p>
+        </p:txBody>
+      </p:sp>
+      <p:sp>
+        <p:nvSpPr>
+          <p:cNvPr id="7" name="Text 4"/>
           <p:cNvSpPr txBox="1"/>
           <p:nvPr/>
         </p:nvSpPr>
         <p:spPr>
           <a:xfrm>
-            <a:off x="868680" y="2103120"/>
-            <a:ext cx="4846320" cy="3749040"/>
+            <a:off x="822960" y="2331720"/>
+            <a:ext cx="3063240" cy="1143000"/>
           </a:xfrm>
           <a:prstGeom prst="rect">
             <a:avLst/>
@@ -8208,107 +8383,107 @@
           <a:bodyPr wrap="square" lIns="0" tIns="0" rIns="0" bIns="0" rtlCol="0" anchor="t"/>
           <a:lstStyle/>
           <a:p>
-            <a:pPr marL="342900" indent="-342900">
-              <a:spcAft>
-                <a:spcPts val="800"/>
-              </a:spcAft>
-              <a:buSzPct val="100000"/>
-              <a:buChar char="•"/>
-            </a:pPr>
-            <a:r>
-              <a:rPr lang="en-US" sz="1500" dirty="0">
-                <a:solidFill>
-                  <a:srgbClr val="1E2329"/>
-                </a:solidFill>
-              </a:rPr>
-              <a:t>Real-data model, beats all baselines on a held-out year</a:t>
-            </a:r>
-            <a:endParaRPr lang="en-US" sz="1500" dirty="0"/>
-          </a:p>
-          <a:p>
-            <a:pPr marL="342900" indent="-342900">
-              <a:spcAft>
-                <a:spcPts val="800"/>
-              </a:spcAft>
-              <a:buSzPct val="100000"/>
-              <a:buChar char="•"/>
-            </a:pPr>
-            <a:r>
-              <a:rPr lang="en-US" sz="1500" dirty="0">
-                <a:solidFill>
-                  <a:srgbClr val="1E2329"/>
-                </a:solidFill>
-              </a:rPr>
-              <a:t>1-hour-ahead forecast, alert at P(High) ≥ 50%, explanations</a:t>
-            </a:r>
-            <a:endParaRPr lang="en-US" sz="1500" dirty="0"/>
-          </a:p>
-          <a:p>
-            <a:pPr marL="342900" indent="-342900">
-              <a:spcAft>
-                <a:spcPts val="800"/>
-              </a:spcAft>
-              <a:buSzPct val="100000"/>
-              <a:buChar char="•"/>
-            </a:pPr>
-            <a:r>
-              <a:rPr lang="en-US" sz="1500" dirty="0">
-                <a:solidFill>
-                  <a:srgbClr val="1E2329"/>
-                </a:solidFill>
-              </a:rPr>
-              <a:t>Web dashboard: replay, what-if, manual entry, CSV upload, performance, responsible AI</a:t>
-            </a:r>
-            <a:endParaRPr lang="en-US" sz="1500" dirty="0"/>
-          </a:p>
-          <a:p>
-            <a:pPr marL="342900" indent="-342900">
-              <a:spcAft>
-                <a:spcPts val="800"/>
-              </a:spcAft>
-              <a:buSzPct val="100000"/>
-              <a:buChar char="•"/>
-            </a:pPr>
-            <a:r>
-              <a:rPr lang="en-US" sz="1500" dirty="0">
-                <a:solidFill>
-                  <a:srgbClr val="1E2329"/>
-                </a:solidFill>
-              </a:rPr>
-              <a:t>Model runs in the browser; deployed from GitHub to Vercel</a:t>
-            </a:r>
-            <a:endParaRPr lang="en-US" sz="1500" dirty="0"/>
-          </a:p>
-          <a:p>
-            <a:pPr marL="342900" indent="-342900">
-              <a:spcAft>
-                <a:spcPts val="800"/>
-              </a:spcAft>
-              <a:buSzPct val="100000"/>
-              <a:buChar char="•"/>
-            </a:pPr>
-            <a:r>
-              <a:rPr lang="en-US" sz="1500" dirty="0">
-                <a:solidFill>
-                  <a:srgbClr val="1E2329"/>
-                </a:solidFill>
-              </a:rPr>
-              <a:t>Metrics, confusion matrix, test cases with failures, parity tests</a:t>
-            </a:r>
-            <a:endParaRPr lang="en-US" sz="1500" dirty="0"/>
-          </a:p>
-        </p:txBody>
-      </p:sp>
-      <p:sp>
-        <p:nvSpPr>
-          <p:cNvPr id="7" name="Text 5"/>
+            <a:pPr indent="0" marL="0">
+              <a:buNone/>
+            </a:pPr>
+            <a:r>
+              <a:rPr lang="en-US" sz="1300" dirty="0">
+                <a:solidFill>
+                  <a:srgbClr val="4B5563"/>
+                </a:solidFill>
+              </a:rPr>
+              <a:t>Vehicle counts only. No cameras, plates or personal data. Uploaded CSVs never leave the browser.</a:t>
+            </a:r>
+            <a:endParaRPr lang="en-US" sz="1300" dirty="0"/>
+          </a:p>
+        </p:txBody>
+      </p:sp>
+      <p:sp>
+        <p:nvSpPr>
+          <p:cNvPr id="8" name="card"/>
+          <p:cNvSpPr/>
+          <p:nvPr/>
+        </p:nvSpPr>
+        <p:spPr>
+          <a:xfrm>
+            <a:off x="4297680" y="1371600"/>
+            <a:ext cx="3566160" cy="2194560"/>
+          </a:xfrm>
+          <a:prstGeom prst="roundRect">
+            <a:avLst>
+              <a:gd name="adj" fmla="val 5000"/>
+            </a:avLst>
+          </a:prstGeom>
+          <a:solidFill>
+            <a:srgbClr val="F3F4F6"/>
+          </a:solidFill>
+          <a:ln w="12700">
+            <a:solidFill>
+              <a:srgbClr val="F3F4F6"/>
+            </a:solidFill>
+            <a:prstDash val="solid"/>
+          </a:ln>
+        </p:spPr>
+      </p:sp>
+      <p:sp>
+        <p:nvSpPr>
+          <p:cNvPr id="9" name="icon-circle"/>
+          <p:cNvSpPr/>
+          <p:nvPr/>
+        </p:nvSpPr>
+        <p:spPr>
+          <a:xfrm>
+            <a:off x="4572000" y="1645920"/>
+            <a:ext cx="548640" cy="548640"/>
+          </a:xfrm>
+          <a:prstGeom prst="ellipse">
+            <a:avLst/>
+          </a:prstGeom>
+          <a:solidFill>
+            <a:srgbClr val="E8A317"/>
+          </a:solidFill>
+          <a:ln w="12700">
+            <a:solidFill>
+              <a:srgbClr val="E8A317"/>
+            </a:solidFill>
+            <a:prstDash val="solid"/>
+          </a:ln>
+        </p:spPr>
+      </p:sp>
+      <p:pic>
+        <p:nvPicPr>
+          <p:cNvPr id="10" name="icon" descr="preencoded.png">    </p:cNvPr>
+          <p:cNvPicPr>
+            <a:picLocks noChangeAspect="1"/>
+          </p:cNvPicPr>
+          <p:nvPr/>
+        </p:nvPicPr>
+        <p:blipFill>
+          <a:blip r:embed="rId2"/>
+          <a:stretch>
+            <a:fillRect/>
+          </a:stretch>
+        </p:blipFill>
+        <p:spPr>
+          <a:xfrm>
+            <a:off x="4692701" y="1766621"/>
+            <a:ext cx="307238" cy="307238"/>
+          </a:xfrm>
+          <a:prstGeom prst="rect">
+            <a:avLst/>
+          </a:prstGeom>
+        </p:spPr>
+      </p:pic>
+      <p:sp>
+        <p:nvSpPr>
+          <p:cNvPr id="11" name="Text 7"/>
           <p:cNvSpPr txBox="1"/>
           <p:nvPr/>
         </p:nvSpPr>
         <p:spPr>
           <a:xfrm>
-            <a:off x="6492240" y="1554480"/>
-            <a:ext cx="4846320" cy="411480"/>
+            <a:off x="5303520" y="1719072"/>
+            <a:ext cx="2423160" cy="411480"/>
           </a:xfrm>
           <a:prstGeom prst="rect">
             <a:avLst/>
@@ -8324,27 +8499,27 @@
               <a:buNone/>
             </a:pPr>
             <a:r>
-              <a:rPr lang="en-US" sz="1900" b="1" dirty="0">
+              <a:rPr lang="en-US" sz="1700" b="1" dirty="0">
                 <a:solidFill>
                   <a:srgbClr val="1E2329"/>
                 </a:solidFill>
               </a:rPr>
-              <a:t>Planned next</a:t>
-            </a:r>
-            <a:endParaRPr lang="en-US" sz="1900" dirty="0"/>
-          </a:p>
-        </p:txBody>
-      </p:sp>
-      <p:sp>
-        <p:nvSpPr>
-          <p:cNvPr id="8" name="Text 6"/>
+              <a:t>Bias &amp; fairness</a:t>
+            </a:r>
+            <a:endParaRPr lang="en-US" sz="1700" dirty="0"/>
+          </a:p>
+        </p:txBody>
+      </p:sp>
+      <p:sp>
+        <p:nvSpPr>
+          <p:cNvPr id="12" name="Text 8"/>
           <p:cNvSpPr txBox="1"/>
           <p:nvPr/>
         </p:nvSpPr>
         <p:spPr>
           <a:xfrm>
-            <a:off x="6492240" y="2103120"/>
-            <a:ext cx="4846320" cy="3749040"/>
+            <a:off x="4572000" y="2331720"/>
+            <a:ext cx="3063240" cy="1143000"/>
           </a:xfrm>
           <a:prstGeom prst="rect">
             <a:avLst/>
@@ -8356,94 +8531,610 @@
           <a:bodyPr wrap="square" lIns="0" tIns="0" rIns="0" bIns="0" rtlCol="0" anchor="t"/>
           <a:lstStyle/>
           <a:p>
-            <a:pPr marL="342900" indent="-342900">
-              <a:spcAft>
-                <a:spcPts val="800"/>
-              </a:spcAft>
-              <a:buSzPct val="100000"/>
-              <a:buChar char="•"/>
-            </a:pPr>
-            <a:r>
-              <a:rPr lang="en-US" sz="1500" dirty="0">
+            <a:pPr indent="0" marL="0">
+              <a:buNone/>
+            </a:pPr>
+            <a:r>
+              <a:rPr lang="en-US" sz="1300" dirty="0">
+                <a:solidFill>
+                  <a:srgbClr val="4B5563"/>
+                </a:solidFill>
+              </a:rPr>
+              <a:t>One US highway; weaker in fog and rain (67–68%). Balanced class weights so High isn't ignored.</a:t>
+            </a:r>
+            <a:endParaRPr lang="en-US" sz="1300" dirty="0"/>
+          </a:p>
+        </p:txBody>
+      </p:sp>
+      <p:sp>
+        <p:nvSpPr>
+          <p:cNvPr id="13" name="card"/>
+          <p:cNvSpPr/>
+          <p:nvPr/>
+        </p:nvSpPr>
+        <p:spPr>
+          <a:xfrm>
+            <a:off x="8046720" y="1371600"/>
+            <a:ext cx="3566160" cy="2194560"/>
+          </a:xfrm>
+          <a:prstGeom prst="roundRect">
+            <a:avLst>
+              <a:gd name="adj" fmla="val 5000"/>
+            </a:avLst>
+          </a:prstGeom>
+          <a:solidFill>
+            <a:srgbClr val="F3F4F6"/>
+          </a:solidFill>
+          <a:ln w="12700">
+            <a:solidFill>
+              <a:srgbClr val="F3F4F6"/>
+            </a:solidFill>
+            <a:prstDash val="solid"/>
+          </a:ln>
+        </p:spPr>
+      </p:sp>
+      <p:sp>
+        <p:nvSpPr>
+          <p:cNvPr id="14" name="icon-circle"/>
+          <p:cNvSpPr/>
+          <p:nvPr/>
+        </p:nvSpPr>
+        <p:spPr>
+          <a:xfrm>
+            <a:off x="8321040" y="1645920"/>
+            <a:ext cx="548640" cy="548640"/>
+          </a:xfrm>
+          <a:prstGeom prst="ellipse">
+            <a:avLst/>
+          </a:prstGeom>
+          <a:solidFill>
+            <a:srgbClr val="6B7280"/>
+          </a:solidFill>
+          <a:ln w="12700">
+            <a:solidFill>
+              <a:srgbClr val="6B7280"/>
+            </a:solidFill>
+            <a:prstDash val="solid"/>
+          </a:ln>
+        </p:spPr>
+      </p:sp>
+      <p:pic>
+        <p:nvPicPr>
+          <p:cNvPr id="15" name="icon" descr="preencoded.png">    </p:cNvPr>
+          <p:cNvPicPr>
+            <a:picLocks noChangeAspect="1"/>
+          </p:cNvPicPr>
+          <p:nvPr/>
+        </p:nvPicPr>
+        <p:blipFill>
+          <a:blip r:embed="rId3"/>
+          <a:stretch>
+            <a:fillRect/>
+          </a:stretch>
+        </p:blipFill>
+        <p:spPr>
+          <a:xfrm>
+            <a:off x="8441741" y="1766621"/>
+            <a:ext cx="307238" cy="307238"/>
+          </a:xfrm>
+          <a:prstGeom prst="rect">
+            <a:avLst/>
+          </a:prstGeom>
+        </p:spPr>
+      </p:pic>
+      <p:sp>
+        <p:nvSpPr>
+          <p:cNvPr id="16" name="Text 11"/>
+          <p:cNvSpPr txBox="1"/>
+          <p:nvPr/>
+        </p:nvSpPr>
+        <p:spPr>
+          <a:xfrm>
+            <a:off x="9052560" y="1719072"/>
+            <a:ext cx="2423160" cy="411480"/>
+          </a:xfrm>
+          <a:prstGeom prst="rect">
+            <a:avLst/>
+          </a:prstGeom>
+          <a:noFill/>
+          <a:ln/>
+        </p:spPr>
+        <p:txBody>
+          <a:bodyPr wrap="square" lIns="0" tIns="0" rIns="0" bIns="0" rtlCol="0" anchor="t"/>
+          <a:lstStyle/>
+          <a:p>
+            <a:pPr indent="0" marL="0">
+              <a:buNone/>
+            </a:pPr>
+            <a:r>
+              <a:rPr lang="en-US" sz="1700" b="1" dirty="0">
                 <a:solidFill>
                   <a:srgbClr val="1E2329"/>
                 </a:solidFill>
               </a:rPr>
-              <a:t>Count vehicles at our own gate for a few weeks and retrain (same code)</a:t>
-            </a:r>
-            <a:endParaRPr lang="en-US" sz="1500" dirty="0"/>
-          </a:p>
-          <a:p>
-            <a:pPr marL="342900" indent="-342900">
-              <a:spcAft>
-                <a:spcPts val="800"/>
-              </a:spcAft>
-              <a:buSzPct val="100000"/>
-              <a:buChar char="•"/>
-            </a:pPr>
-            <a:r>
-              <a:rPr lang="en-US" sz="1500" dirty="0">
+              <a:t>Security</a:t>
+            </a:r>
+            <a:endParaRPr lang="en-US" sz="1700" dirty="0"/>
+          </a:p>
+        </p:txBody>
+      </p:sp>
+      <p:sp>
+        <p:nvSpPr>
+          <p:cNvPr id="17" name="Text 12"/>
+          <p:cNvSpPr txBox="1"/>
+          <p:nvPr/>
+        </p:nvSpPr>
+        <p:spPr>
+          <a:xfrm>
+            <a:off x="8321040" y="2331720"/>
+            <a:ext cx="3063240" cy="1143000"/>
+          </a:xfrm>
+          <a:prstGeom prst="rect">
+            <a:avLst/>
+          </a:prstGeom>
+          <a:noFill/>
+          <a:ln/>
+        </p:spPr>
+        <p:txBody>
+          <a:bodyPr wrap="square" lIns="0" tIns="0" rIns="0" bIns="0" rtlCol="0" anchor="t"/>
+          <a:lstStyle/>
+          <a:p>
+            <a:pPr indent="0" marL="0">
+              <a:buNone/>
+            </a:pPr>
+            <a:r>
+              <a:rPr lang="en-US" sz="1300" dirty="0">
+                <a:solidFill>
+                  <a:srgbClr val="4B5563"/>
+                </a:solidFill>
+              </a:rPr>
+              <a:t>Static site: no server, database or keys. User text is escaped; files are parsed as plain data.</a:t>
+            </a:r>
+            <a:endParaRPr lang="en-US" sz="1300" dirty="0"/>
+          </a:p>
+        </p:txBody>
+      </p:sp>
+      <p:sp>
+        <p:nvSpPr>
+          <p:cNvPr id="18" name="card"/>
+          <p:cNvSpPr/>
+          <p:nvPr/>
+        </p:nvSpPr>
+        <p:spPr>
+          <a:xfrm>
+            <a:off x="548640" y="3749040"/>
+            <a:ext cx="3566160" cy="2194560"/>
+          </a:xfrm>
+          <a:prstGeom prst="roundRect">
+            <a:avLst>
+              <a:gd name="adj" fmla="val 5000"/>
+            </a:avLst>
+          </a:prstGeom>
+          <a:solidFill>
+            <a:srgbClr val="F3F4F6"/>
+          </a:solidFill>
+          <a:ln w="12700">
+            <a:solidFill>
+              <a:srgbClr val="F3F4F6"/>
+            </a:solidFill>
+            <a:prstDash val="solid"/>
+          </a:ln>
+        </p:spPr>
+      </p:sp>
+      <p:sp>
+        <p:nvSpPr>
+          <p:cNvPr id="19" name="icon-circle"/>
+          <p:cNvSpPr/>
+          <p:nvPr/>
+        </p:nvSpPr>
+        <p:spPr>
+          <a:xfrm>
+            <a:off x="822960" y="4023360"/>
+            <a:ext cx="548640" cy="548640"/>
+          </a:xfrm>
+          <a:prstGeom prst="ellipse">
+            <a:avLst/>
+          </a:prstGeom>
+          <a:solidFill>
+            <a:srgbClr val="0CA30C"/>
+          </a:solidFill>
+          <a:ln w="12700">
+            <a:solidFill>
+              <a:srgbClr val="0CA30C"/>
+            </a:solidFill>
+            <a:prstDash val="solid"/>
+          </a:ln>
+        </p:spPr>
+      </p:sp>
+      <p:pic>
+        <p:nvPicPr>
+          <p:cNvPr id="20" name="icon" descr="preencoded.png">    </p:cNvPr>
+          <p:cNvPicPr>
+            <a:picLocks noChangeAspect="1"/>
+          </p:cNvPicPr>
+          <p:nvPr/>
+        </p:nvPicPr>
+        <p:blipFill>
+          <a:blip r:embed="rId4"/>
+          <a:stretch>
+            <a:fillRect/>
+          </a:stretch>
+        </p:blipFill>
+        <p:spPr>
+          <a:xfrm>
+            <a:off x="943661" y="4144061"/>
+            <a:ext cx="307238" cy="307238"/>
+          </a:xfrm>
+          <a:prstGeom prst="rect">
+            <a:avLst/>
+          </a:prstGeom>
+        </p:spPr>
+      </p:pic>
+      <p:sp>
+        <p:nvSpPr>
+          <p:cNvPr id="21" name="Text 15"/>
+          <p:cNvSpPr txBox="1"/>
+          <p:nvPr/>
+        </p:nvSpPr>
+        <p:spPr>
+          <a:xfrm>
+            <a:off x="1554480" y="4096512"/>
+            <a:ext cx="2423160" cy="411480"/>
+          </a:xfrm>
+          <a:prstGeom prst="rect">
+            <a:avLst/>
+          </a:prstGeom>
+          <a:noFill/>
+          <a:ln/>
+        </p:spPr>
+        <p:txBody>
+          <a:bodyPr wrap="square" lIns="0" tIns="0" rIns="0" bIns="0" rtlCol="0" anchor="t"/>
+          <a:lstStyle/>
+          <a:p>
+            <a:pPr indent="0" marL="0">
+              <a:buNone/>
+            </a:pPr>
+            <a:r>
+              <a:rPr lang="en-US" sz="1700" b="1" dirty="0">
                 <a:solidFill>
                   <a:srgbClr val="1E2329"/>
                 </a:solidFill>
               </a:rPr>
-              <a:t>Speed or queue labels from a camera or GPS</a:t>
-            </a:r>
-            <a:endParaRPr lang="en-US" sz="1500" dirty="0"/>
-          </a:p>
-          <a:p>
-            <a:pPr marL="342900" indent="-342900">
-              <a:spcAft>
-                <a:spcPts val="800"/>
-              </a:spcAft>
-              <a:buSzPct val="100000"/>
-              <a:buChar char="•"/>
-            </a:pPr>
-            <a:r>
-              <a:rPr lang="en-US" sz="1500" dirty="0">
+              <a:t>Accessibility</a:t>
+            </a:r>
+            <a:endParaRPr lang="en-US" sz="1700" dirty="0"/>
+          </a:p>
+        </p:txBody>
+      </p:sp>
+      <p:sp>
+        <p:nvSpPr>
+          <p:cNvPr id="22" name="Text 16"/>
+          <p:cNvSpPr txBox="1"/>
+          <p:nvPr/>
+        </p:nvSpPr>
+        <p:spPr>
+          <a:xfrm>
+            <a:off x="822960" y="4709160"/>
+            <a:ext cx="3063240" cy="1143000"/>
+          </a:xfrm>
+          <a:prstGeom prst="rect">
+            <a:avLst/>
+          </a:prstGeom>
+          <a:noFill/>
+          <a:ln/>
+        </p:spPr>
+        <p:txBody>
+          <a:bodyPr wrap="square" lIns="0" tIns="0" rIns="0" bIns="0" rtlCol="0" anchor="t"/>
+          <a:lstStyle/>
+          <a:p>
+            <a:pPr indent="0" marL="0">
+              <a:buNone/>
+            </a:pPr>
+            <a:r>
+              <a:rPr lang="en-US" sz="1300" dirty="0">
+                <a:solidFill>
+                  <a:srgbClr val="4B5563"/>
+                </a:solidFill>
+              </a:rPr>
+              <a:t>Word + icon for every level, colour-blind-safe colours, keyboard use, screen-reader labels, dark mode, mobile.</a:t>
+            </a:r>
+            <a:endParaRPr lang="en-US" sz="1300" dirty="0"/>
+          </a:p>
+        </p:txBody>
+      </p:sp>
+      <p:sp>
+        <p:nvSpPr>
+          <p:cNvPr id="23" name="card"/>
+          <p:cNvSpPr/>
+          <p:nvPr/>
+        </p:nvSpPr>
+        <p:spPr>
+          <a:xfrm>
+            <a:off x="4297680" y="3749040"/>
+            <a:ext cx="3566160" cy="2194560"/>
+          </a:xfrm>
+          <a:prstGeom prst="roundRect">
+            <a:avLst>
+              <a:gd name="adj" fmla="val 5000"/>
+            </a:avLst>
+          </a:prstGeom>
+          <a:solidFill>
+            <a:srgbClr val="F3F4F6"/>
+          </a:solidFill>
+          <a:ln w="12700">
+            <a:solidFill>
+              <a:srgbClr val="F3F4F6"/>
+            </a:solidFill>
+            <a:prstDash val="solid"/>
+          </a:ln>
+        </p:spPr>
+      </p:sp>
+      <p:sp>
+        <p:nvSpPr>
+          <p:cNvPr id="24" name="icon-circle"/>
+          <p:cNvSpPr/>
+          <p:nvPr/>
+        </p:nvSpPr>
+        <p:spPr>
+          <a:xfrm>
+            <a:off x="4572000" y="4023360"/>
+            <a:ext cx="548640" cy="548640"/>
+          </a:xfrm>
+          <a:prstGeom prst="ellipse">
+            <a:avLst/>
+          </a:prstGeom>
+          <a:solidFill>
+            <a:srgbClr val="D03B3B"/>
+          </a:solidFill>
+          <a:ln w="12700">
+            <a:solidFill>
+              <a:srgbClr val="D03B3B"/>
+            </a:solidFill>
+            <a:prstDash val="solid"/>
+          </a:ln>
+        </p:spPr>
+      </p:sp>
+      <p:pic>
+        <p:nvPicPr>
+          <p:cNvPr id="25" name="icon" descr="preencoded.png">    </p:cNvPr>
+          <p:cNvPicPr>
+            <a:picLocks noChangeAspect="1"/>
+          </p:cNvPicPr>
+          <p:nvPr/>
+        </p:nvPicPr>
+        <p:blipFill>
+          <a:blip r:embed="rId5"/>
+          <a:stretch>
+            <a:fillRect/>
+          </a:stretch>
+        </p:blipFill>
+        <p:spPr>
+          <a:xfrm>
+            <a:off x="4692701" y="4144061"/>
+            <a:ext cx="307238" cy="307238"/>
+          </a:xfrm>
+          <a:prstGeom prst="rect">
+            <a:avLst/>
+          </a:prstGeom>
+        </p:spPr>
+      </p:pic>
+      <p:sp>
+        <p:nvSpPr>
+          <p:cNvPr id="26" name="Text 19"/>
+          <p:cNvSpPr txBox="1"/>
+          <p:nvPr/>
+        </p:nvSpPr>
+        <p:spPr>
+          <a:xfrm>
+            <a:off x="5303520" y="4096512"/>
+            <a:ext cx="2423160" cy="411480"/>
+          </a:xfrm>
+          <a:prstGeom prst="rect">
+            <a:avLst/>
+          </a:prstGeom>
+          <a:noFill/>
+          <a:ln/>
+        </p:spPr>
+        <p:txBody>
+          <a:bodyPr wrap="square" lIns="0" tIns="0" rIns="0" bIns="0" rtlCol="0" anchor="t"/>
+          <a:lstStyle/>
+          <a:p>
+            <a:pPr indent="0" marL="0">
+              <a:buNone/>
+            </a:pPr>
+            <a:r>
+              <a:rPr lang="en-US" sz="1700" b="1" dirty="0">
                 <a:solidFill>
                   <a:srgbClr val="1E2329"/>
                 </a:solidFill>
               </a:rPr>
-              <a:t>Live traffic counter and weather-forecast APIs</a:t>
-            </a:r>
-            <a:endParaRPr lang="en-US" sz="1500" dirty="0"/>
-          </a:p>
-          <a:p>
-            <a:pPr marL="342900" indent="-342900">
-              <a:spcAft>
-                <a:spcPts val="800"/>
-              </a:spcAft>
-              <a:buSzPct val="100000"/>
-              <a:buChar char="•"/>
-            </a:pPr>
-            <a:r>
-              <a:rPr lang="en-US" sz="1500" dirty="0">
+              <a:t>Limitations</a:t>
+            </a:r>
+            <a:endParaRPr lang="en-US" sz="1700" dirty="0"/>
+          </a:p>
+        </p:txBody>
+      </p:sp>
+      <p:sp>
+        <p:nvSpPr>
+          <p:cNvPr id="27" name="Text 20"/>
+          <p:cNvSpPr txBox="1"/>
+          <p:nvPr/>
+        </p:nvSpPr>
+        <p:spPr>
+          <a:xfrm>
+            <a:off x="4572000" y="4709160"/>
+            <a:ext cx="3063240" cy="1143000"/>
+          </a:xfrm>
+          <a:prstGeom prst="rect">
+            <a:avLst/>
+          </a:prstGeom>
+          <a:noFill/>
+          <a:ln/>
+        </p:spPr>
+        <p:txBody>
+          <a:bodyPr wrap="square" lIns="0" tIns="0" rIns="0" bIns="0" rtlCol="0" anchor="t"/>
+          <a:lstStyle/>
+          <a:p>
+            <a:pPr indent="0" marL="0">
+              <a:buNone/>
+            </a:pPr>
+            <a:r>
+              <a:rPr lang="en-US" sz="1300" dirty="0">
+                <a:solidFill>
+                  <a:srgbClr val="4B5563"/>
+                </a:solidFill>
+              </a:rPr>
+              <a:t>Proxy labels, stand-in road, hourly data, no live feed. All stated on the site and in the report.</a:t>
+            </a:r>
+            <a:endParaRPr lang="en-US" sz="1300" dirty="0"/>
+          </a:p>
+        </p:txBody>
+      </p:sp>
+      <p:sp>
+        <p:nvSpPr>
+          <p:cNvPr id="28" name="card"/>
+          <p:cNvSpPr/>
+          <p:nvPr/>
+        </p:nvSpPr>
+        <p:spPr>
+          <a:xfrm>
+            <a:off x="8046720" y="3749040"/>
+            <a:ext cx="3566160" cy="2194560"/>
+          </a:xfrm>
+          <a:prstGeom prst="roundRect">
+            <a:avLst>
+              <a:gd name="adj" fmla="val 5000"/>
+            </a:avLst>
+          </a:prstGeom>
+          <a:solidFill>
+            <a:srgbClr val="F3F4F6"/>
+          </a:solidFill>
+          <a:ln w="12700">
+            <a:solidFill>
+              <a:srgbClr val="F3F4F6"/>
+            </a:solidFill>
+            <a:prstDash val="solid"/>
+          </a:ln>
+        </p:spPr>
+      </p:sp>
+      <p:sp>
+        <p:nvSpPr>
+          <p:cNvPr id="29" name="icon-circle"/>
+          <p:cNvSpPr/>
+          <p:nvPr/>
+        </p:nvSpPr>
+        <p:spPr>
+          <a:xfrm>
+            <a:off x="8321040" y="4023360"/>
+            <a:ext cx="548640" cy="548640"/>
+          </a:xfrm>
+          <a:prstGeom prst="ellipse">
+            <a:avLst/>
+          </a:prstGeom>
+          <a:solidFill>
+            <a:srgbClr val="1E2329"/>
+          </a:solidFill>
+          <a:ln w="12700">
+            <a:solidFill>
+              <a:srgbClr val="1E2329"/>
+            </a:solidFill>
+            <a:prstDash val="solid"/>
+          </a:ln>
+        </p:spPr>
+      </p:sp>
+      <p:pic>
+        <p:nvPicPr>
+          <p:cNvPr id="30" name="icon" descr="preencoded.png">    </p:cNvPr>
+          <p:cNvPicPr>
+            <a:picLocks noChangeAspect="1"/>
+          </p:cNvPicPr>
+          <p:nvPr/>
+        </p:nvPicPr>
+        <p:blipFill>
+          <a:blip r:embed="rId6"/>
+          <a:stretch>
+            <a:fillRect/>
+          </a:stretch>
+        </p:blipFill>
+        <p:spPr>
+          <a:xfrm>
+            <a:off x="8441741" y="4144061"/>
+            <a:ext cx="307238" cy="307238"/>
+          </a:xfrm>
+          <a:prstGeom prst="rect">
+            <a:avLst/>
+          </a:prstGeom>
+        </p:spPr>
+      </p:pic>
+      <p:sp>
+        <p:nvSpPr>
+          <p:cNvPr id="31" name="Text 23"/>
+          <p:cNvSpPr txBox="1"/>
+          <p:nvPr/>
+        </p:nvSpPr>
+        <p:spPr>
+          <a:xfrm>
+            <a:off x="9052560" y="4096512"/>
+            <a:ext cx="2423160" cy="411480"/>
+          </a:xfrm>
+          <a:prstGeom prst="rect">
+            <a:avLst/>
+          </a:prstGeom>
+          <a:noFill/>
+          <a:ln/>
+        </p:spPr>
+        <p:txBody>
+          <a:bodyPr wrap="square" lIns="0" tIns="0" rIns="0" bIns="0" rtlCol="0" anchor="t"/>
+          <a:lstStyle/>
+          <a:p>
+            <a:pPr indent="0" marL="0">
+              <a:buNone/>
+            </a:pPr>
+            <a:r>
+              <a:rPr lang="en-US" sz="1700" b="1" dirty="0">
                 <a:solidFill>
                   <a:srgbClr val="1E2329"/>
                 </a:solidFill>
               </a:rPr>
-              <a:t>SMS or app notifications run by the transport office</a:t>
-            </a:r>
-            <a:endParaRPr lang="en-US" sz="1500" dirty="0"/>
-          </a:p>
-          <a:p>
-            <a:pPr marL="342900" indent="-342900">
-              <a:spcAft>
-                <a:spcPts val="800"/>
-              </a:spcAft>
-              <a:buSzPct val="100000"/>
-              <a:buChar char="•"/>
-            </a:pPr>
-            <a:r>
-              <a:rPr lang="en-US" sz="1500" dirty="0">
-                <a:solidFill>
-                  <a:srgbClr val="1E2329"/>
-                </a:solidFill>
-              </a:rPr>
-              <a:t>15-minute data and the campus event calendar</a:t>
-            </a:r>
-            <a:endParaRPr lang="en-US" sz="1500" dirty="0"/>
+              <a:t>Human oversight</a:t>
+            </a:r>
+            <a:endParaRPr lang="en-US" sz="1700" dirty="0"/>
+          </a:p>
+        </p:txBody>
+      </p:sp>
+      <p:sp>
+        <p:nvSpPr>
+          <p:cNvPr id="32" name="Text 24"/>
+          <p:cNvSpPr txBox="1"/>
+          <p:nvPr/>
+        </p:nvSpPr>
+        <p:spPr>
+          <a:xfrm>
+            <a:off x="8321040" y="4709160"/>
+            <a:ext cx="3063240" cy="1143000"/>
+          </a:xfrm>
+          <a:prstGeom prst="rect">
+            <a:avLst/>
+          </a:prstGeom>
+          <a:noFill/>
+          <a:ln/>
+        </p:spPr>
+        <p:txBody>
+          <a:bodyPr wrap="square" lIns="0" tIns="0" rIns="0" bIns="0" rtlCol="0" anchor="t"/>
+          <a:lstStyle/>
+          <a:p>
+            <a:pPr indent="0" marL="0">
+              <a:buNone/>
+            </a:pPr>
+            <a:r>
+              <a:rPr lang="en-US" sz="1300" dirty="0">
+                <a:solidFill>
+                  <a:srgbClr val="4B5563"/>
+                </a:solidFill>
+              </a:rPr>
+              <a:t>Advisory only: the transport office decides. Borderline 40–60% shown as a probability. Nothing automated.</a:t>
+            </a:r>
+            <a:endParaRPr lang="en-US" sz="1300" dirty="0"/>
           </a:p>
         </p:txBody>
       </p:sp>
@@ -8503,6 +9194,1279 @@
 <file path=ppt/slides/slide15.xml><?xml version="1.0" encoding="utf-8"?>
 <p:sld xmlns:a="http://schemas.openxmlformats.org/drawingml/2006/main" xmlns:r="http://schemas.openxmlformats.org/officeDocument/2006/relationships" xmlns:p="http://schemas.openxmlformats.org/presentationml/2006/main">
   <p:cSld name="Slide 15">
+    <p:spTree>
+      <p:nvGrpSpPr>
+        <p:cNvPr id="1" name=""/>
+        <p:cNvGrpSpPr/>
+        <p:nvPr/>
+      </p:nvGrpSpPr>
+      <p:grpSpPr>
+        <a:xfrm>
+          <a:off x="0" y="0"/>
+          <a:ext cx="0" cy="0"/>
+          <a:chOff x="0" y="0"/>
+          <a:chExt cx="0" cy="0"/>
+        </a:xfrm>
+      </p:grpSpPr>
+      <p:sp>
+        <p:nvSpPr>
+          <p:cNvPr id="2" name="title"/>
+          <p:cNvSpPr txBox="1"/>
+          <p:nvPr/>
+        </p:nvSpPr>
+        <p:spPr>
+          <a:xfrm>
+            <a:off x="548640" y="320040"/>
+            <a:ext cx="11064240" cy="777240"/>
+          </a:xfrm>
+          <a:prstGeom prst="rect">
+            <a:avLst/>
+          </a:prstGeom>
+          <a:noFill/>
+          <a:ln/>
+        </p:spPr>
+        <p:txBody>
+          <a:bodyPr wrap="square" lIns="0" tIns="0" rIns="0" bIns="0" rtlCol="0" anchor="ctr"/>
+          <a:lstStyle/>
+          <a:p>
+            <a:pPr indent="0" marL="0">
+              <a:buNone/>
+            </a:pPr>
+            <a:r>
+              <a:rPr lang="en-US" sz="3200" b="1" dirty="0">
+                <a:solidFill>
+                  <a:srgbClr val="1E2329"/>
+                </a:solidFill>
+              </a:rPr>
+              <a:t>Aligned with the UN Sustainable Development Goals</a:t>
+            </a:r>
+            <a:endParaRPr lang="en-US" sz="3200" dirty="0"/>
+          </a:p>
+        </p:txBody>
+      </p:sp>
+      <p:sp>
+        <p:nvSpPr>
+          <p:cNvPr id="3" name="sdg-11"/>
+          <p:cNvSpPr/>
+          <p:nvPr/>
+        </p:nvSpPr>
+        <p:spPr>
+          <a:xfrm>
+            <a:off x="548640" y="1325880"/>
+            <a:ext cx="822960" cy="822960"/>
+          </a:xfrm>
+          <a:prstGeom prst="roundRect">
+            <a:avLst>
+              <a:gd name="adj" fmla="val 11111"/>
+            </a:avLst>
+          </a:prstGeom>
+          <a:solidFill>
+            <a:srgbClr val="F99D26"/>
+          </a:solidFill>
+          <a:ln w="12700">
+            <a:solidFill>
+              <a:srgbClr val="F99D26"/>
+            </a:solidFill>
+            <a:prstDash val="solid"/>
+          </a:ln>
+        </p:spPr>
+      </p:sp>
+      <p:sp>
+        <p:nvSpPr>
+          <p:cNvPr id="4" name="Text 2"/>
+          <p:cNvSpPr txBox="1"/>
+          <p:nvPr/>
+        </p:nvSpPr>
+        <p:spPr>
+          <a:xfrm>
+            <a:off x="548640" y="1325880"/>
+            <a:ext cx="822960" cy="822960"/>
+          </a:xfrm>
+          <a:prstGeom prst="rect">
+            <a:avLst/>
+          </a:prstGeom>
+          <a:noFill/>
+          <a:ln/>
+        </p:spPr>
+        <p:txBody>
+          <a:bodyPr wrap="square" lIns="0" tIns="0" rIns="0" bIns="0" rtlCol="0" anchor="ctr"/>
+          <a:lstStyle/>
+          <a:p>
+            <a:pPr algn="ctr" indent="0" marL="0">
+              <a:buNone/>
+            </a:pPr>
+            <a:r>
+              <a:rPr lang="en-US" sz="3000" b="1" dirty="0">
+                <a:solidFill>
+                  <a:srgbClr val="FFFFFF"/>
+                </a:solidFill>
+              </a:rPr>
+              <a:t>11</a:t>
+            </a:r>
+            <a:endParaRPr lang="en-US" sz="3000" dirty="0"/>
+          </a:p>
+        </p:txBody>
+      </p:sp>
+      <p:sp>
+        <p:nvSpPr>
+          <p:cNvPr id="5" name="Text 3"/>
+          <p:cNvSpPr txBox="1"/>
+          <p:nvPr/>
+        </p:nvSpPr>
+        <p:spPr>
+          <a:xfrm>
+            <a:off x="1600200" y="1371600"/>
+            <a:ext cx="9966960" cy="365760"/>
+          </a:xfrm>
+          <a:prstGeom prst="rect">
+            <a:avLst/>
+          </a:prstGeom>
+          <a:noFill/>
+          <a:ln/>
+        </p:spPr>
+        <p:txBody>
+          <a:bodyPr wrap="square" lIns="0" tIns="0" rIns="0" bIns="0" rtlCol="0" anchor="t"/>
+          <a:lstStyle/>
+          <a:p>
+            <a:pPr indent="0" marL="0">
+              <a:buNone/>
+            </a:pPr>
+            <a:r>
+              <a:rPr lang="en-US" sz="1700" b="1" dirty="0">
+                <a:solidFill>
+                  <a:srgbClr val="1E2329"/>
+                </a:solidFill>
+              </a:rPr>
+              <a:t>SDG 11: Sustainable cities &amp; communities</a:t>
+            </a:r>
+            <a:endParaRPr lang="en-US" sz="1700" dirty="0"/>
+          </a:p>
+        </p:txBody>
+      </p:sp>
+      <p:sp>
+        <p:nvSpPr>
+          <p:cNvPr id="6" name="Text 4"/>
+          <p:cNvSpPr txBox="1"/>
+          <p:nvPr/>
+        </p:nvSpPr>
+        <p:spPr>
+          <a:xfrm>
+            <a:off x="1600200" y="1737360"/>
+            <a:ext cx="9966960" cy="411480"/>
+          </a:xfrm>
+          <a:prstGeom prst="rect">
+            <a:avLst/>
+          </a:prstGeom>
+          <a:noFill/>
+          <a:ln/>
+        </p:spPr>
+        <p:txBody>
+          <a:bodyPr wrap="square" lIns="0" tIns="0" rIns="0" bIns="0" rtlCol="0" anchor="t"/>
+          <a:lstStyle/>
+          <a:p>
+            <a:pPr indent="0" marL="0">
+              <a:buNone/>
+            </a:pPr>
+            <a:r>
+              <a:rPr lang="en-US" sz="1400" dirty="0">
+                <a:solidFill>
+                  <a:srgbClr val="4B5563"/>
+                </a:solidFill>
+              </a:rPr>
+              <a:t>Target 11.2: safer, more accessible transport at a shared choke point; pushes shuttles and alternate gates.</a:t>
+            </a:r>
+            <a:endParaRPr lang="en-US" sz="1400" dirty="0"/>
+          </a:p>
+        </p:txBody>
+      </p:sp>
+      <p:sp>
+        <p:nvSpPr>
+          <p:cNvPr id="7" name="sdg-3"/>
+          <p:cNvSpPr/>
+          <p:nvPr/>
+        </p:nvSpPr>
+        <p:spPr>
+          <a:xfrm>
+            <a:off x="548640" y="2304288"/>
+            <a:ext cx="822960" cy="822960"/>
+          </a:xfrm>
+          <a:prstGeom prst="roundRect">
+            <a:avLst>
+              <a:gd name="adj" fmla="val 11111"/>
+            </a:avLst>
+          </a:prstGeom>
+          <a:solidFill>
+            <a:srgbClr val="4C9F38"/>
+          </a:solidFill>
+          <a:ln w="12700">
+            <a:solidFill>
+              <a:srgbClr val="4C9F38"/>
+            </a:solidFill>
+            <a:prstDash val="solid"/>
+          </a:ln>
+        </p:spPr>
+      </p:sp>
+      <p:sp>
+        <p:nvSpPr>
+          <p:cNvPr id="8" name="Text 6"/>
+          <p:cNvSpPr txBox="1"/>
+          <p:nvPr/>
+        </p:nvSpPr>
+        <p:spPr>
+          <a:xfrm>
+            <a:off x="548640" y="2304288"/>
+            <a:ext cx="822960" cy="822960"/>
+          </a:xfrm>
+          <a:prstGeom prst="rect">
+            <a:avLst/>
+          </a:prstGeom>
+          <a:noFill/>
+          <a:ln/>
+        </p:spPr>
+        <p:txBody>
+          <a:bodyPr wrap="square" lIns="0" tIns="0" rIns="0" bIns="0" rtlCol="0" anchor="ctr"/>
+          <a:lstStyle/>
+          <a:p>
+            <a:pPr algn="ctr" indent="0" marL="0">
+              <a:buNone/>
+            </a:pPr>
+            <a:r>
+              <a:rPr lang="en-US" sz="3000" b="1" dirty="0">
+                <a:solidFill>
+                  <a:srgbClr val="FFFFFF"/>
+                </a:solidFill>
+              </a:rPr>
+              <a:t>3</a:t>
+            </a:r>
+            <a:endParaRPr lang="en-US" sz="3000" dirty="0"/>
+          </a:p>
+        </p:txBody>
+      </p:sp>
+      <p:sp>
+        <p:nvSpPr>
+          <p:cNvPr id="9" name="Text 7"/>
+          <p:cNvSpPr txBox="1"/>
+          <p:nvPr/>
+        </p:nvSpPr>
+        <p:spPr>
+          <a:xfrm>
+            <a:off x="1600200" y="2350008"/>
+            <a:ext cx="9966960" cy="365760"/>
+          </a:xfrm>
+          <a:prstGeom prst="rect">
+            <a:avLst/>
+          </a:prstGeom>
+          <a:noFill/>
+          <a:ln/>
+        </p:spPr>
+        <p:txBody>
+          <a:bodyPr wrap="square" lIns="0" tIns="0" rIns="0" bIns="0" rtlCol="0" anchor="t"/>
+          <a:lstStyle/>
+          <a:p>
+            <a:pPr indent="0" marL="0">
+              <a:buNone/>
+            </a:pPr>
+            <a:r>
+              <a:rPr lang="en-US" sz="1700" b="1" dirty="0">
+                <a:solidFill>
+                  <a:srgbClr val="1E2329"/>
+                </a:solidFill>
+              </a:rPr>
+              <a:t>SDG 3: Good health &amp; well-being</a:t>
+            </a:r>
+            <a:endParaRPr lang="en-US" sz="1700" dirty="0"/>
+          </a:p>
+        </p:txBody>
+      </p:sp>
+      <p:sp>
+        <p:nvSpPr>
+          <p:cNvPr id="10" name="Text 8"/>
+          <p:cNvSpPr txBox="1"/>
+          <p:nvPr/>
+        </p:nvSpPr>
+        <p:spPr>
+          <a:xfrm>
+            <a:off x="1600200" y="2715768"/>
+            <a:ext cx="9966960" cy="411480"/>
+          </a:xfrm>
+          <a:prstGeom prst="rect">
+            <a:avLst/>
+          </a:prstGeom>
+          <a:noFill/>
+          <a:ln/>
+        </p:spPr>
+        <p:txBody>
+          <a:bodyPr wrap="square" lIns="0" tIns="0" rIns="0" bIns="0" rtlCol="0" anchor="t"/>
+          <a:lstStyle/>
+          <a:p>
+            <a:pPr indent="0" marL="0">
+              <a:buNone/>
+            </a:pPr>
+            <a:r>
+              <a:rPr lang="en-US" sz="1400" dirty="0">
+                <a:solidFill>
+                  <a:srgbClr val="4B5563"/>
+                </a:solidFill>
+              </a:rPr>
+              <a:t>3.6 road injuries and 3.9 air pollution: calmer gate queues, less stop-start exhaust.</a:t>
+            </a:r>
+            <a:endParaRPr lang="en-US" sz="1400" dirty="0"/>
+          </a:p>
+        </p:txBody>
+      </p:sp>
+      <p:sp>
+        <p:nvSpPr>
+          <p:cNvPr id="11" name="sdg-13"/>
+          <p:cNvSpPr/>
+          <p:nvPr/>
+        </p:nvSpPr>
+        <p:spPr>
+          <a:xfrm>
+            <a:off x="548640" y="3282696"/>
+            <a:ext cx="822960" cy="822960"/>
+          </a:xfrm>
+          <a:prstGeom prst="roundRect">
+            <a:avLst>
+              <a:gd name="adj" fmla="val 11111"/>
+            </a:avLst>
+          </a:prstGeom>
+          <a:solidFill>
+            <a:srgbClr val="3F7E44"/>
+          </a:solidFill>
+          <a:ln w="12700">
+            <a:solidFill>
+              <a:srgbClr val="3F7E44"/>
+            </a:solidFill>
+            <a:prstDash val="solid"/>
+          </a:ln>
+        </p:spPr>
+      </p:sp>
+      <p:sp>
+        <p:nvSpPr>
+          <p:cNvPr id="12" name="Text 10"/>
+          <p:cNvSpPr txBox="1"/>
+          <p:nvPr/>
+        </p:nvSpPr>
+        <p:spPr>
+          <a:xfrm>
+            <a:off x="548640" y="3282696"/>
+            <a:ext cx="822960" cy="822960"/>
+          </a:xfrm>
+          <a:prstGeom prst="rect">
+            <a:avLst/>
+          </a:prstGeom>
+          <a:noFill/>
+          <a:ln/>
+        </p:spPr>
+        <p:txBody>
+          <a:bodyPr wrap="square" lIns="0" tIns="0" rIns="0" bIns="0" rtlCol="0" anchor="ctr"/>
+          <a:lstStyle/>
+          <a:p>
+            <a:pPr algn="ctr" indent="0" marL="0">
+              <a:buNone/>
+            </a:pPr>
+            <a:r>
+              <a:rPr lang="en-US" sz="3000" b="1" dirty="0">
+                <a:solidFill>
+                  <a:srgbClr val="FFFFFF"/>
+                </a:solidFill>
+              </a:rPr>
+              <a:t>13</a:t>
+            </a:r>
+            <a:endParaRPr lang="en-US" sz="3000" dirty="0"/>
+          </a:p>
+        </p:txBody>
+      </p:sp>
+      <p:sp>
+        <p:nvSpPr>
+          <p:cNvPr id="13" name="Text 11"/>
+          <p:cNvSpPr txBox="1"/>
+          <p:nvPr/>
+        </p:nvSpPr>
+        <p:spPr>
+          <a:xfrm>
+            <a:off x="1600200" y="3328416"/>
+            <a:ext cx="9966960" cy="365760"/>
+          </a:xfrm>
+          <a:prstGeom prst="rect">
+            <a:avLst/>
+          </a:prstGeom>
+          <a:noFill/>
+          <a:ln/>
+        </p:spPr>
+        <p:txBody>
+          <a:bodyPr wrap="square" lIns="0" tIns="0" rIns="0" bIns="0" rtlCol="0" anchor="t"/>
+          <a:lstStyle/>
+          <a:p>
+            <a:pPr indent="0" marL="0">
+              <a:buNone/>
+            </a:pPr>
+            <a:r>
+              <a:rPr lang="en-US" sz="1700" b="1" dirty="0">
+                <a:solidFill>
+                  <a:srgbClr val="1E2329"/>
+                </a:solidFill>
+              </a:rPr>
+              <a:t>SDG 13: Climate action</a:t>
+            </a:r>
+            <a:endParaRPr lang="en-US" sz="1700" dirty="0"/>
+          </a:p>
+        </p:txBody>
+      </p:sp>
+      <p:sp>
+        <p:nvSpPr>
+          <p:cNvPr id="14" name="Text 12"/>
+          <p:cNvSpPr txBox="1"/>
+          <p:nvPr/>
+        </p:nvSpPr>
+        <p:spPr>
+          <a:xfrm>
+            <a:off x="1600200" y="3694176"/>
+            <a:ext cx="9966960" cy="411480"/>
+          </a:xfrm>
+          <a:prstGeom prst="rect">
+            <a:avLst/>
+          </a:prstGeom>
+          <a:noFill/>
+          <a:ln/>
+        </p:spPr>
+        <p:txBody>
+          <a:bodyPr wrap="square" lIns="0" tIns="0" rIns="0" bIns="0" rtlCol="0" anchor="t"/>
+          <a:lstStyle/>
+          <a:p>
+            <a:pPr indent="0" marL="0">
+              <a:buNone/>
+            </a:pPr>
+            <a:r>
+              <a:rPr lang="en-US" sz="1400" dirty="0">
+                <a:solidFill>
+                  <a:srgbClr val="4B5563"/>
+                </a:solidFill>
+              </a:rPr>
+              <a:t>Smoother flow and more shuttle use mean less idling and lower emissions.</a:t>
+            </a:r>
+            <a:endParaRPr lang="en-US" sz="1400" dirty="0"/>
+          </a:p>
+        </p:txBody>
+      </p:sp>
+      <p:sp>
+        <p:nvSpPr>
+          <p:cNvPr id="15" name="sdg-9"/>
+          <p:cNvSpPr/>
+          <p:nvPr/>
+        </p:nvSpPr>
+        <p:spPr>
+          <a:xfrm>
+            <a:off x="548640" y="4261104"/>
+            <a:ext cx="822960" cy="822960"/>
+          </a:xfrm>
+          <a:prstGeom prst="roundRect">
+            <a:avLst>
+              <a:gd name="adj" fmla="val 11111"/>
+            </a:avLst>
+          </a:prstGeom>
+          <a:solidFill>
+            <a:srgbClr val="FD6925"/>
+          </a:solidFill>
+          <a:ln w="12700">
+            <a:solidFill>
+              <a:srgbClr val="FD6925"/>
+            </a:solidFill>
+            <a:prstDash val="solid"/>
+          </a:ln>
+        </p:spPr>
+      </p:sp>
+      <p:sp>
+        <p:nvSpPr>
+          <p:cNvPr id="16" name="Text 14"/>
+          <p:cNvSpPr txBox="1"/>
+          <p:nvPr/>
+        </p:nvSpPr>
+        <p:spPr>
+          <a:xfrm>
+            <a:off x="548640" y="4261104"/>
+            <a:ext cx="822960" cy="822960"/>
+          </a:xfrm>
+          <a:prstGeom prst="rect">
+            <a:avLst/>
+          </a:prstGeom>
+          <a:noFill/>
+          <a:ln/>
+        </p:spPr>
+        <p:txBody>
+          <a:bodyPr wrap="square" lIns="0" tIns="0" rIns="0" bIns="0" rtlCol="0" anchor="ctr"/>
+          <a:lstStyle/>
+          <a:p>
+            <a:pPr algn="ctr" indent="0" marL="0">
+              <a:buNone/>
+            </a:pPr>
+            <a:r>
+              <a:rPr lang="en-US" sz="3000" b="1" dirty="0">
+                <a:solidFill>
+                  <a:srgbClr val="FFFFFF"/>
+                </a:solidFill>
+              </a:rPr>
+              <a:t>9</a:t>
+            </a:r>
+            <a:endParaRPr lang="en-US" sz="3000" dirty="0"/>
+          </a:p>
+        </p:txBody>
+      </p:sp>
+      <p:sp>
+        <p:nvSpPr>
+          <p:cNvPr id="17" name="Text 15"/>
+          <p:cNvSpPr txBox="1"/>
+          <p:nvPr/>
+        </p:nvSpPr>
+        <p:spPr>
+          <a:xfrm>
+            <a:off x="1600200" y="4306824"/>
+            <a:ext cx="9966960" cy="365760"/>
+          </a:xfrm>
+          <a:prstGeom prst="rect">
+            <a:avLst/>
+          </a:prstGeom>
+          <a:noFill/>
+          <a:ln/>
+        </p:spPr>
+        <p:txBody>
+          <a:bodyPr wrap="square" lIns="0" tIns="0" rIns="0" bIns="0" rtlCol="0" anchor="t"/>
+          <a:lstStyle/>
+          <a:p>
+            <a:pPr indent="0" marL="0">
+              <a:buNone/>
+            </a:pPr>
+            <a:r>
+              <a:rPr lang="en-US" sz="1700" b="1" dirty="0">
+                <a:solidFill>
+                  <a:srgbClr val="1E2329"/>
+                </a:solidFill>
+              </a:rPr>
+              <a:t>SDG 9: Industry, innovation &amp; infrastructure</a:t>
+            </a:r>
+            <a:endParaRPr lang="en-US" sz="1700" dirty="0"/>
+          </a:p>
+        </p:txBody>
+      </p:sp>
+      <p:sp>
+        <p:nvSpPr>
+          <p:cNvPr id="18" name="Text 16"/>
+          <p:cNvSpPr txBox="1"/>
+          <p:nvPr/>
+        </p:nvSpPr>
+        <p:spPr>
+          <a:xfrm>
+            <a:off x="1600200" y="4672584"/>
+            <a:ext cx="9966960" cy="411480"/>
+          </a:xfrm>
+          <a:prstGeom prst="rect">
+            <a:avLst/>
+          </a:prstGeom>
+          <a:noFill/>
+          <a:ln/>
+        </p:spPr>
+        <p:txBody>
+          <a:bodyPr wrap="square" lIns="0" tIns="0" rIns="0" bIns="0" rtlCol="0" anchor="t"/>
+          <a:lstStyle/>
+          <a:p>
+            <a:pPr indent="0" marL="0">
+              <a:buNone/>
+            </a:pPr>
+            <a:r>
+              <a:rPr lang="en-US" sz="1400" dirty="0">
+                <a:solidFill>
+                  <a:srgbClr val="4B5563"/>
+                </a:solidFill>
+              </a:rPr>
+              <a:t>9.1: more out of existing roads through data, not new construction.</a:t>
+            </a:r>
+            <a:endParaRPr lang="en-US" sz="1400" dirty="0"/>
+          </a:p>
+        </p:txBody>
+      </p:sp>
+      <p:sp>
+        <p:nvSpPr>
+          <p:cNvPr id="19" name="sdg-4"/>
+          <p:cNvSpPr/>
+          <p:nvPr/>
+        </p:nvSpPr>
+        <p:spPr>
+          <a:xfrm>
+            <a:off x="548640" y="5239512"/>
+            <a:ext cx="822960" cy="822960"/>
+          </a:xfrm>
+          <a:prstGeom prst="roundRect">
+            <a:avLst>
+              <a:gd name="adj" fmla="val 11111"/>
+            </a:avLst>
+          </a:prstGeom>
+          <a:solidFill>
+            <a:srgbClr val="C5192D"/>
+          </a:solidFill>
+          <a:ln w="12700">
+            <a:solidFill>
+              <a:srgbClr val="C5192D"/>
+            </a:solidFill>
+            <a:prstDash val="solid"/>
+          </a:ln>
+        </p:spPr>
+      </p:sp>
+      <p:sp>
+        <p:nvSpPr>
+          <p:cNvPr id="20" name="Text 18"/>
+          <p:cNvSpPr txBox="1"/>
+          <p:nvPr/>
+        </p:nvSpPr>
+        <p:spPr>
+          <a:xfrm>
+            <a:off x="548640" y="5239512"/>
+            <a:ext cx="822960" cy="822960"/>
+          </a:xfrm>
+          <a:prstGeom prst="rect">
+            <a:avLst/>
+          </a:prstGeom>
+          <a:noFill/>
+          <a:ln/>
+        </p:spPr>
+        <p:txBody>
+          <a:bodyPr wrap="square" lIns="0" tIns="0" rIns="0" bIns="0" rtlCol="0" anchor="ctr"/>
+          <a:lstStyle/>
+          <a:p>
+            <a:pPr algn="ctr" indent="0" marL="0">
+              <a:buNone/>
+            </a:pPr>
+            <a:r>
+              <a:rPr lang="en-US" sz="3000" b="1" dirty="0">
+                <a:solidFill>
+                  <a:srgbClr val="FFFFFF"/>
+                </a:solidFill>
+              </a:rPr>
+              <a:t>4</a:t>
+            </a:r>
+            <a:endParaRPr lang="en-US" sz="3000" dirty="0"/>
+          </a:p>
+        </p:txBody>
+      </p:sp>
+      <p:sp>
+        <p:nvSpPr>
+          <p:cNvPr id="21" name="Text 19"/>
+          <p:cNvSpPr txBox="1"/>
+          <p:nvPr/>
+        </p:nvSpPr>
+        <p:spPr>
+          <a:xfrm>
+            <a:off x="1600200" y="5285232"/>
+            <a:ext cx="9966960" cy="365760"/>
+          </a:xfrm>
+          <a:prstGeom prst="rect">
+            <a:avLst/>
+          </a:prstGeom>
+          <a:noFill/>
+          <a:ln/>
+        </p:spPr>
+        <p:txBody>
+          <a:bodyPr wrap="square" lIns="0" tIns="0" rIns="0" bIns="0" rtlCol="0" anchor="t"/>
+          <a:lstStyle/>
+          <a:p>
+            <a:pPr indent="0" marL="0">
+              <a:buNone/>
+            </a:pPr>
+            <a:r>
+              <a:rPr lang="en-US" sz="1700" b="1" dirty="0">
+                <a:solidFill>
+                  <a:srgbClr val="1E2329"/>
+                </a:solidFill>
+              </a:rPr>
+              <a:t>SDG 4: Quality education</a:t>
+            </a:r>
+            <a:endParaRPr lang="en-US" sz="1700" dirty="0"/>
+          </a:p>
+        </p:txBody>
+      </p:sp>
+      <p:sp>
+        <p:nvSpPr>
+          <p:cNvPr id="22" name="Text 20"/>
+          <p:cNvSpPr txBox="1"/>
+          <p:nvPr/>
+        </p:nvSpPr>
+        <p:spPr>
+          <a:xfrm>
+            <a:off x="1600200" y="5650992"/>
+            <a:ext cx="9966960" cy="411480"/>
+          </a:xfrm>
+          <a:prstGeom prst="rect">
+            <a:avLst/>
+          </a:prstGeom>
+          <a:noFill/>
+          <a:ln/>
+        </p:spPr>
+        <p:txBody>
+          <a:bodyPr wrap="square" lIns="0" tIns="0" rIns="0" bIns="0" rtlCol="0" anchor="t"/>
+          <a:lstStyle/>
+          <a:p>
+            <a:pPr indent="0" marL="0">
+              <a:buNone/>
+            </a:pPr>
+            <a:r>
+              <a:rPr lang="en-US" sz="1400" dirty="0">
+                <a:solidFill>
+                  <a:srgbClr val="4B5563"/>
+                </a:solidFill>
+              </a:rPr>
+              <a:t>4.a: students reach class on time and safely.</a:t>
+            </a:r>
+            <a:endParaRPr lang="en-US" sz="1400" dirty="0"/>
+          </a:p>
+        </p:txBody>
+      </p:sp>
+      <p:sp>
+        <p:nvSpPr>
+          <p:cNvPr id="25" name="Slide Number Placeholder 0"/>
+          <p:cNvSpPr>
+            <a:spLocks noGrp="1"/>
+          </p:cNvSpPr>
+          <p:nvPr>
+            <p:ph type="sldNum" sz="quarter" idx="4294967295"/>
+          </p:nvPr>
+        </p:nvSpPr>
+        <p:spPr>
+          <a:xfrm>
+            <a:off x="11155680" y="6400800"/>
+            <a:ext cx="548640" cy="274320"/>
+          </a:xfrm>
+          <a:prstGeom prst="rect">
+            <a:avLst/>
+          </a:prstGeom>
+          <a:extLst>
+            <a:ext uri="{C572A759-6A51-4108-AA02-DFA0A04FC94B}">
+              <ma14:wrappingTextBoxFlag xmlns:ma14="http://schemas.microsoft.com/office/mac/drawingml/2011/main" val="0"/>
+            </a:ext>
+          </a:extLst>
+        </p:spPr>
+        <p:txBody>
+          <a:bodyPr/>
+          <a:lstStyle>
+            <a:lvl1pPr>
+              <a:defRPr sz="1000">
+                <a:solidFill>
+                  <a:srgbClr val="6B7280"/>
+                </a:solidFill>
+              </a:defRPr>
+            </a:lvl1pPr>
+          </a:lstStyle>
+          <a:p>
+            <a:pPr algn="r"/>
+            <a:fld id="{F7021451-1387-4CA6-816F-3879F97B5CBC}" type="slidenum">
+              <a:rPr b="0" lang="en-US"/>
+              <a:t>15</a:t>
+            </a:fld>
+            <a:endParaRPr lang="en-US"/>
+          </a:p>
+        </p:txBody>
+      </p:sp>
+    </p:spTree>
+  </p:cSld>
+  <p:clrMapOvr>
+    <a:masterClrMapping/>
+  </p:clrMapOvr>
+</p:sld>
+</file>
+
+<file path=ppt/slides/slide16.xml><?xml version="1.0" encoding="utf-8"?>
+<p:sld xmlns:a="http://schemas.openxmlformats.org/drawingml/2006/main" xmlns:r="http://schemas.openxmlformats.org/officeDocument/2006/relationships" xmlns:p="http://schemas.openxmlformats.org/presentationml/2006/main">
+  <p:cSld name="Slide 16">
+    <p:spTree>
+      <p:nvGrpSpPr>
+        <p:cNvPr id="1" name=""/>
+        <p:cNvGrpSpPr/>
+        <p:nvPr/>
+      </p:nvGrpSpPr>
+      <p:grpSpPr>
+        <a:xfrm>
+          <a:off x="0" y="0"/>
+          <a:ext cx="0" cy="0"/>
+          <a:chOff x="0" y="0"/>
+          <a:chExt cx="0" cy="0"/>
+        </a:xfrm>
+      </p:grpSpPr>
+      <p:sp>
+        <p:nvSpPr>
+          <p:cNvPr id="2" name="title"/>
+          <p:cNvSpPr txBox="1"/>
+          <p:nvPr/>
+        </p:nvSpPr>
+        <p:spPr>
+          <a:xfrm>
+            <a:off x="548640" y="320040"/>
+            <a:ext cx="11064240" cy="777240"/>
+          </a:xfrm>
+          <a:prstGeom prst="rect">
+            <a:avLst/>
+          </a:prstGeom>
+          <a:noFill/>
+          <a:ln/>
+        </p:spPr>
+        <p:txBody>
+          <a:bodyPr wrap="square" lIns="0" tIns="0" rIns="0" bIns="0" rtlCol="0" anchor="ctr"/>
+          <a:lstStyle/>
+          <a:p>
+            <a:pPr indent="0" marL="0">
+              <a:buNone/>
+            </a:pPr>
+            <a:r>
+              <a:rPr lang="en-US" sz="3200" b="1" dirty="0">
+                <a:solidFill>
+                  <a:srgbClr val="1E2329"/>
+                </a:solidFill>
+              </a:rPr>
+              <a:t>Implemented today, and what comes next</a:t>
+            </a:r>
+            <a:endParaRPr lang="en-US" sz="3200" dirty="0"/>
+          </a:p>
+        </p:txBody>
+      </p:sp>
+      <p:sp>
+        <p:nvSpPr>
+          <p:cNvPr id="3" name="card"/>
+          <p:cNvSpPr/>
+          <p:nvPr/>
+        </p:nvSpPr>
+        <p:spPr>
+          <a:xfrm>
+            <a:off x="548640" y="1325880"/>
+            <a:ext cx="5440680" cy="4709160"/>
+          </a:xfrm>
+          <a:prstGeom prst="roundRect">
+            <a:avLst>
+              <a:gd name="adj" fmla="val 2330"/>
+            </a:avLst>
+          </a:prstGeom>
+          <a:solidFill>
+            <a:srgbClr val="EAF6EA"/>
+          </a:solidFill>
+          <a:ln w="12700">
+            <a:solidFill>
+              <a:srgbClr val="EAF6EA"/>
+            </a:solidFill>
+            <a:prstDash val="solid"/>
+          </a:ln>
+        </p:spPr>
+      </p:sp>
+      <p:sp>
+        <p:nvSpPr>
+          <p:cNvPr id="4" name="card"/>
+          <p:cNvSpPr/>
+          <p:nvPr/>
+        </p:nvSpPr>
+        <p:spPr>
+          <a:xfrm>
+            <a:off x="6172200" y="1325880"/>
+            <a:ext cx="5440680" cy="4709160"/>
+          </a:xfrm>
+          <a:prstGeom prst="roundRect">
+            <a:avLst>
+              <a:gd name="adj" fmla="val 2330"/>
+            </a:avLst>
+          </a:prstGeom>
+          <a:solidFill>
+            <a:srgbClr val="F3F4F6"/>
+          </a:solidFill>
+          <a:ln w="12700">
+            <a:solidFill>
+              <a:srgbClr val="F3F4F6"/>
+            </a:solidFill>
+            <a:prstDash val="solid"/>
+          </a:ln>
+        </p:spPr>
+      </p:sp>
+      <p:sp>
+        <p:nvSpPr>
+          <p:cNvPr id="5" name="Text 3"/>
+          <p:cNvSpPr txBox="1"/>
+          <p:nvPr/>
+        </p:nvSpPr>
+        <p:spPr>
+          <a:xfrm>
+            <a:off x="868680" y="1554480"/>
+            <a:ext cx="4846320" cy="411480"/>
+          </a:xfrm>
+          <a:prstGeom prst="rect">
+            <a:avLst/>
+          </a:prstGeom>
+          <a:noFill/>
+          <a:ln/>
+        </p:spPr>
+        <p:txBody>
+          <a:bodyPr wrap="square" lIns="0" tIns="0" rIns="0" bIns="0" rtlCol="0" anchor="t"/>
+          <a:lstStyle/>
+          <a:p>
+            <a:pPr indent="0" marL="0">
+              <a:buNone/>
+            </a:pPr>
+            <a:r>
+              <a:rPr lang="en-US" sz="1900" b="1" dirty="0">
+                <a:solidFill>
+                  <a:srgbClr val="006300"/>
+                </a:solidFill>
+              </a:rPr>
+              <a:t>Implemented and working</a:t>
+            </a:r>
+            <a:endParaRPr lang="en-US" sz="1900" dirty="0"/>
+          </a:p>
+        </p:txBody>
+      </p:sp>
+      <p:sp>
+        <p:nvSpPr>
+          <p:cNvPr id="6" name="Text 4"/>
+          <p:cNvSpPr txBox="1"/>
+          <p:nvPr/>
+        </p:nvSpPr>
+        <p:spPr>
+          <a:xfrm>
+            <a:off x="868680" y="2103120"/>
+            <a:ext cx="4846320" cy="3749040"/>
+          </a:xfrm>
+          <a:prstGeom prst="rect">
+            <a:avLst/>
+          </a:prstGeom>
+          <a:noFill/>
+          <a:ln/>
+        </p:spPr>
+        <p:txBody>
+          <a:bodyPr wrap="square" lIns="0" tIns="0" rIns="0" bIns="0" rtlCol="0" anchor="t"/>
+          <a:lstStyle/>
+          <a:p>
+            <a:pPr marL="342900" indent="-342900">
+              <a:spcAft>
+                <a:spcPts val="800"/>
+              </a:spcAft>
+              <a:buSzPct val="100000"/>
+              <a:buChar char="•"/>
+            </a:pPr>
+            <a:r>
+              <a:rPr lang="en-US" sz="1500" dirty="0">
+                <a:solidFill>
+                  <a:srgbClr val="1E2329"/>
+                </a:solidFill>
+              </a:rPr>
+              <a:t>Real-data model, beats all baselines on a held-out year</a:t>
+            </a:r>
+            <a:endParaRPr lang="en-US" sz="1500" dirty="0"/>
+          </a:p>
+          <a:p>
+            <a:pPr marL="342900" indent="-342900">
+              <a:spcAft>
+                <a:spcPts val="800"/>
+              </a:spcAft>
+              <a:buSzPct val="100000"/>
+              <a:buChar char="•"/>
+            </a:pPr>
+            <a:r>
+              <a:rPr lang="en-US" sz="1500" dirty="0">
+                <a:solidFill>
+                  <a:srgbClr val="1E2329"/>
+                </a:solidFill>
+              </a:rPr>
+              <a:t>1-hour-ahead forecast, alert at P(High) ≥ 50%, explanations</a:t>
+            </a:r>
+            <a:endParaRPr lang="en-US" sz="1500" dirty="0"/>
+          </a:p>
+          <a:p>
+            <a:pPr marL="342900" indent="-342900">
+              <a:spcAft>
+                <a:spcPts val="800"/>
+              </a:spcAft>
+              <a:buSzPct val="100000"/>
+              <a:buChar char="•"/>
+            </a:pPr>
+            <a:r>
+              <a:rPr lang="en-US" sz="1500" dirty="0">
+                <a:solidFill>
+                  <a:srgbClr val="1E2329"/>
+                </a:solidFill>
+              </a:rPr>
+              <a:t>Web dashboard: replay, what-if, manual entry, CSV upload, performance, responsible AI</a:t>
+            </a:r>
+            <a:endParaRPr lang="en-US" sz="1500" dirty="0"/>
+          </a:p>
+          <a:p>
+            <a:pPr marL="342900" indent="-342900">
+              <a:spcAft>
+                <a:spcPts val="800"/>
+              </a:spcAft>
+              <a:buSzPct val="100000"/>
+              <a:buChar char="•"/>
+            </a:pPr>
+            <a:r>
+              <a:rPr lang="en-US" sz="1500" dirty="0">
+                <a:solidFill>
+                  <a:srgbClr val="1E2329"/>
+                </a:solidFill>
+              </a:rPr>
+              <a:t>Agentic AI layer: tool loop that overrides the alert for crashes and closures</a:t>
+            </a:r>
+            <a:endParaRPr lang="en-US" sz="1500" dirty="0"/>
+          </a:p>
+          <a:p>
+            <a:pPr marL="342900" indent="-342900">
+              <a:spcAft>
+                <a:spcPts val="800"/>
+              </a:spcAft>
+              <a:buSzPct val="100000"/>
+              <a:buChar char="•"/>
+            </a:pPr>
+            <a:r>
+              <a:rPr lang="en-US" sz="1500" dirty="0">
+                <a:solidFill>
+                  <a:srgbClr val="1E2329"/>
+                </a:solidFill>
+              </a:rPr>
+              <a:t>Model runs in the browser; deployed from GitHub to Vercel</a:t>
+            </a:r>
+            <a:endParaRPr lang="en-US" sz="1500" dirty="0"/>
+          </a:p>
+          <a:p>
+            <a:pPr marL="342900" indent="-342900">
+              <a:spcAft>
+                <a:spcPts val="800"/>
+              </a:spcAft>
+              <a:buSzPct val="100000"/>
+              <a:buChar char="•"/>
+            </a:pPr>
+            <a:r>
+              <a:rPr lang="en-US" sz="1500" dirty="0">
+                <a:solidFill>
+                  <a:srgbClr val="1E2329"/>
+                </a:solidFill>
+              </a:rPr>
+              <a:t>Metrics, confusion matrix, test cases with failures, parity tests</a:t>
+            </a:r>
+            <a:endParaRPr lang="en-US" sz="1500" dirty="0"/>
+          </a:p>
+        </p:txBody>
+      </p:sp>
+      <p:sp>
+        <p:nvSpPr>
+          <p:cNvPr id="7" name="Text 5"/>
+          <p:cNvSpPr txBox="1"/>
+          <p:nvPr/>
+        </p:nvSpPr>
+        <p:spPr>
+          <a:xfrm>
+            <a:off x="6492240" y="1554480"/>
+            <a:ext cx="4846320" cy="411480"/>
+          </a:xfrm>
+          <a:prstGeom prst="rect">
+            <a:avLst/>
+          </a:prstGeom>
+          <a:noFill/>
+          <a:ln/>
+        </p:spPr>
+        <p:txBody>
+          <a:bodyPr wrap="square" lIns="0" tIns="0" rIns="0" bIns="0" rtlCol="0" anchor="t"/>
+          <a:lstStyle/>
+          <a:p>
+            <a:pPr indent="0" marL="0">
+              <a:buNone/>
+            </a:pPr>
+            <a:r>
+              <a:rPr lang="en-US" sz="1900" b="1" dirty="0">
+                <a:solidFill>
+                  <a:srgbClr val="1E2329"/>
+                </a:solidFill>
+              </a:rPr>
+              <a:t>Planned next</a:t>
+            </a:r>
+            <a:endParaRPr lang="en-US" sz="1900" dirty="0"/>
+          </a:p>
+        </p:txBody>
+      </p:sp>
+      <p:sp>
+        <p:nvSpPr>
+          <p:cNvPr id="8" name="Text 6"/>
+          <p:cNvSpPr txBox="1"/>
+          <p:nvPr/>
+        </p:nvSpPr>
+        <p:spPr>
+          <a:xfrm>
+            <a:off x="6492240" y="2103120"/>
+            <a:ext cx="4846320" cy="3749040"/>
+          </a:xfrm>
+          <a:prstGeom prst="rect">
+            <a:avLst/>
+          </a:prstGeom>
+          <a:noFill/>
+          <a:ln/>
+        </p:spPr>
+        <p:txBody>
+          <a:bodyPr wrap="square" lIns="0" tIns="0" rIns="0" bIns="0" rtlCol="0" anchor="t"/>
+          <a:lstStyle/>
+          <a:p>
+            <a:pPr marL="342900" indent="-342900">
+              <a:spcAft>
+                <a:spcPts val="800"/>
+              </a:spcAft>
+              <a:buSzPct val="100000"/>
+              <a:buChar char="•"/>
+            </a:pPr>
+            <a:r>
+              <a:rPr lang="en-US" sz="1500" dirty="0">
+                <a:solidFill>
+                  <a:srgbClr val="1E2329"/>
+                </a:solidFill>
+              </a:rPr>
+              <a:t>Count vehicles at our own gate for a few weeks and retrain (same code)</a:t>
+            </a:r>
+            <a:endParaRPr lang="en-US" sz="1500" dirty="0"/>
+          </a:p>
+          <a:p>
+            <a:pPr marL="342900" indent="-342900">
+              <a:spcAft>
+                <a:spcPts val="800"/>
+              </a:spcAft>
+              <a:buSzPct val="100000"/>
+              <a:buChar char="•"/>
+            </a:pPr>
+            <a:r>
+              <a:rPr lang="en-US" sz="1500" dirty="0">
+                <a:solidFill>
+                  <a:srgbClr val="1E2329"/>
+                </a:solidFill>
+              </a:rPr>
+              <a:t>Speed or queue labels from a camera or GPS</a:t>
+            </a:r>
+            <a:endParaRPr lang="en-US" sz="1500" dirty="0"/>
+          </a:p>
+          <a:p>
+            <a:pPr marL="342900" indent="-342900">
+              <a:spcAft>
+                <a:spcPts val="800"/>
+              </a:spcAft>
+              <a:buSzPct val="100000"/>
+              <a:buChar char="•"/>
+            </a:pPr>
+            <a:r>
+              <a:rPr lang="en-US" sz="1500" dirty="0">
+                <a:solidFill>
+                  <a:srgbClr val="1E2329"/>
+                </a:solidFill>
+              </a:rPr>
+              <a:t>Live traffic counter and weather-forecast APIs</a:t>
+            </a:r>
+            <a:endParaRPr lang="en-US" sz="1500" dirty="0"/>
+          </a:p>
+          <a:p>
+            <a:pPr marL="342900" indent="-342900">
+              <a:spcAft>
+                <a:spcPts val="800"/>
+              </a:spcAft>
+              <a:buSzPct val="100000"/>
+              <a:buChar char="•"/>
+            </a:pPr>
+            <a:r>
+              <a:rPr lang="en-US" sz="1500" dirty="0">
+                <a:solidFill>
+                  <a:srgbClr val="1E2329"/>
+                </a:solidFill>
+              </a:rPr>
+              <a:t>Real government incident and roadworks APIs for the agent</a:t>
+            </a:r>
+            <a:endParaRPr lang="en-US" sz="1500" dirty="0"/>
+          </a:p>
+          <a:p>
+            <a:pPr marL="342900" indent="-342900">
+              <a:spcAft>
+                <a:spcPts val="800"/>
+              </a:spcAft>
+              <a:buSzPct val="100000"/>
+              <a:buChar char="•"/>
+            </a:pPr>
+            <a:r>
+              <a:rPr lang="en-US" sz="1500" dirty="0">
+                <a:solidFill>
+                  <a:srgbClr val="1E2329"/>
+                </a:solidFill>
+              </a:rPr>
+              <a:t>SMS or app notifications run by the transport office</a:t>
+            </a:r>
+            <a:endParaRPr lang="en-US" sz="1500" dirty="0"/>
+          </a:p>
+          <a:p>
+            <a:pPr marL="342900" indent="-342900">
+              <a:spcAft>
+                <a:spcPts val="800"/>
+              </a:spcAft>
+              <a:buSzPct val="100000"/>
+              <a:buChar char="•"/>
+            </a:pPr>
+            <a:r>
+              <a:rPr lang="en-US" sz="1500" dirty="0">
+                <a:solidFill>
+                  <a:srgbClr val="1E2329"/>
+                </a:solidFill>
+              </a:rPr>
+              <a:t>15-minute data and the campus event calendar</a:t>
+            </a:r>
+            <a:endParaRPr lang="en-US" sz="1500" dirty="0"/>
+          </a:p>
+        </p:txBody>
+      </p:sp>
+      <p:sp>
+        <p:nvSpPr>
+          <p:cNvPr id="25" name="Slide Number Placeholder 0"/>
+          <p:cNvSpPr>
+            <a:spLocks noGrp="1"/>
+          </p:cNvSpPr>
+          <p:nvPr>
+            <p:ph type="sldNum" sz="quarter" idx="4294967295"/>
+          </p:nvPr>
+        </p:nvSpPr>
+        <p:spPr>
+          <a:xfrm>
+            <a:off x="11155680" y="6400800"/>
+            <a:ext cx="548640" cy="274320"/>
+          </a:xfrm>
+          <a:prstGeom prst="rect">
+            <a:avLst/>
+          </a:prstGeom>
+          <a:extLst>
+            <a:ext uri="{C572A759-6A51-4108-AA02-DFA0A04FC94B}">
+              <ma14:wrappingTextBoxFlag xmlns:ma14="http://schemas.microsoft.com/office/mac/drawingml/2011/main" val="0"/>
+            </a:ext>
+          </a:extLst>
+        </p:spPr>
+        <p:txBody>
+          <a:bodyPr/>
+          <a:lstStyle>
+            <a:lvl1pPr>
+              <a:defRPr sz="1000">
+                <a:solidFill>
+                  <a:srgbClr val="6B7280"/>
+                </a:solidFill>
+              </a:defRPr>
+            </a:lvl1pPr>
+          </a:lstStyle>
+          <a:p>
+            <a:pPr algn="r"/>
+            <a:fld id="{F7021451-1387-4CA6-816F-3879F97B5CBC}" type="slidenum">
+              <a:rPr b="0" lang="en-US"/>
+              <a:t>16</a:t>
+            </a:fld>
+            <a:endParaRPr lang="en-US"/>
+          </a:p>
+        </p:txBody>
+      </p:sp>
+    </p:spTree>
+  </p:cSld>
+  <p:clrMapOvr>
+    <a:masterClrMapping/>
+  </p:clrMapOvr>
+</p:sld>
+</file>
+
+<file path=ppt/slides/slide17.xml><?xml version="1.0" encoding="utf-8"?>
+<p:sld xmlns:a="http://schemas.openxmlformats.org/drawingml/2006/main" xmlns:r="http://schemas.openxmlformats.org/officeDocument/2006/relationships" xmlns:p="http://schemas.openxmlformats.org/presentationml/2006/main">
+  <p:cSld name="Slide 17">
     <p:spTree>
       <p:nvGrpSpPr>
         <p:cNvPr id="1" name=""/>
@@ -13492,38 +15456,49 @@
                   <a:srgbClr val="1E2329"/>
                 </a:solidFill>
               </a:rPr>
-              <a:t>On a year it never saw, it beats every simple rule</a:t>
+              <a:t>Agentic AI: ML predicts patterns, the agent handles surprises</a:t>
             </a:r>
             <a:endParaRPr lang="en-US" sz="3200" dirty="0"/>
           </a:p>
         </p:txBody>
       </p:sp>
-      <p:graphicFrame>
-        <p:nvGraphicFramePr>
-          <p:cNvPr id="3" name="Chart 0" descr=""/>
-          <p:cNvGraphicFramePr/>
-          <p:nvPr/>
-        </p:nvGraphicFramePr>
-        <p:xfrm>
-          <a:off x="548640" y="1280160"/>
-          <a:ext cx="6766560" cy="4754880"/>
-        </p:xfrm>
-        <a:graphic xmlns:a="http://schemas.openxmlformats.org/drawingml/2006/main">
-          <a:graphicData uri="http://schemas.openxmlformats.org/drawingml/2006/chart">
-            <c:chart xmlns:c="http://schemas.openxmlformats.org/drawingml/2006/chart" r:id="rId1"/>
-          </a:graphicData>
-        </a:graphic>
-      </p:graphicFrame>
-      <p:sp>
-        <p:nvSpPr>
-          <p:cNvPr id="4" name="Text 1"/>
+      <p:sp>
+        <p:nvSpPr>
+          <p:cNvPr id="3" name="loop-0"/>
+          <p:cNvSpPr/>
+          <p:nvPr/>
+        </p:nvSpPr>
+        <p:spPr>
+          <a:xfrm>
+            <a:off x="548640" y="1325880"/>
+            <a:ext cx="1664208" cy="1097280"/>
+          </a:xfrm>
+          <a:prstGeom prst="roundRect">
+            <a:avLst>
+              <a:gd name="adj" fmla="val 8333"/>
+            </a:avLst>
+          </a:prstGeom>
+          <a:solidFill>
+            <a:srgbClr val="F3F4F6"/>
+          </a:solidFill>
+          <a:ln w="12700">
+            <a:solidFill>
+              <a:srgbClr val="D9DCE1"/>
+            </a:solidFill>
+            <a:prstDash val="solid"/>
+          </a:ln>
+        </p:spPr>
+      </p:sp>
+      <p:sp>
+        <p:nvSpPr>
+          <p:cNvPr id="4" name="Text 2"/>
           <p:cNvSpPr txBox="1"/>
           <p:nvPr/>
         </p:nvSpPr>
         <p:spPr>
           <a:xfrm>
-            <a:off x="7680960" y="1325880"/>
-            <a:ext cx="3931920" cy="594360"/>
+            <a:off x="685800" y="1463040"/>
+            <a:ext cx="1417320" cy="365760"/>
           </a:xfrm>
           <a:prstGeom prst="rect">
             <a:avLst/>
@@ -13539,27 +15514,27 @@
               <a:buNone/>
             </a:pPr>
             <a:r>
-              <a:rPr lang="en-US" sz="3600" b="1" dirty="0">
-                <a:solidFill>
-                  <a:srgbClr val="2A78D6"/>
-                </a:solidFill>
-              </a:rPr>
-              <a:t>0.73</a:t>
-            </a:r>
-            <a:endParaRPr lang="en-US" sz="3600" dirty="0"/>
-          </a:p>
-        </p:txBody>
-      </p:sp>
-      <p:sp>
-        <p:nvSpPr>
-          <p:cNvPr id="5" name="Text 2"/>
+              <a:rPr lang="en-US" sz="1600" b="1" dirty="0">
+                <a:solidFill>
+                  <a:srgbClr val="1E2329"/>
+                </a:solidFill>
+              </a:rPr>
+              <a:t>1. Observe</a:t>
+            </a:r>
+            <a:endParaRPr lang="en-US" sz="1600" dirty="0"/>
+          </a:p>
+        </p:txBody>
+      </p:sp>
+      <p:sp>
+        <p:nvSpPr>
+          <p:cNvPr id="5" name="Text 3"/>
           <p:cNvSpPr txBox="1"/>
           <p:nvPr/>
         </p:nvSpPr>
         <p:spPr>
           <a:xfrm>
-            <a:off x="7680960" y="1920240"/>
-            <a:ext cx="3931920" cy="457200"/>
+            <a:off x="685800" y="1856232"/>
+            <a:ext cx="1417320" cy="502920"/>
           </a:xfrm>
           <a:prstGeom prst="rect">
             <a:avLst/>
@@ -13575,27 +15550,27 @@
               <a:buNone/>
             </a:pPr>
             <a:r>
-              <a:rPr lang="en-US" sz="1400" dirty="0">
+              <a:rPr lang="en-US" sz="1200" dirty="0">
                 <a:solidFill>
                   <a:srgbClr val="4B5563"/>
                 </a:solidFill>
               </a:rPr>
-              <a:t>macro-F1, vs 0.61 for the best simple rule</a:t>
-            </a:r>
-            <a:endParaRPr lang="en-US" sz="1400" dirty="0"/>
-          </a:p>
-        </p:txBody>
-      </p:sp>
-      <p:sp>
-        <p:nvSpPr>
-          <p:cNvPr id="6" name="Text 3"/>
+              <a:t>Read the ML forecast</a:t>
+            </a:r>
+            <a:endParaRPr lang="en-US" sz="1200" dirty="0"/>
+          </a:p>
+        </p:txBody>
+      </p:sp>
+      <p:sp>
+        <p:nvSpPr>
+          <p:cNvPr id="6" name="Text 4"/>
           <p:cNvSpPr txBox="1"/>
           <p:nvPr/>
         </p:nvSpPr>
         <p:spPr>
           <a:xfrm>
-            <a:off x="7680960" y="2514600"/>
-            <a:ext cx="3931920" cy="594360"/>
+            <a:off x="2231136" y="1673352"/>
+            <a:ext cx="201168" cy="365760"/>
           </a:xfrm>
           <a:prstGeom prst="rect">
             <a:avLst/>
@@ -13607,31 +15582,94 @@
           <a:bodyPr wrap="square" lIns="0" tIns="0" rIns="0" bIns="0" rtlCol="0" anchor="t"/>
           <a:lstStyle/>
           <a:p>
+            <a:pPr algn="ctr" indent="0" marL="0">
+              <a:buNone/>
+            </a:pPr>
+            <a:r>
+              <a:rPr lang="en-US" sz="1600" dirty="0">
+                <a:solidFill>
+                  <a:srgbClr val="6B7280"/>
+                </a:solidFill>
+              </a:rPr>
+              <a:t>→</a:t>
+            </a:r>
+            <a:endParaRPr lang="en-US" sz="1600" dirty="0"/>
+          </a:p>
+        </p:txBody>
+      </p:sp>
+      <p:sp>
+        <p:nvSpPr>
+          <p:cNvPr id="7" name="loop-1"/>
+          <p:cNvSpPr/>
+          <p:nvPr/>
+        </p:nvSpPr>
+        <p:spPr>
+          <a:xfrm>
+            <a:off x="2432304" y="1325880"/>
+            <a:ext cx="1664208" cy="1097280"/>
+          </a:xfrm>
+          <a:prstGeom prst="roundRect">
+            <a:avLst>
+              <a:gd name="adj" fmla="val 8333"/>
+            </a:avLst>
+          </a:prstGeom>
+          <a:solidFill>
+            <a:srgbClr val="F3F4F6"/>
+          </a:solidFill>
+          <a:ln w="12700">
+            <a:solidFill>
+              <a:srgbClr val="D9DCE1"/>
+            </a:solidFill>
+            <a:prstDash val="solid"/>
+          </a:ln>
+        </p:spPr>
+      </p:sp>
+      <p:sp>
+        <p:nvSpPr>
+          <p:cNvPr id="8" name="Text 6"/>
+          <p:cNvSpPr txBox="1"/>
+          <p:nvPr/>
+        </p:nvSpPr>
+        <p:spPr>
+          <a:xfrm>
+            <a:off x="2569464" y="1463040"/>
+            <a:ext cx="1417320" cy="365760"/>
+          </a:xfrm>
+          <a:prstGeom prst="rect">
+            <a:avLst/>
+          </a:prstGeom>
+          <a:noFill/>
+          <a:ln/>
+        </p:spPr>
+        <p:txBody>
+          <a:bodyPr wrap="square" lIns="0" tIns="0" rIns="0" bIns="0" rtlCol="0" anchor="t"/>
+          <a:lstStyle/>
+          <a:p>
             <a:pPr indent="0" marL="0">
               <a:buNone/>
             </a:pPr>
             <a:r>
-              <a:rPr lang="en-US" sz="3600" b="1" dirty="0">
-                <a:solidFill>
-                  <a:srgbClr val="D03B3B"/>
-                </a:solidFill>
-              </a:rPr>
-              <a:t>80%</a:t>
-            </a:r>
-            <a:endParaRPr lang="en-US" sz="3600" dirty="0"/>
-          </a:p>
-        </p:txBody>
-      </p:sp>
-      <p:sp>
-        <p:nvSpPr>
-          <p:cNvPr id="7" name="Text 4"/>
+              <a:rPr lang="en-US" sz="1600" b="1" dirty="0">
+                <a:solidFill>
+                  <a:srgbClr val="1E2329"/>
+                </a:solidFill>
+              </a:rPr>
+              <a:t>2. Plan</a:t>
+            </a:r>
+            <a:endParaRPr lang="en-US" sz="1600" dirty="0"/>
+          </a:p>
+        </p:txBody>
+      </p:sp>
+      <p:sp>
+        <p:nvSpPr>
+          <p:cNvPr id="9" name="Text 7"/>
           <p:cNvSpPr txBox="1"/>
           <p:nvPr/>
         </p:nvSpPr>
         <p:spPr>
           <a:xfrm>
-            <a:off x="7680960" y="3108960"/>
-            <a:ext cx="3931920" cy="457200"/>
+            <a:off x="2569464" y="1856232"/>
+            <a:ext cx="1417320" cy="502920"/>
           </a:xfrm>
           <a:prstGeom prst="rect">
             <a:avLst/>
@@ -13647,27 +15685,27 @@
               <a:buNone/>
             </a:pPr>
             <a:r>
-              <a:rPr lang="en-US" sz="1400" dirty="0">
+              <a:rPr lang="en-US" sz="1200" dirty="0">
                 <a:solidFill>
                   <a:srgbClr val="4B5563"/>
                 </a:solidFill>
               </a:rPr>
-              <a:t>of High-congestion hours caught</a:t>
-            </a:r>
-            <a:endParaRPr lang="en-US" sz="1400" dirty="0"/>
-          </a:p>
-        </p:txBody>
-      </p:sp>
-      <p:sp>
-        <p:nvSpPr>
-          <p:cNvPr id="8" name="Text 5"/>
+              <a:t>Pick which feeds to check</a:t>
+            </a:r>
+            <a:endParaRPr lang="en-US" sz="1200" dirty="0"/>
+          </a:p>
+        </p:txBody>
+      </p:sp>
+      <p:sp>
+        <p:nvSpPr>
+          <p:cNvPr id="10" name="Text 8"/>
           <p:cNvSpPr txBox="1"/>
           <p:nvPr/>
         </p:nvSpPr>
         <p:spPr>
           <a:xfrm>
-            <a:off x="7680960" y="3703320"/>
-            <a:ext cx="3931920" cy="594360"/>
+            <a:off x="4114800" y="1673352"/>
+            <a:ext cx="201168" cy="365760"/>
           </a:xfrm>
           <a:prstGeom prst="rect">
             <a:avLst/>
@@ -13679,31 +15717,94 @@
           <a:bodyPr wrap="square" lIns="0" tIns="0" rIns="0" bIns="0" rtlCol="0" anchor="t"/>
           <a:lstStyle/>
           <a:p>
+            <a:pPr algn="ctr" indent="0" marL="0">
+              <a:buNone/>
+            </a:pPr>
+            <a:r>
+              <a:rPr lang="en-US" sz="1600" dirty="0">
+                <a:solidFill>
+                  <a:srgbClr val="6B7280"/>
+                </a:solidFill>
+              </a:rPr>
+              <a:t>→</a:t>
+            </a:r>
+            <a:endParaRPr lang="en-US" sz="1600" dirty="0"/>
+          </a:p>
+        </p:txBody>
+      </p:sp>
+      <p:sp>
+        <p:nvSpPr>
+          <p:cNvPr id="11" name="loop-2"/>
+          <p:cNvSpPr/>
+          <p:nvPr/>
+        </p:nvSpPr>
+        <p:spPr>
+          <a:xfrm>
+            <a:off x="4315968" y="1325880"/>
+            <a:ext cx="1664208" cy="1097280"/>
+          </a:xfrm>
+          <a:prstGeom prst="roundRect">
+            <a:avLst>
+              <a:gd name="adj" fmla="val 8333"/>
+            </a:avLst>
+          </a:prstGeom>
+          <a:solidFill>
+            <a:srgbClr val="F3F4F6"/>
+          </a:solidFill>
+          <a:ln w="12700">
+            <a:solidFill>
+              <a:srgbClr val="D9DCE1"/>
+            </a:solidFill>
+            <a:prstDash val="solid"/>
+          </a:ln>
+        </p:spPr>
+      </p:sp>
+      <p:sp>
+        <p:nvSpPr>
+          <p:cNvPr id="12" name="Text 10"/>
+          <p:cNvSpPr txBox="1"/>
+          <p:nvPr/>
+        </p:nvSpPr>
+        <p:spPr>
+          <a:xfrm>
+            <a:off x="4453128" y="1463040"/>
+            <a:ext cx="1417320" cy="365760"/>
+          </a:xfrm>
+          <a:prstGeom prst="rect">
+            <a:avLst/>
+          </a:prstGeom>
+          <a:noFill/>
+          <a:ln/>
+        </p:spPr>
+        <p:txBody>
+          <a:bodyPr wrap="square" lIns="0" tIns="0" rIns="0" bIns="0" rtlCol="0" anchor="t"/>
+          <a:lstStyle/>
+          <a:p>
             <a:pPr indent="0" marL="0">
               <a:buNone/>
             </a:pPr>
             <a:r>
-              <a:rPr lang="en-US" sz="3600" b="1" dirty="0">
-                <a:solidFill>
-                  <a:srgbClr val="E8A317"/>
-                </a:solidFill>
-              </a:rPr>
-              <a:t>~1</a:t>
-            </a:r>
-            <a:endParaRPr lang="en-US" sz="3600" dirty="0"/>
-          </a:p>
-        </p:txBody>
-      </p:sp>
-      <p:sp>
-        <p:nvSpPr>
-          <p:cNvPr id="9" name="Text 6"/>
+              <a:rPr lang="en-US" sz="1600" b="1" dirty="0">
+                <a:solidFill>
+                  <a:srgbClr val="1E2329"/>
+                </a:solidFill>
+              </a:rPr>
+              <a:t>3. Act</a:t>
+            </a:r>
+            <a:endParaRPr lang="en-US" sz="1600" dirty="0"/>
+          </a:p>
+        </p:txBody>
+      </p:sp>
+      <p:sp>
+        <p:nvSpPr>
+          <p:cNvPr id="13" name="Text 11"/>
           <p:cNvSpPr txBox="1"/>
           <p:nvPr/>
         </p:nvSpPr>
         <p:spPr>
           <a:xfrm>
-            <a:off x="7680960" y="4297680"/>
-            <a:ext cx="3931920" cy="457200"/>
+            <a:off x="4453128" y="1856232"/>
+            <a:ext cx="1417320" cy="502920"/>
           </a:xfrm>
           <a:prstGeom prst="rect">
             <a:avLst/>
@@ -13719,27 +15820,27 @@
               <a:buNone/>
             </a:pPr>
             <a:r>
-              <a:rPr lang="en-US" sz="1400" dirty="0">
+              <a:rPr lang="en-US" sz="1200" dirty="0">
                 <a:solidFill>
                   <a:srgbClr val="4B5563"/>
                 </a:solidFill>
               </a:rPr>
-              <a:t>false alert per week (out of 10 forecasts)</a:t>
-            </a:r>
-            <a:endParaRPr lang="en-US" sz="1400" dirty="0"/>
-          </a:p>
-        </p:txBody>
-      </p:sp>
-      <p:sp>
-        <p:nvSpPr>
-          <p:cNvPr id="10" name="Text 7"/>
+              <a:t>Call the tools</a:t>
+            </a:r>
+            <a:endParaRPr lang="en-US" sz="1200" dirty="0"/>
+          </a:p>
+        </p:txBody>
+      </p:sp>
+      <p:sp>
+        <p:nvSpPr>
+          <p:cNvPr id="14" name="Text 12"/>
           <p:cNvSpPr txBox="1"/>
           <p:nvPr/>
         </p:nvSpPr>
         <p:spPr>
           <a:xfrm>
-            <a:off x="7680960" y="4892040"/>
-            <a:ext cx="3931920" cy="594360"/>
+            <a:off x="5998464" y="1673352"/>
+            <a:ext cx="201168" cy="365760"/>
           </a:xfrm>
           <a:prstGeom prst="rect">
             <a:avLst/>
@@ -13751,31 +15852,94 @@
           <a:bodyPr wrap="square" lIns="0" tIns="0" rIns="0" bIns="0" rtlCol="0" anchor="t"/>
           <a:lstStyle/>
           <a:p>
+            <a:pPr algn="ctr" indent="0" marL="0">
+              <a:buNone/>
+            </a:pPr>
+            <a:r>
+              <a:rPr lang="en-US" sz="1600" dirty="0">
+                <a:solidFill>
+                  <a:srgbClr val="6B7280"/>
+                </a:solidFill>
+              </a:rPr>
+              <a:t>→</a:t>
+            </a:r>
+            <a:endParaRPr lang="en-US" sz="1600" dirty="0"/>
+          </a:p>
+        </p:txBody>
+      </p:sp>
+      <p:sp>
+        <p:nvSpPr>
+          <p:cNvPr id="15" name="loop-3"/>
+          <p:cNvSpPr/>
+          <p:nvPr/>
+        </p:nvSpPr>
+        <p:spPr>
+          <a:xfrm>
+            <a:off x="6199632" y="1325880"/>
+            <a:ext cx="1664208" cy="1097280"/>
+          </a:xfrm>
+          <a:prstGeom prst="roundRect">
+            <a:avLst>
+              <a:gd name="adj" fmla="val 8333"/>
+            </a:avLst>
+          </a:prstGeom>
+          <a:solidFill>
+            <a:srgbClr val="F3F4F6"/>
+          </a:solidFill>
+          <a:ln w="12700">
+            <a:solidFill>
+              <a:srgbClr val="D9DCE1"/>
+            </a:solidFill>
+            <a:prstDash val="solid"/>
+          </a:ln>
+        </p:spPr>
+      </p:sp>
+      <p:sp>
+        <p:nvSpPr>
+          <p:cNvPr id="16" name="Text 14"/>
+          <p:cNvSpPr txBox="1"/>
+          <p:nvPr/>
+        </p:nvSpPr>
+        <p:spPr>
+          <a:xfrm>
+            <a:off x="6336792" y="1463040"/>
+            <a:ext cx="1417320" cy="365760"/>
+          </a:xfrm>
+          <a:prstGeom prst="rect">
+            <a:avLst/>
+          </a:prstGeom>
+          <a:noFill/>
+          <a:ln/>
+        </p:spPr>
+        <p:txBody>
+          <a:bodyPr wrap="square" lIns="0" tIns="0" rIns="0" bIns="0" rtlCol="0" anchor="t"/>
+          <a:lstStyle/>
+          <a:p>
             <a:pPr indent="0" marL="0">
               <a:buNone/>
             </a:pPr>
             <a:r>
-              <a:rPr lang="en-US" sz="3600" b="1" dirty="0">
-                <a:solidFill>
-                  <a:srgbClr val="0CA30C"/>
-                </a:solidFill>
-              </a:rPr>
-              <a:t>0.69</a:t>
-            </a:r>
-            <a:endParaRPr lang="en-US" sz="3600" dirty="0"/>
-          </a:p>
-        </p:txBody>
-      </p:sp>
-      <p:sp>
-        <p:nvSpPr>
-          <p:cNvPr id="11" name="Text 8"/>
+              <a:rPr lang="en-US" sz="1600" b="1" dirty="0">
+                <a:solidFill>
+                  <a:srgbClr val="1E2329"/>
+                </a:solidFill>
+              </a:rPr>
+              <a:t>4. Reason</a:t>
+            </a:r>
+            <a:endParaRPr lang="en-US" sz="1600" dirty="0"/>
+          </a:p>
+        </p:txBody>
+      </p:sp>
+      <p:sp>
+        <p:nvSpPr>
+          <p:cNvPr id="17" name="Text 15"/>
           <p:cNvSpPr txBox="1"/>
           <p:nvPr/>
         </p:nvSpPr>
         <p:spPr>
           <a:xfrm>
-            <a:off x="7680960" y="5486400"/>
-            <a:ext cx="3931920" cy="457200"/>
+            <a:off x="6336792" y="1856232"/>
+            <a:ext cx="1417320" cy="502920"/>
           </a:xfrm>
           <a:prstGeom prst="rect">
             <a:avLst/>
@@ -13791,14 +15955,1069 @@
               <a:buNone/>
             </a:pPr>
             <a:r>
-              <a:rPr lang="en-US" sz="1400" dirty="0">
+              <a:rPr lang="en-US" sz="1200" dirty="0">
                 <a:solidFill>
                   <a:srgbClr val="4B5563"/>
                 </a:solidFill>
               </a:rPr>
-              <a:t>macro-F1 even 2 hours ahead (92% of High caught)</a:t>
-            </a:r>
-            <a:endParaRPr lang="en-US" sz="1400" dirty="0"/>
+              <a:t>On the route? In the time window?</a:t>
+            </a:r>
+            <a:endParaRPr lang="en-US" sz="1200" dirty="0"/>
+          </a:p>
+        </p:txBody>
+      </p:sp>
+      <p:sp>
+        <p:nvSpPr>
+          <p:cNvPr id="18" name="Text 16"/>
+          <p:cNvSpPr txBox="1"/>
+          <p:nvPr/>
+        </p:nvSpPr>
+        <p:spPr>
+          <a:xfrm>
+            <a:off x="7882128" y="1673352"/>
+            <a:ext cx="201168" cy="365760"/>
+          </a:xfrm>
+          <a:prstGeom prst="rect">
+            <a:avLst/>
+          </a:prstGeom>
+          <a:noFill/>
+          <a:ln/>
+        </p:spPr>
+        <p:txBody>
+          <a:bodyPr wrap="square" lIns="0" tIns="0" rIns="0" bIns="0" rtlCol="0" anchor="t"/>
+          <a:lstStyle/>
+          <a:p>
+            <a:pPr algn="ctr" indent="0" marL="0">
+              <a:buNone/>
+            </a:pPr>
+            <a:r>
+              <a:rPr lang="en-US" sz="1600" dirty="0">
+                <a:solidFill>
+                  <a:srgbClr val="6B7280"/>
+                </a:solidFill>
+              </a:rPr>
+              <a:t>→</a:t>
+            </a:r>
+            <a:endParaRPr lang="en-US" sz="1600" dirty="0"/>
+          </a:p>
+        </p:txBody>
+      </p:sp>
+      <p:sp>
+        <p:nvSpPr>
+          <p:cNvPr id="19" name="loop-4"/>
+          <p:cNvSpPr/>
+          <p:nvPr/>
+        </p:nvSpPr>
+        <p:spPr>
+          <a:xfrm>
+            <a:off x="8083296" y="1325880"/>
+            <a:ext cx="1664208" cy="1097280"/>
+          </a:xfrm>
+          <a:prstGeom prst="roundRect">
+            <a:avLst>
+              <a:gd name="adj" fmla="val 8333"/>
+            </a:avLst>
+          </a:prstGeom>
+          <a:solidFill>
+            <a:srgbClr val="F3F4F6"/>
+          </a:solidFill>
+          <a:ln w="12700">
+            <a:solidFill>
+              <a:srgbClr val="D9DCE1"/>
+            </a:solidFill>
+            <a:prstDash val="solid"/>
+          </a:ln>
+        </p:spPr>
+      </p:sp>
+      <p:sp>
+        <p:nvSpPr>
+          <p:cNvPr id="20" name="Text 18"/>
+          <p:cNvSpPr txBox="1"/>
+          <p:nvPr/>
+        </p:nvSpPr>
+        <p:spPr>
+          <a:xfrm>
+            <a:off x="8220456" y="1463040"/>
+            <a:ext cx="1417320" cy="365760"/>
+          </a:xfrm>
+          <a:prstGeom prst="rect">
+            <a:avLst/>
+          </a:prstGeom>
+          <a:noFill/>
+          <a:ln/>
+        </p:spPr>
+        <p:txBody>
+          <a:bodyPr wrap="square" lIns="0" tIns="0" rIns="0" bIns="0" rtlCol="0" anchor="t"/>
+          <a:lstStyle/>
+          <a:p>
+            <a:pPr indent="0" marL="0">
+              <a:buNone/>
+            </a:pPr>
+            <a:r>
+              <a:rPr lang="en-US" sz="1600" b="1" dirty="0">
+                <a:solidFill>
+                  <a:srgbClr val="1E2329"/>
+                </a:solidFill>
+              </a:rPr>
+              <a:t>5. Reflect</a:t>
+            </a:r>
+            <a:endParaRPr lang="en-US" sz="1600" dirty="0"/>
+          </a:p>
+        </p:txBody>
+      </p:sp>
+      <p:sp>
+        <p:nvSpPr>
+          <p:cNvPr id="21" name="Text 19"/>
+          <p:cNvSpPr txBox="1"/>
+          <p:nvPr/>
+        </p:nvSpPr>
+        <p:spPr>
+          <a:xfrm>
+            <a:off x="8220456" y="1856232"/>
+            <a:ext cx="1417320" cy="502920"/>
+          </a:xfrm>
+          <a:prstGeom prst="rect">
+            <a:avLst/>
+          </a:prstGeom>
+          <a:noFill/>
+          <a:ln/>
+        </p:spPr>
+        <p:txBody>
+          <a:bodyPr wrap="square" lIns="0" tIns="0" rIns="0" bIns="0" rtlCol="0" anchor="t"/>
+          <a:lstStyle/>
+          <a:p>
+            <a:pPr indent="0" marL="0">
+              <a:buNone/>
+            </a:pPr>
+            <a:r>
+              <a:rPr lang="en-US" sz="1200" dirty="0">
+                <a:solidFill>
+                  <a:srgbClr val="4B5563"/>
+                </a:solidFill>
+              </a:rPr>
+              <a:t>Do sources agree?</a:t>
+            </a:r>
+            <a:endParaRPr lang="en-US" sz="1200" dirty="0"/>
+          </a:p>
+        </p:txBody>
+      </p:sp>
+      <p:sp>
+        <p:nvSpPr>
+          <p:cNvPr id="22" name="Text 20"/>
+          <p:cNvSpPr txBox="1"/>
+          <p:nvPr/>
+        </p:nvSpPr>
+        <p:spPr>
+          <a:xfrm>
+            <a:off x="9765792" y="1673352"/>
+            <a:ext cx="201168" cy="365760"/>
+          </a:xfrm>
+          <a:prstGeom prst="rect">
+            <a:avLst/>
+          </a:prstGeom>
+          <a:noFill/>
+          <a:ln/>
+        </p:spPr>
+        <p:txBody>
+          <a:bodyPr wrap="square" lIns="0" tIns="0" rIns="0" bIns="0" rtlCol="0" anchor="t"/>
+          <a:lstStyle/>
+          <a:p>
+            <a:pPr algn="ctr" indent="0" marL="0">
+              <a:buNone/>
+            </a:pPr>
+            <a:r>
+              <a:rPr lang="en-US" sz="1600" dirty="0">
+                <a:solidFill>
+                  <a:srgbClr val="6B7280"/>
+                </a:solidFill>
+              </a:rPr>
+              <a:t>→</a:t>
+            </a:r>
+            <a:endParaRPr lang="en-US" sz="1600" dirty="0"/>
+          </a:p>
+        </p:txBody>
+      </p:sp>
+      <p:sp>
+        <p:nvSpPr>
+          <p:cNvPr id="23" name="loop-5"/>
+          <p:cNvSpPr/>
+          <p:nvPr/>
+        </p:nvSpPr>
+        <p:spPr>
+          <a:xfrm>
+            <a:off x="9966960" y="1325880"/>
+            <a:ext cx="1664208" cy="1097280"/>
+          </a:xfrm>
+          <a:prstGeom prst="roundRect">
+            <a:avLst>
+              <a:gd name="adj" fmla="val 8333"/>
+            </a:avLst>
+          </a:prstGeom>
+          <a:solidFill>
+            <a:srgbClr val="2A78D6"/>
+          </a:solidFill>
+          <a:ln w="12700">
+            <a:solidFill>
+              <a:srgbClr val="2A78D6"/>
+            </a:solidFill>
+            <a:prstDash val="solid"/>
+          </a:ln>
+        </p:spPr>
+      </p:sp>
+      <p:sp>
+        <p:nvSpPr>
+          <p:cNvPr id="24" name="Text 22"/>
+          <p:cNvSpPr txBox="1"/>
+          <p:nvPr/>
+        </p:nvSpPr>
+        <p:spPr>
+          <a:xfrm>
+            <a:off x="10104120" y="1463040"/>
+            <a:ext cx="1417320" cy="365760"/>
+          </a:xfrm>
+          <a:prstGeom prst="rect">
+            <a:avLst/>
+          </a:prstGeom>
+          <a:noFill/>
+          <a:ln/>
+        </p:spPr>
+        <p:txBody>
+          <a:bodyPr wrap="square" lIns="0" tIns="0" rIns="0" bIns="0" rtlCol="0" anchor="t"/>
+          <a:lstStyle/>
+          <a:p>
+            <a:pPr indent="0" marL="0">
+              <a:buNone/>
+            </a:pPr>
+            <a:r>
+              <a:rPr lang="en-US" sz="1600" b="1" dirty="0">
+                <a:solidFill>
+                  <a:srgbClr val="FFFFFF"/>
+                </a:solidFill>
+              </a:rPr>
+              <a:t>6. Decide</a:t>
+            </a:r>
+            <a:endParaRPr lang="en-US" sz="1600" dirty="0"/>
+          </a:p>
+        </p:txBody>
+      </p:sp>
+      <p:sp>
+        <p:nvSpPr>
+          <p:cNvPr id="25" name="Text 23"/>
+          <p:cNvSpPr txBox="1"/>
+          <p:nvPr/>
+        </p:nvSpPr>
+        <p:spPr>
+          <a:xfrm>
+            <a:off x="10104120" y="1856232"/>
+            <a:ext cx="1417320" cy="502920"/>
+          </a:xfrm>
+          <a:prstGeom prst="rect">
+            <a:avLst/>
+          </a:prstGeom>
+          <a:noFill/>
+          <a:ln/>
+        </p:spPr>
+        <p:txBody>
+          <a:bodyPr wrap="square" lIns="0" tIns="0" rIns="0" bIns="0" rtlCol="0" anchor="t"/>
+          <a:lstStyle/>
+          <a:p>
+            <a:pPr indent="0" marL="0">
+              <a:buNone/>
+            </a:pPr>
+            <a:r>
+              <a:rPr lang="en-US" sz="1200" dirty="0">
+                <a:solidFill>
+                  <a:srgbClr val="E5E7EB"/>
+                </a:solidFill>
+              </a:rPr>
+              <a:t>Keep or override the alert</a:t>
+            </a:r>
+            <a:endParaRPr lang="en-US" sz="1200" dirty="0"/>
+          </a:p>
+        </p:txBody>
+      </p:sp>
+      <p:sp>
+        <p:nvSpPr>
+          <p:cNvPr id="26" name="Text 24"/>
+          <p:cNvSpPr txBox="1"/>
+          <p:nvPr/>
+        </p:nvSpPr>
+        <p:spPr>
+          <a:xfrm>
+            <a:off x="9052560" y="2487168"/>
+            <a:ext cx="2560320" cy="274320"/>
+          </a:xfrm>
+          <a:prstGeom prst="rect">
+            <a:avLst/>
+          </a:prstGeom>
+          <a:noFill/>
+          <a:ln/>
+        </p:spPr>
+        <p:txBody>
+          <a:bodyPr wrap="square" lIns="0" tIns="0" rIns="0" bIns="0" rtlCol="0" anchor="t"/>
+          <a:lstStyle/>
+          <a:p>
+            <a:pPr algn="r" indent="0" marL="0">
+              <a:buNone/>
+            </a:pPr>
+            <a:r>
+              <a:rPr lang="en-US" sz="1200" i="1" dirty="0">
+                <a:solidFill>
+                  <a:srgbClr val="6B7280"/>
+                </a:solidFill>
+              </a:rPr>
+              <a:t>↻ repeats until it can decide</a:t>
+            </a:r>
+            <a:endParaRPr lang="en-US" sz="1200" dirty="0"/>
+          </a:p>
+        </p:txBody>
+      </p:sp>
+      <p:sp>
+        <p:nvSpPr>
+          <p:cNvPr id="27" name="card"/>
+          <p:cNvSpPr/>
+          <p:nvPr/>
+        </p:nvSpPr>
+        <p:spPr>
+          <a:xfrm>
+            <a:off x="548640" y="2880360"/>
+            <a:ext cx="2468880" cy="1920240"/>
+          </a:xfrm>
+          <a:prstGeom prst="roundRect">
+            <a:avLst>
+              <a:gd name="adj" fmla="val 5714"/>
+            </a:avLst>
+          </a:prstGeom>
+          <a:solidFill>
+            <a:srgbClr val="F3F4F6"/>
+          </a:solidFill>
+          <a:ln w="12700">
+            <a:solidFill>
+              <a:srgbClr val="F3F4F6"/>
+            </a:solidFill>
+            <a:prstDash val="solid"/>
+          </a:ln>
+        </p:spPr>
+      </p:sp>
+      <p:sp>
+        <p:nvSpPr>
+          <p:cNvPr id="28" name="icon-circle"/>
+          <p:cNvSpPr/>
+          <p:nvPr/>
+        </p:nvSpPr>
+        <p:spPr>
+          <a:xfrm>
+            <a:off x="777240" y="3063240"/>
+            <a:ext cx="502920" cy="502920"/>
+          </a:xfrm>
+          <a:prstGeom prst="ellipse">
+            <a:avLst/>
+          </a:prstGeom>
+          <a:solidFill>
+            <a:srgbClr val="D03B3B"/>
+          </a:solidFill>
+          <a:ln w="12700">
+            <a:solidFill>
+              <a:srgbClr val="D03B3B"/>
+            </a:solidFill>
+            <a:prstDash val="solid"/>
+          </a:ln>
+        </p:spPr>
+      </p:sp>
+      <p:pic>
+        <p:nvPicPr>
+          <p:cNvPr id="29" name="icon" descr="preencoded.png">    </p:cNvPr>
+          <p:cNvPicPr>
+            <a:picLocks noChangeAspect="1"/>
+          </p:cNvPicPr>
+          <p:nvPr/>
+        </p:nvPicPr>
+        <p:blipFill>
+          <a:blip r:embed="rId1"/>
+          <a:stretch>
+            <a:fillRect/>
+          </a:stretch>
+        </p:blipFill>
+        <p:spPr>
+          <a:xfrm>
+            <a:off x="887882" y="3173882"/>
+            <a:ext cx="281635" cy="281635"/>
+          </a:xfrm>
+          <a:prstGeom prst="rect">
+            <a:avLst/>
+          </a:prstGeom>
+        </p:spPr>
+      </p:pic>
+      <p:sp>
+        <p:nvSpPr>
+          <p:cNvPr id="30" name="Text 27"/>
+          <p:cNvSpPr txBox="1"/>
+          <p:nvPr/>
+        </p:nvSpPr>
+        <p:spPr>
+          <a:xfrm>
+            <a:off x="777240" y="3657600"/>
+            <a:ext cx="2057400" cy="320040"/>
+          </a:xfrm>
+          <a:prstGeom prst="rect">
+            <a:avLst/>
+          </a:prstGeom>
+          <a:noFill/>
+          <a:ln/>
+        </p:spPr>
+        <p:txBody>
+          <a:bodyPr wrap="square" lIns="0" tIns="0" rIns="0" bIns="0" rtlCol="0" anchor="t"/>
+          <a:lstStyle/>
+          <a:p>
+            <a:pPr indent="0" marL="0">
+              <a:buNone/>
+            </a:pPr>
+            <a:r>
+              <a:rPr lang="en-US" sz="1500" b="1" dirty="0">
+                <a:solidFill>
+                  <a:srgbClr val="1E2329"/>
+                </a:solidFill>
+              </a:rPr>
+              <a:t>Govt incident feed</a:t>
+            </a:r>
+            <a:endParaRPr lang="en-US" sz="1500" dirty="0"/>
+          </a:p>
+        </p:txBody>
+      </p:sp>
+      <p:sp>
+        <p:nvSpPr>
+          <p:cNvPr id="31" name="Text 28"/>
+          <p:cNvSpPr txBox="1"/>
+          <p:nvPr/>
+        </p:nvSpPr>
+        <p:spPr>
+          <a:xfrm>
+            <a:off x="777240" y="4005072"/>
+            <a:ext cx="2057400" cy="731520"/>
+          </a:xfrm>
+          <a:prstGeom prst="rect">
+            <a:avLst/>
+          </a:prstGeom>
+          <a:noFill/>
+          <a:ln/>
+        </p:spPr>
+        <p:txBody>
+          <a:bodyPr wrap="square" lIns="0" tIns="0" rIns="0" bIns="0" rtlCol="0" anchor="t"/>
+          <a:lstStyle/>
+          <a:p>
+            <a:pPr indent="0" marL="0">
+              <a:buNone/>
+            </a:pPr>
+            <a:r>
+              <a:rPr lang="en-US" sz="1200" dirty="0">
+                <a:solidFill>
+                  <a:srgbClr val="4B5563"/>
+                </a:solidFill>
+              </a:rPr>
+              <a:t>Crashes, breakdowns and closures from the traffic police / transport department</a:t>
+            </a:r>
+            <a:endParaRPr lang="en-US" sz="1200" dirty="0"/>
+          </a:p>
+        </p:txBody>
+      </p:sp>
+      <p:sp>
+        <p:nvSpPr>
+          <p:cNvPr id="32" name="card"/>
+          <p:cNvSpPr/>
+          <p:nvPr/>
+        </p:nvSpPr>
+        <p:spPr>
+          <a:xfrm>
+            <a:off x="3154680" y="2880360"/>
+            <a:ext cx="2468880" cy="1920240"/>
+          </a:xfrm>
+          <a:prstGeom prst="roundRect">
+            <a:avLst>
+              <a:gd name="adj" fmla="val 5714"/>
+            </a:avLst>
+          </a:prstGeom>
+          <a:solidFill>
+            <a:srgbClr val="F3F4F6"/>
+          </a:solidFill>
+          <a:ln w="12700">
+            <a:solidFill>
+              <a:srgbClr val="F3F4F6"/>
+            </a:solidFill>
+            <a:prstDash val="solid"/>
+          </a:ln>
+        </p:spPr>
+      </p:sp>
+      <p:sp>
+        <p:nvSpPr>
+          <p:cNvPr id="33" name="icon-circle"/>
+          <p:cNvSpPr/>
+          <p:nvPr/>
+        </p:nvSpPr>
+        <p:spPr>
+          <a:xfrm>
+            <a:off x="3383280" y="3063240"/>
+            <a:ext cx="502920" cy="502920"/>
+          </a:xfrm>
+          <a:prstGeom prst="ellipse">
+            <a:avLst/>
+          </a:prstGeom>
+          <a:solidFill>
+            <a:srgbClr val="E8A317"/>
+          </a:solidFill>
+          <a:ln w="12700">
+            <a:solidFill>
+              <a:srgbClr val="E8A317"/>
+            </a:solidFill>
+            <a:prstDash val="solid"/>
+          </a:ln>
+        </p:spPr>
+      </p:sp>
+      <p:pic>
+        <p:nvPicPr>
+          <p:cNvPr id="34" name="icon" descr="preencoded.png">    </p:cNvPr>
+          <p:cNvPicPr>
+            <a:picLocks noChangeAspect="1"/>
+          </p:cNvPicPr>
+          <p:nvPr/>
+        </p:nvPicPr>
+        <p:blipFill>
+          <a:blip r:embed="rId2"/>
+          <a:stretch>
+            <a:fillRect/>
+          </a:stretch>
+        </p:blipFill>
+        <p:spPr>
+          <a:xfrm>
+            <a:off x="3493922" y="3173882"/>
+            <a:ext cx="281635" cy="281635"/>
+          </a:xfrm>
+          <a:prstGeom prst="rect">
+            <a:avLst/>
+          </a:prstGeom>
+        </p:spPr>
+      </p:pic>
+      <p:sp>
+        <p:nvSpPr>
+          <p:cNvPr id="35" name="Text 31"/>
+          <p:cNvSpPr txBox="1"/>
+          <p:nvPr/>
+        </p:nvSpPr>
+        <p:spPr>
+          <a:xfrm>
+            <a:off x="3383280" y="3657600"/>
+            <a:ext cx="2057400" cy="320040"/>
+          </a:xfrm>
+          <a:prstGeom prst="rect">
+            <a:avLst/>
+          </a:prstGeom>
+          <a:noFill/>
+          <a:ln/>
+        </p:spPr>
+        <p:txBody>
+          <a:bodyPr wrap="square" lIns="0" tIns="0" rIns="0" bIns="0" rtlCol="0" anchor="t"/>
+          <a:lstStyle/>
+          <a:p>
+            <a:pPr indent="0" marL="0">
+              <a:buNone/>
+            </a:pPr>
+            <a:r>
+              <a:rPr lang="en-US" sz="1500" b="1" dirty="0">
+                <a:solidFill>
+                  <a:srgbClr val="1E2329"/>
+                </a:solidFill>
+              </a:rPr>
+              <a:t>Govt roadworks permits</a:t>
+            </a:r>
+            <a:endParaRPr lang="en-US" sz="1500" dirty="0"/>
+          </a:p>
+        </p:txBody>
+      </p:sp>
+      <p:sp>
+        <p:nvSpPr>
+          <p:cNvPr id="36" name="Text 32"/>
+          <p:cNvSpPr txBox="1"/>
+          <p:nvPr/>
+        </p:nvSpPr>
+        <p:spPr>
+          <a:xfrm>
+            <a:off x="3383280" y="4005072"/>
+            <a:ext cx="2057400" cy="731520"/>
+          </a:xfrm>
+          <a:prstGeom prst="rect">
+            <a:avLst/>
+          </a:prstGeom>
+          <a:noFill/>
+          <a:ln/>
+        </p:spPr>
+        <p:txBody>
+          <a:bodyPr wrap="square" lIns="0" tIns="0" rIns="0" bIns="0" rtlCol="0" anchor="t"/>
+          <a:lstStyle/>
+          <a:p>
+            <a:pPr indent="0" marL="0">
+              <a:buNone/>
+            </a:pPr>
+            <a:r>
+              <a:rPr lang="en-US" sz="1200" dirty="0">
+                <a:solidFill>
+                  <a:srgbClr val="4B5563"/>
+                </a:solidFill>
+              </a:rPr>
+              <a:t>Construction and lane closures from public-works permits</a:t>
+            </a:r>
+            <a:endParaRPr lang="en-US" sz="1200" dirty="0"/>
+          </a:p>
+        </p:txBody>
+      </p:sp>
+      <p:sp>
+        <p:nvSpPr>
+          <p:cNvPr id="37" name="card"/>
+          <p:cNvSpPr/>
+          <p:nvPr/>
+        </p:nvSpPr>
+        <p:spPr>
+          <a:xfrm>
+            <a:off x="5760720" y="2880360"/>
+            <a:ext cx="2468880" cy="1920240"/>
+          </a:xfrm>
+          <a:prstGeom prst="roundRect">
+            <a:avLst>
+              <a:gd name="adj" fmla="val 5714"/>
+            </a:avLst>
+          </a:prstGeom>
+          <a:solidFill>
+            <a:srgbClr val="F3F4F6"/>
+          </a:solidFill>
+          <a:ln w="12700">
+            <a:solidFill>
+              <a:srgbClr val="F3F4F6"/>
+            </a:solidFill>
+            <a:prstDash val="solid"/>
+          </a:ln>
+        </p:spPr>
+      </p:sp>
+      <p:sp>
+        <p:nvSpPr>
+          <p:cNvPr id="38" name="icon-circle"/>
+          <p:cNvSpPr/>
+          <p:nvPr/>
+        </p:nvSpPr>
+        <p:spPr>
+          <a:xfrm>
+            <a:off x="5989320" y="3063240"/>
+            <a:ext cx="502920" cy="502920"/>
+          </a:xfrm>
+          <a:prstGeom prst="ellipse">
+            <a:avLst/>
+          </a:prstGeom>
+          <a:solidFill>
+            <a:srgbClr val="2A78D6"/>
+          </a:solidFill>
+          <a:ln w="12700">
+            <a:solidFill>
+              <a:srgbClr val="2A78D6"/>
+            </a:solidFill>
+            <a:prstDash val="solid"/>
+          </a:ln>
+        </p:spPr>
+      </p:sp>
+      <p:pic>
+        <p:nvPicPr>
+          <p:cNvPr id="39" name="icon" descr="preencoded.png">    </p:cNvPr>
+          <p:cNvPicPr>
+            <a:picLocks noChangeAspect="1"/>
+          </p:cNvPicPr>
+          <p:nvPr/>
+        </p:nvPicPr>
+        <p:blipFill>
+          <a:blip r:embed="rId3"/>
+          <a:stretch>
+            <a:fillRect/>
+          </a:stretch>
+        </p:blipFill>
+        <p:spPr>
+          <a:xfrm>
+            <a:off x="6099962" y="3173882"/>
+            <a:ext cx="281635" cy="281635"/>
+          </a:xfrm>
+          <a:prstGeom prst="rect">
+            <a:avLst/>
+          </a:prstGeom>
+        </p:spPr>
+      </p:pic>
+      <p:sp>
+        <p:nvSpPr>
+          <p:cNvPr id="40" name="Text 35"/>
+          <p:cNvSpPr txBox="1"/>
+          <p:nvPr/>
+        </p:nvSpPr>
+        <p:spPr>
+          <a:xfrm>
+            <a:off x="5989320" y="3657600"/>
+            <a:ext cx="2057400" cy="320040"/>
+          </a:xfrm>
+          <a:prstGeom prst="rect">
+            <a:avLst/>
+          </a:prstGeom>
+          <a:noFill/>
+          <a:ln/>
+        </p:spPr>
+        <p:txBody>
+          <a:bodyPr wrap="square" lIns="0" tIns="0" rIns="0" bIns="0" rtlCol="0" anchor="t"/>
+          <a:lstStyle/>
+          <a:p>
+            <a:pPr indent="0" marL="0">
+              <a:buNone/>
+            </a:pPr>
+            <a:r>
+              <a:rPr lang="en-US" sz="1500" b="1" dirty="0">
+                <a:solidFill>
+                  <a:srgbClr val="1E2329"/>
+                </a:solidFill>
+              </a:rPr>
+              <a:t>News stations</a:t>
+            </a:r>
+            <a:endParaRPr lang="en-US" sz="1500" dirty="0"/>
+          </a:p>
+        </p:txBody>
+      </p:sp>
+      <p:sp>
+        <p:nvSpPr>
+          <p:cNvPr id="41" name="Text 36"/>
+          <p:cNvSpPr txBox="1"/>
+          <p:nvPr/>
+        </p:nvSpPr>
+        <p:spPr>
+          <a:xfrm>
+            <a:off x="5989320" y="4005072"/>
+            <a:ext cx="2057400" cy="731520"/>
+          </a:xfrm>
+          <a:prstGeom prst="rect">
+            <a:avLst/>
+          </a:prstGeom>
+          <a:noFill/>
+          <a:ln/>
+        </p:spPr>
+        <p:txBody>
+          <a:bodyPr wrap="square" lIns="0" tIns="0" rIns="0" bIns="0" rtlCol="0" anchor="t"/>
+          <a:lstStyle/>
+          <a:p>
+            <a:pPr indent="0" marL="0">
+              <a:buNone/>
+            </a:pPr>
+            <a:r>
+              <a:rPr lang="en-US" sz="1200" dirty="0">
+                <a:solidFill>
+                  <a:srgbClr val="4B5563"/>
+                </a:solidFill>
+              </a:rPr>
+              <a:t>Local news reports to cross-check. Live mode adds real web search</a:t>
+            </a:r>
+            <a:endParaRPr lang="en-US" sz="1200" dirty="0"/>
+          </a:p>
+        </p:txBody>
+      </p:sp>
+      <p:sp>
+        <p:nvSpPr>
+          <p:cNvPr id="42" name="card"/>
+          <p:cNvSpPr/>
+          <p:nvPr/>
+        </p:nvSpPr>
+        <p:spPr>
+          <a:xfrm>
+            <a:off x="548640" y="4937760"/>
+            <a:ext cx="7543800" cy="1097280"/>
+          </a:xfrm>
+          <a:prstGeom prst="roundRect">
+            <a:avLst>
+              <a:gd name="adj" fmla="val 10000"/>
+            </a:avLst>
+          </a:prstGeom>
+          <a:solidFill>
+            <a:srgbClr val="EEF4FC"/>
+          </a:solidFill>
+          <a:ln w="12700">
+            <a:solidFill>
+              <a:srgbClr val="EEF4FC"/>
+            </a:solidFill>
+            <a:prstDash val="solid"/>
+          </a:ln>
+        </p:spPr>
+      </p:sp>
+      <p:sp>
+        <p:nvSpPr>
+          <p:cNvPr id="43" name="icon-circle"/>
+          <p:cNvSpPr/>
+          <p:nvPr/>
+        </p:nvSpPr>
+        <p:spPr>
+          <a:xfrm>
+            <a:off x="777240" y="5138928"/>
+            <a:ext cx="502920" cy="502920"/>
+          </a:xfrm>
+          <a:prstGeom prst="ellipse">
+            <a:avLst/>
+          </a:prstGeom>
+          <a:solidFill>
+            <a:srgbClr val="2A78D6"/>
+          </a:solidFill>
+          <a:ln w="12700">
+            <a:solidFill>
+              <a:srgbClr val="2A78D6"/>
+            </a:solidFill>
+            <a:prstDash val="solid"/>
+          </a:ln>
+        </p:spPr>
+      </p:sp>
+      <p:pic>
+        <p:nvPicPr>
+          <p:cNvPr id="44" name="icon" descr="preencoded.png">    </p:cNvPr>
+          <p:cNvPicPr>
+            <a:picLocks noChangeAspect="1"/>
+          </p:cNvPicPr>
+          <p:nvPr/>
+        </p:nvPicPr>
+        <p:blipFill>
+          <a:blip r:embed="rId4"/>
+          <a:stretch>
+            <a:fillRect/>
+          </a:stretch>
+        </p:blipFill>
+        <p:spPr>
+          <a:xfrm>
+            <a:off x="887882" y="5249570"/>
+            <a:ext cx="281635" cy="281635"/>
+          </a:xfrm>
+          <a:prstGeom prst="rect">
+            <a:avLst/>
+          </a:prstGeom>
+        </p:spPr>
+      </p:pic>
+      <p:sp>
+        <p:nvSpPr>
+          <p:cNvPr id="45" name="Text 39"/>
+          <p:cNvSpPr txBox="1"/>
+          <p:nvPr/>
+        </p:nvSpPr>
+        <p:spPr>
+          <a:xfrm>
+            <a:off x="1463040" y="5074920"/>
+            <a:ext cx="6400800" cy="320040"/>
+          </a:xfrm>
+          <a:prstGeom prst="rect">
+            <a:avLst/>
+          </a:prstGeom>
+          <a:noFill/>
+          <a:ln/>
+        </p:spPr>
+        <p:txBody>
+          <a:bodyPr wrap="square" lIns="0" tIns="0" rIns="0" bIns="0" rtlCol="0" anchor="t"/>
+          <a:lstStyle/>
+          <a:p>
+            <a:pPr indent="0" marL="0">
+              <a:buNone/>
+            </a:pPr>
+            <a:r>
+              <a:rPr lang="en-US" sz="1500" b="1" dirty="0">
+                <a:solidFill>
+                  <a:srgbClr val="1E2329"/>
+                </a:solidFill>
+              </a:rPr>
+              <a:t>Two engines, same tools</a:t>
+            </a:r>
+            <a:endParaRPr lang="en-US" sz="1500" dirty="0"/>
+          </a:p>
+        </p:txBody>
+      </p:sp>
+      <p:sp>
+        <p:nvSpPr>
+          <p:cNvPr id="46" name="Text 40"/>
+          <p:cNvSpPr txBox="1"/>
+          <p:nvPr/>
+        </p:nvSpPr>
+        <p:spPr>
+          <a:xfrm>
+            <a:off x="1463040" y="5413248"/>
+            <a:ext cx="6492240" cy="548640"/>
+          </a:xfrm>
+          <a:prstGeom prst="rect">
+            <a:avLst/>
+          </a:prstGeom>
+          <a:noFill/>
+          <a:ln/>
+        </p:spPr>
+        <p:txBody>
+          <a:bodyPr wrap="square" lIns="0" tIns="0" rIns="0" bIns="0" rtlCol="0" anchor="t"/>
+          <a:lstStyle/>
+          <a:p>
+            <a:pPr indent="0" marL="0">
+              <a:buNone/>
+            </a:pPr>
+            <a:r>
+              <a:rPr lang="en-US" sz="1250" dirty="0">
+                <a:solidFill>
+                  <a:srgbClr val="4B5563"/>
+                </a:solidFill>
+              </a:rPr>
+              <a:t>Built-in agent: runs offline, no key. Claude agent: claude-opus-5-5 drives the tool loop and can search live news. The ML model is not changed.</a:t>
+            </a:r>
+            <a:endParaRPr lang="en-US" sz="1250" dirty="0"/>
+          </a:p>
+        </p:txBody>
+      </p:sp>
+      <p:sp>
+        <p:nvSpPr>
+          <p:cNvPr id="47" name="card"/>
+          <p:cNvSpPr/>
+          <p:nvPr/>
+        </p:nvSpPr>
+        <p:spPr>
+          <a:xfrm>
+            <a:off x="8321040" y="2880360"/>
+            <a:ext cx="3291840" cy="3154680"/>
+          </a:xfrm>
+          <a:prstGeom prst="roundRect">
+            <a:avLst>
+              <a:gd name="adj" fmla="val 3478"/>
+            </a:avLst>
+          </a:prstGeom>
+          <a:solidFill>
+            <a:srgbClr val="1E2329"/>
+          </a:solidFill>
+          <a:ln w="12700">
+            <a:solidFill>
+              <a:srgbClr val="1E2329"/>
+            </a:solidFill>
+            <a:prstDash val="solid"/>
+          </a:ln>
+        </p:spPr>
+      </p:sp>
+      <p:sp>
+        <p:nvSpPr>
+          <p:cNvPr id="48" name="Text 42"/>
+          <p:cNvSpPr txBox="1"/>
+          <p:nvPr/>
+        </p:nvSpPr>
+        <p:spPr>
+          <a:xfrm>
+            <a:off x="8595360" y="3063240"/>
+            <a:ext cx="2834640" cy="365760"/>
+          </a:xfrm>
+          <a:prstGeom prst="rect">
+            <a:avLst/>
+          </a:prstGeom>
+          <a:noFill/>
+          <a:ln/>
+        </p:spPr>
+        <p:txBody>
+          <a:bodyPr wrap="square" lIns="0" tIns="0" rIns="0" bIns="0" rtlCol="0" anchor="t"/>
+          <a:lstStyle/>
+          <a:p>
+            <a:pPr indent="0" marL="0">
+              <a:buNone/>
+            </a:pPr>
+            <a:r>
+              <a:rPr lang="en-US" sz="1700" b="1" dirty="0">
+                <a:solidFill>
+                  <a:srgbClr val="FFFFFF"/>
+                </a:solidFill>
+              </a:rPr>
+              <a:t>Decision rules</a:t>
+            </a:r>
+            <a:endParaRPr lang="en-US" sz="1700" dirty="0"/>
+          </a:p>
+        </p:txBody>
+      </p:sp>
+      <p:sp>
+        <p:nvSpPr>
+          <p:cNvPr id="49" name="Text 43"/>
+          <p:cNvSpPr txBox="1"/>
+          <p:nvPr/>
+        </p:nvSpPr>
+        <p:spPr>
+          <a:xfrm>
+            <a:off x="8595360" y="3520440"/>
+            <a:ext cx="2834640" cy="2377440"/>
+          </a:xfrm>
+          <a:prstGeom prst="rect">
+            <a:avLst/>
+          </a:prstGeom>
+          <a:noFill/>
+          <a:ln/>
+        </p:spPr>
+        <p:txBody>
+          <a:bodyPr wrap="square" lIns="0" tIns="0" rIns="0" bIns="0" rtlCol="0" anchor="t"/>
+          <a:lstStyle/>
+          <a:p>
+            <a:pPr marL="342900" indent="-342900">
+              <a:spcAft>
+                <a:spcPts val="800"/>
+              </a:spcAft>
+              <a:buSzPct val="100000"/>
+              <a:buChar char="•"/>
+            </a:pPr>
+            <a:r>
+              <a:rPr lang="en-US" sz="1350" dirty="0">
+                <a:solidFill>
+                  <a:srgbClr val="E5E7EB"/>
+                </a:solidFill>
+              </a:rPr>
+              <a:t>Road blocked (confirmed) → High, ~97%</a:t>
+            </a:r>
+            <a:endParaRPr lang="en-US" sz="1350" dirty="0"/>
+          </a:p>
+          <a:p>
+            <a:pPr marL="342900" indent="-342900">
+              <a:spcAft>
+                <a:spcPts val="800"/>
+              </a:spcAft>
+              <a:buSzPct val="100000"/>
+              <a:buChar char="•"/>
+            </a:pPr>
+            <a:r>
+              <a:rPr lang="en-US" sz="1350" dirty="0">
+                <a:solidFill>
+                  <a:srgbClr val="E5E7EB"/>
+                </a:solidFill>
+              </a:rPr>
+              <a:t>Lane closed → risk up by lost capacity</a:t>
+            </a:r>
+            <a:endParaRPr lang="en-US" sz="1350" dirty="0"/>
+          </a:p>
+          <a:p>
+            <a:pPr marL="342900" indent="-342900">
+              <a:spcAft>
+                <a:spcPts val="800"/>
+              </a:spcAft>
+              <a:buSzPct val="100000"/>
+              <a:buChar char="•"/>
+            </a:pPr>
+            <a:r>
+              <a:rPr lang="en-US" sz="1350" dirty="0">
+                <a:solidFill>
+                  <a:srgbClr val="E5E7EB"/>
+                </a:solidFill>
+              </a:rPr>
+              <a:t>Unverified rumour → keep forecast, ask a human</a:t>
+            </a:r>
+            <a:endParaRPr lang="en-US" sz="1350" dirty="0"/>
+          </a:p>
+          <a:p>
+            <a:pPr marL="342900" indent="-342900">
+              <a:spcAft>
+                <a:spcPts val="800"/>
+              </a:spcAft>
+              <a:buSzPct val="100000"/>
+              <a:buChar char="•"/>
+            </a:pPr>
+            <a:r>
+              <a:rPr lang="en-US" sz="1350" dirty="0">
+                <a:solidFill>
+                  <a:srgbClr val="E5E7EB"/>
+                </a:solidFill>
+              </a:rPr>
+              <a:t>Off the route or already over → ignore</a:t>
+            </a:r>
+            <a:endParaRPr lang="en-US" sz="1350" dirty="0"/>
           </a:p>
         </p:txBody>
       </p:sp>
